--- a/slides/antigravity_telecom_workshop_en.pptx
+++ b/slides/antigravity_telecom_workshop_en.pptx
@@ -16,6 +16,10 @@
     <p:sldId id="264" r:id="rId16"/>
     <p:sldId id="265" r:id="rId17"/>
     <p:sldId id="266" r:id="rId18"/>
+    <p:sldId id="267" r:id="rId19"/>
+    <p:sldId id="268" r:id="rId20"/>
+    <p:sldId id="269" r:id="rId21"/>
+    <p:sldId id="270" r:id="rId22"/>
   </p:sldIdLst>
   <p:sldSz cx="12191695" cy="6858000" type="screen4x3"/>
   <p:notesSz cx="6858000" cy="9144000"/>
@@ -582,7 +586,7 @@
           <a:lstStyle/>
           <a:p>
             <a:r>
-              <a:t>Explain the synergy between Antigravity subagents (which help you write the code) and Google ADK + A2A (the runtime multi-agent system you build, test locally in `adk web`, deploy with Terraform, and register in Gemini Enterprise).</a:t>
+              <a:t>This is a critical module for enterprise architects and CISOs. Show how Google Cloud governs Gemini Enterprise licenses &amp; audit logs in Layer 1, while Antigravity enforces sandboxing and deterministic PreToolUse hooks in Layer 2.</a:t>
             </a:r>
           </a:p>
         </p:txBody>
@@ -652,7 +656,287 @@
           <a:lstStyle/>
           <a:p>
             <a:r>
-              <a:t>Guide attendees through the Capstone! Have them test their multi-agent hierarchy in both the FastAPI dashboard, the ADK Development UI (`./scripts/run_adk_web.sh` at localhost:8080), and `./deploy/deploy_gcp.sh --dry-run` (or live GCP deploy!).</a:t>
+              <a:t>Review the Lab 3 Objectives and the FastMCP + Hook components attendees will build.</a:t>
+            </a:r>
+          </a:p>
+        </p:txBody>
+      </p:sp>
+      <p:sp>
+        <p:nvSpPr>
+          <p:cNvPr id="4" name="Slide Number Placeholder 3"/>
+          <p:cNvSpPr>
+            <a:spLocks noGrp="1"/>
+          </p:cNvSpPr>
+          <p:nvPr>
+            <p:ph type="sldNum" idx="5" sz="quarter"/>
+          </p:nvPr>
+        </p:nvSpPr>
+        <p:spPr/>
+      </p:sp>
+    </p:spTree>
+  </p:cSld>
+  <p:clrMapOvr>
+    <a:masterClrMapping/>
+  </p:clrMapOvr>
+</p:notes>
+</file>
+
+<file path=ppt/notesSlides/notesSlide12.xml><?xml version="1.0" encoding="utf-8"?>
+<p:notes xmlns:a="http://schemas.openxmlformats.org/drawingml/2006/main" xmlns:p="http://schemas.openxmlformats.org/presentationml/2006/main" xmlns:r="http://schemas.openxmlformats.org/officeDocument/2006/relationships">
+  <p:cSld>
+    <p:spTree>
+      <p:nvGrpSpPr>
+        <p:cNvPr id="1" name=""/>
+        <p:cNvGrpSpPr/>
+        <p:nvPr/>
+      </p:nvGrpSpPr>
+      <p:grpSpPr>
+        <a:xfrm>
+          <a:off x="0" y="0"/>
+          <a:ext cx="0" cy="0"/>
+          <a:chOff x="0" y="0"/>
+          <a:chExt cx="0" cy="0"/>
+        </a:xfrm>
+      </p:grpSpPr>
+      <p:sp>
+        <p:nvSpPr>
+          <p:cNvPr id="2" name="Slide Image Placeholder 1"/>
+          <p:cNvSpPr>
+            <a:spLocks noGrp="1"/>
+          </p:cNvSpPr>
+          <p:nvPr>
+            <p:ph type="sldImg" idx="2"/>
+          </p:nvPr>
+        </p:nvSpPr>
+        <p:spPr/>
+      </p:sp>
+      <p:sp>
+        <p:nvSpPr>
+          <p:cNvPr id="3" name="Notes Placeholder 2"/>
+          <p:cNvSpPr>
+            <a:spLocks noGrp="1"/>
+          </p:cNvSpPr>
+          <p:nvPr>
+            <p:ph type="body" idx="3" sz="quarter"/>
+          </p:nvPr>
+        </p:nvSpPr>
+        <p:spPr/>
+        <p:txBody>
+          <a:bodyPr/>
+          <a:lstStyle/>
+          <a:p>
+            <a:r>
+              <a:t>Keep this slide displayed during Lab 3 so attendees can follow Steps 1-5 and test the PreToolUse hook block.</a:t>
+            </a:r>
+          </a:p>
+        </p:txBody>
+      </p:sp>
+      <p:sp>
+        <p:nvSpPr>
+          <p:cNvPr id="4" name="Slide Number Placeholder 3"/>
+          <p:cNvSpPr>
+            <a:spLocks noGrp="1"/>
+          </p:cNvSpPr>
+          <p:nvPr>
+            <p:ph type="sldNum" idx="5" sz="quarter"/>
+          </p:nvPr>
+        </p:nvSpPr>
+        <p:spPr/>
+      </p:sp>
+    </p:spTree>
+  </p:cSld>
+  <p:clrMapOvr>
+    <a:masterClrMapping/>
+  </p:clrMapOvr>
+</p:notes>
+</file>
+
+<file path=ppt/notesSlides/notesSlide13.xml><?xml version="1.0" encoding="utf-8"?>
+<p:notes xmlns:a="http://schemas.openxmlformats.org/drawingml/2006/main" xmlns:p="http://schemas.openxmlformats.org/presentationml/2006/main" xmlns:r="http://schemas.openxmlformats.org/officeDocument/2006/relationships">
+  <p:cSld>
+    <p:spTree>
+      <p:nvGrpSpPr>
+        <p:cNvPr id="1" name=""/>
+        <p:cNvGrpSpPr/>
+        <p:nvPr/>
+      </p:nvGrpSpPr>
+      <p:grpSpPr>
+        <a:xfrm>
+          <a:off x="0" y="0"/>
+          <a:ext cx="0" cy="0"/>
+          <a:chOff x="0" y="0"/>
+          <a:chExt cx="0" cy="0"/>
+        </a:xfrm>
+      </p:grpSpPr>
+      <p:sp>
+        <p:nvSpPr>
+          <p:cNvPr id="2" name="Slide Image Placeholder 1"/>
+          <p:cNvSpPr>
+            <a:spLocks noGrp="1"/>
+          </p:cNvSpPr>
+          <p:nvPr>
+            <p:ph type="sldImg" idx="2"/>
+          </p:nvPr>
+        </p:nvSpPr>
+        <p:spPr/>
+      </p:sp>
+      <p:sp>
+        <p:nvSpPr>
+          <p:cNvPr id="3" name="Notes Placeholder 2"/>
+          <p:cNvSpPr>
+            <a:spLocks noGrp="1"/>
+          </p:cNvSpPr>
+          <p:nvPr>
+            <p:ph type="body" idx="3" sz="quarter"/>
+          </p:nvPr>
+        </p:nvSpPr>
+        <p:spPr/>
+        <p:txBody>
+          <a:bodyPr/>
+          <a:lstStyle/>
+          <a:p>
+            <a:r>
+              <a:t>Explain the synergy between Antigravity subagents (which help you write the code) and Google ADK + A2A (the runtime multi-agent system you build, test locally in `adk web`, deploy with Terraform, and register in Gemini Enterprise).</a:t>
+            </a:r>
+          </a:p>
+        </p:txBody>
+      </p:sp>
+      <p:sp>
+        <p:nvSpPr>
+          <p:cNvPr id="4" name="Slide Number Placeholder 3"/>
+          <p:cNvSpPr>
+            <a:spLocks noGrp="1"/>
+          </p:cNvSpPr>
+          <p:nvPr>
+            <p:ph type="sldNum" idx="5" sz="quarter"/>
+          </p:nvPr>
+        </p:nvSpPr>
+        <p:spPr/>
+      </p:sp>
+    </p:spTree>
+  </p:cSld>
+  <p:clrMapOvr>
+    <a:masterClrMapping/>
+  </p:clrMapOvr>
+</p:notes>
+</file>
+
+<file path=ppt/notesSlides/notesSlide14.xml><?xml version="1.0" encoding="utf-8"?>
+<p:notes xmlns:a="http://schemas.openxmlformats.org/drawingml/2006/main" xmlns:p="http://schemas.openxmlformats.org/presentationml/2006/main" xmlns:r="http://schemas.openxmlformats.org/officeDocument/2006/relationships">
+  <p:cSld>
+    <p:spTree>
+      <p:nvGrpSpPr>
+        <p:cNvPr id="1" name=""/>
+        <p:cNvGrpSpPr/>
+        <p:nvPr/>
+      </p:nvGrpSpPr>
+      <p:grpSpPr>
+        <a:xfrm>
+          <a:off x="0" y="0"/>
+          <a:ext cx="0" cy="0"/>
+          <a:chOff x="0" y="0"/>
+          <a:chExt cx="0" cy="0"/>
+        </a:xfrm>
+      </p:grpSpPr>
+      <p:sp>
+        <p:nvSpPr>
+          <p:cNvPr id="2" name="Slide Image Placeholder 1"/>
+          <p:cNvSpPr>
+            <a:spLocks noGrp="1"/>
+          </p:cNvSpPr>
+          <p:nvPr>
+            <p:ph type="sldImg" idx="2"/>
+          </p:nvPr>
+        </p:nvSpPr>
+        <p:spPr/>
+      </p:sp>
+      <p:sp>
+        <p:nvSpPr>
+          <p:cNvPr id="3" name="Notes Placeholder 2"/>
+          <p:cNvSpPr>
+            <a:spLocks noGrp="1"/>
+          </p:cNvSpPr>
+          <p:nvPr>
+            <p:ph type="body" idx="3" sz="quarter"/>
+          </p:nvPr>
+        </p:nvSpPr>
+        <p:spPr/>
+        <p:txBody>
+          <a:bodyPr/>
+          <a:lstStyle/>
+          <a:p>
+            <a:r>
+              <a:t>Introduce the Capstone Objectives and the 3 major deliverables: TMF622 Feasibility Engine, Google ADK + A2A Multi-Agent Orchestrator, and Terraform + Gemini Enterprise deployment.</a:t>
+            </a:r>
+          </a:p>
+        </p:txBody>
+      </p:sp>
+      <p:sp>
+        <p:nvSpPr>
+          <p:cNvPr id="4" name="Slide Number Placeholder 3"/>
+          <p:cNvSpPr>
+            <a:spLocks noGrp="1"/>
+          </p:cNvSpPr>
+          <p:nvPr>
+            <p:ph type="sldNum" idx="5" sz="quarter"/>
+          </p:nvPr>
+        </p:nvSpPr>
+        <p:spPr/>
+      </p:sp>
+    </p:spTree>
+  </p:cSld>
+  <p:clrMapOvr>
+    <a:masterClrMapping/>
+  </p:clrMapOvr>
+</p:notes>
+</file>
+
+<file path=ppt/notesSlides/notesSlide15.xml><?xml version="1.0" encoding="utf-8"?>
+<p:notes xmlns:a="http://schemas.openxmlformats.org/drawingml/2006/main" xmlns:p="http://schemas.openxmlformats.org/presentationml/2006/main" xmlns:r="http://schemas.openxmlformats.org/officeDocument/2006/relationships">
+  <p:cSld>
+    <p:spTree>
+      <p:nvGrpSpPr>
+        <p:cNvPr id="1" name=""/>
+        <p:cNvGrpSpPr/>
+        <p:nvPr/>
+      </p:nvGrpSpPr>
+      <p:grpSpPr>
+        <a:xfrm>
+          <a:off x="0" y="0"/>
+          <a:ext cx="0" cy="0"/>
+          <a:chOff x="0" y="0"/>
+          <a:chExt cx="0" cy="0"/>
+        </a:xfrm>
+      </p:grpSpPr>
+      <p:sp>
+        <p:nvSpPr>
+          <p:cNvPr id="2" name="Slide Image Placeholder 1"/>
+          <p:cNvSpPr>
+            <a:spLocks noGrp="1"/>
+          </p:cNvSpPr>
+          <p:nvPr>
+            <p:ph type="sldImg" idx="2"/>
+          </p:nvPr>
+        </p:nvSpPr>
+        <p:spPr/>
+      </p:sp>
+      <p:sp>
+        <p:nvSpPr>
+          <p:cNvPr id="3" name="Notes Placeholder 2"/>
+          <p:cNvSpPr>
+            <a:spLocks noGrp="1"/>
+          </p:cNvSpPr>
+          <p:nvPr>
+            <p:ph type="body" idx="3" sz="quarter"/>
+          </p:nvPr>
+        </p:nvSpPr>
+        <p:spPr/>
+        <p:txBody>
+          <a:bodyPr/>
+          <a:lstStyle/>
+          <a:p>
+            <a:r>
+              <a:t>Keep this slide projected during the Lab 4 Capstone as attendees test in `adk web` and validate Terraform.</a:t>
             </a:r>
           </a:p>
         </p:txBody>
@@ -722,7 +1006,7 @@
           <a:lstStyle/>
           <a:p>
             <a:r>
-              <a:t>Walk through the 4-hour progression. Emphasize that attendees use Antigravity itself to solve every lab using the curated prompts in PROMPTS.md.</a:t>
+              <a:t>Walk through the 4-hour progression. Emphasize that attendees use Antigravity itself to solve every lab using the curated prompts in PROMPTS.md and the printable PDF guides.</a:t>
             </a:r>
           </a:p>
         </p:txBody>
@@ -932,7 +1216,7 @@
           <a:lstStyle/>
           <a:p>
             <a:r>
-              <a:t>Launch Lab 1! Have attendees run install.sh, inspect the broken KPIs on the live Web Dashboard, and use the optimized prompts in PROMPTS.md to fix both bugs.</a:t>
+              <a:t>Review the Lab 1 Objectives and What Attendees Will Build before they run install.sh.</a:t>
             </a:r>
           </a:p>
         </p:txBody>
@@ -1002,7 +1286,7 @@
           <a:lstStyle/>
           <a:p>
             <a:r>
-              <a:t>Explain progressive disclosure: why 50 skills don't bloat the prompt because only YAML frontmatter is loaded until the agent activates a specific skill.</a:t>
+              <a:t>Keep this slide projected during Lab 1 so attendees have both the 5-step instructions and the copy-paste prompts visible at all times.</a:t>
             </a:r>
           </a:p>
         </p:txBody>
@@ -1072,7 +1356,7 @@
           <a:lstStyle/>
           <a:p>
             <a:r>
-              <a:t>Guide attendees through Lab 2. Show how Antigravity automatically respects GEMINI.md and invokes their custom SKILL.md.</a:t>
+              <a:t>Explain progressive disclosure: why 50 skills don't bloat the prompt because only YAML frontmatter is loaded until the agent activates a specific skill.</a:t>
             </a:r>
           </a:p>
         </p:txBody>
@@ -1142,7 +1426,7 @@
           <a:lstStyle/>
           <a:p>
             <a:r>
-              <a:t>This is a critical module for enterprise architects and CISOs. Show how Google Cloud governs Gemini Enterprise licenses &amp; audit logs in Layer 1, while Antigravity enforces sandboxing and deterministic PreToolUse hooks in Layer 2.</a:t>
+              <a:t>Introduce the Lab 2 Objectives and explain the two customization artifacts attendees will build.</a:t>
             </a:r>
           </a:p>
         </p:txBody>
@@ -1212,7 +1496,7 @@
           <a:lstStyle/>
           <a:p>
             <a:r>
-              <a:t>Have attendees build the FastMCP tools, wire mcp_config.json and hooks.json, and deliberately test a blocked command to see exit code 2 and the audit log in action.</a:t>
+              <a:t>Project this slide during Lab 2 so attendees can follow the 5 steps and copy-paste the prompts.</a:t>
             </a:r>
           </a:p>
         </p:txBody>
@@ -4387,7 +4671,7 @@
           <a:lstStyle/>
           <a:p>
             <a:pPr>
-              <a:defRPr sz="2400" b="1">
+              <a:defRPr sz="2250" b="1">
                 <a:solidFill>
                   <a:srgbClr val="F0F6FC"/>
                 </a:solidFill>
@@ -4423,7 +4707,7 @@
           <a:lstStyle/>
           <a:p>
             <a:pPr>
-              <a:defRPr sz="1350">
+              <a:defRPr sz="1300">
                 <a:solidFill>
                   <a:srgbClr val="8B949E"/>
                 </a:solidFill>
@@ -4556,8 +4840,8 @@
         </p:nvSpPr>
         <p:spPr>
           <a:xfrm>
-            <a:off x="6537960" y="1920240"/>
-            <a:ext cx="4919472" cy="3886200"/>
+            <a:off x="6510528" y="1901952"/>
+            <a:ext cx="4974336" cy="3922776"/>
           </a:xfrm>
           <a:prstGeom prst="rect">
             <a:avLst/>
@@ -4572,25 +4856,25 @@
           <a:p>
             <a:pPr>
               <a:spcAft>
-                <a:spcPts val="1000"/>
-              </a:spcAft>
-              <a:defRPr sz="1600" b="1">
-                <a:solidFill>
-                  <a:srgbClr val="20E3B2"/>
-                </a:solidFill>
-                <a:latin typeface="Arial"/>
-              </a:defRPr>
-            </a:pPr>
-            <a:r>
-              <a:t>Workshop Mission &amp; Industry Architecture</a:t>
-            </a:r>
-          </a:p>
-          <a:p>
-            <a:pPr>
-              <a:spcAft>
                 <a:spcPts val="800"/>
               </a:spcAft>
-              <a:defRPr sz="1220">
+              <a:defRPr sz="1500" b="1">
+                <a:solidFill>
+                  <a:srgbClr val="20E3B2"/>
+                </a:solidFill>
+                <a:latin typeface="Arial"/>
+              </a:defRPr>
+            </a:pPr>
+            <a:r>
+              <a:t>Workshop Mission &amp; Industry Architecture</a:t>
+            </a:r>
+          </a:p>
+          <a:p>
+            <a:pPr>
+              <a:spcAft>
+                <a:spcPts val="650"/>
+              </a:spcAft>
+              <a:defRPr sz="1130">
                 <a:solidFill>
                   <a:srgbClr val="F0F6FC"/>
                 </a:solidFill>
@@ -4604,9 +4888,9 @@
           <a:p>
             <a:pPr>
               <a:spcAft>
-                <a:spcPts val="800"/>
+                <a:spcPts val="650"/>
               </a:spcAft>
-              <a:defRPr sz="1220">
+              <a:defRPr sz="1130">
                 <a:solidFill>
                   <a:srgbClr val="F0F6FC"/>
                 </a:solidFill>
@@ -4620,9 +4904,9 @@
           <a:p>
             <a:pPr>
               <a:spcAft>
-                <a:spcPts val="800"/>
+                <a:spcPts val="650"/>
               </a:spcAft>
-              <a:defRPr sz="1220">
+              <a:defRPr sz="1130">
                 <a:solidFill>
                   <a:srgbClr val="F0F6FC"/>
                 </a:solidFill>
@@ -4636,9 +4920,9 @@
           <a:p>
             <a:pPr>
               <a:spcAft>
-                <a:spcPts val="800"/>
+                <a:spcPts val="650"/>
               </a:spcAft>
-              <a:defRPr sz="1220">
+              <a:defRPr sz="1130">
                 <a:solidFill>
                   <a:srgbClr val="F0F6FC"/>
                 </a:solidFill>
@@ -4652,9 +4936,9 @@
           <a:p>
             <a:pPr>
               <a:spcAft>
-                <a:spcPts val="800"/>
+                <a:spcPts val="650"/>
               </a:spcAft>
-              <a:defRPr sz="1220">
+              <a:defRPr sz="1130">
                 <a:solidFill>
                   <a:srgbClr val="F0F6FC"/>
                 </a:solidFill>
@@ -4743,7 +5027,7 @@
               </a:defRPr>
             </a:pPr>
             <a:r>
-              <a:t>Delivered by Tryolabs • 100% Local Laptop Execution + Terraform Cloud Run &amp; Gemini Enterprise Ready    |    Slide 1/11</a:t>
+              <a:t>Delivered by Tryolabs • 100% Local Laptop Execution + Terraform Cloud Run &amp; Gemini Enterprise Ready    |    Slide 1/15</a:t>
             </a:r>
           </a:p>
         </p:txBody>
@@ -4907,7 +5191,7 @@
               </a:defRPr>
             </a:pPr>
             <a:r>
-              <a:t>THEORY MODULE 4 (6 MINUTES) • SUBAGENTS, GOOGLE ADK, A2A &amp; TERRAFORM</a:t>
+              <a:t>THEORY MODULE 3 (6 MINUTES) • MCP, HOOKS &amp; ENTERPRISE GOVERNANCE</a:t>
             </a:r>
           </a:p>
         </p:txBody>
@@ -4935,7 +5219,7 @@
           <a:lstStyle/>
           <a:p>
             <a:pPr>
-              <a:defRPr sz="2400" b="1">
+              <a:defRPr sz="2250" b="1">
                 <a:solidFill>
                   <a:srgbClr val="F0F6FC"/>
                 </a:solidFill>
@@ -4943,7 +5227,7 @@
               </a:defRPr>
             </a:pPr>
             <a:r>
-              <a:t>Multi-Agent Systems with Google ADK, A2A Protocol &amp; Terraform</a:t>
+              <a:t>Live MCP Bridge, Deterministic Hooks &amp; Gemini Enterprise Governance</a:t>
             </a:r>
           </a:p>
         </p:txBody>
@@ -4971,7 +5255,7 @@
           <a:lstStyle/>
           <a:p>
             <a:pPr>
-              <a:defRPr sz="1350">
+              <a:defRPr sz="1300">
                 <a:solidFill>
                   <a:srgbClr val="8B949E"/>
                 </a:solidFill>
@@ -4979,14 +5263,14 @@
               </a:defRPr>
             </a:pPr>
             <a:r>
-              <a:t>Designing multi-agent architectures locally with `adk web` and deploying to Cloud Run &amp; Gemini Enterprise</a:t>
+              <a:t>Connecting live databases safely while proving end-to-end enterprise security in Google Cloud</a:t>
             </a:r>
           </a:p>
         </p:txBody>
       </p:sp>
       <p:pic>
         <p:nvPicPr>
-          <p:cNvPr id="8" name="Picture 7" descr="adk_a2a_cloud_en.png"/>
+          <p:cNvPr id="8" name="Picture 7" descr="governance_en.png"/>
           <p:cNvPicPr>
             <a:picLocks noChangeAspect="1"/>
           </p:cNvPicPr>
@@ -5068,7 +5352,7 @@
             <a:avLst/>
           </a:prstGeom>
           <a:solidFill>
-            <a:srgbClr val="20E3B2"/>
+            <a:srgbClr val="D29922"/>
           </a:solidFill>
           <a:ln>
             <a:noFill/>
@@ -5104,8 +5388,8 @@
         </p:nvSpPr>
         <p:spPr>
           <a:xfrm>
-            <a:off x="6537960" y="1920240"/>
-            <a:ext cx="4919472" cy="3886200"/>
+            <a:off x="6510528" y="1901952"/>
+            <a:ext cx="4974336" cy="3922776"/>
           </a:xfrm>
           <a:prstGeom prst="rect">
             <a:avLst/>
@@ -5120,25 +5404,25 @@
           <a:p>
             <a:pPr>
               <a:spcAft>
-                <a:spcPts val="1000"/>
-              </a:spcAft>
-              <a:defRPr sz="1600" b="1">
-                <a:solidFill>
-                  <a:srgbClr val="20E3B2"/>
-                </a:solidFill>
-                <a:latin typeface="Arial"/>
-              </a:defRPr>
-            </a:pPr>
-            <a:r>
-              <a:t>End-to-End Multi-Agent Architecture</a:t>
-            </a:r>
-          </a:p>
-          <a:p>
-            <a:pPr>
-              <a:spcAft>
                 <a:spcPts val="800"/>
               </a:spcAft>
-              <a:defRPr sz="1220">
+              <a:defRPr sz="1500" b="1">
+                <a:solidFill>
+                  <a:srgbClr val="D29922"/>
+                </a:solidFill>
+                <a:latin typeface="Arial"/>
+              </a:defRPr>
+            </a:pPr>
+            <a:r>
+              <a:t>2-Layer Enterprise Security &amp; Governance</a:t>
+            </a:r>
+          </a:p>
+          <a:p>
+            <a:pPr>
+              <a:spcAft>
+                <a:spcPts val="650"/>
+              </a:spcAft>
+              <a:defRPr sz="1130">
                 <a:solidFill>
                   <a:srgbClr val="F0F6FC"/>
                 </a:solidFill>
@@ -5146,15 +5430,15 @@
               </a:defRPr>
             </a:pPr>
             <a:r>
-              <a:t>▸  Antigravity Subagents (/teamwork, /boost, /grill-me): Delegate parallel coding &amp; research tasks inside Antigravity to build your application faster</a:t>
+              <a:t>▸  Layer 1 — Google Cloud &amp; Gemini Enterprise (Instructor Live Demo): Cloud IAM (roles/cloudaicompanion.user), Cloud Audit Logs (cloudaicompanion.googleapis.com), VPC-SC perimeters, Zero Data Retention / No Training on customer code</a:t>
             </a:r>
           </a:p>
           <a:p>
             <a:pPr>
               <a:spcAft>
-                <a:spcPts val="800"/>
+                <a:spcPts val="650"/>
               </a:spcAft>
-              <a:defRPr sz="1220">
+              <a:defRPr sz="1130">
                 <a:solidFill>
                   <a:srgbClr val="F0F6FC"/>
                 </a:solidFill>
@@ -5162,15 +5446,15 @@
               </a:defRPr>
             </a:pPr>
             <a:r>
-              <a:t>▸  Google ADK (Agent Development Kit): Build domain multi-agent hierarchies (`root_agent` orchestrating Technical &amp; Commercial specialist `LlmAgent`s with typed Python tools)</a:t>
+              <a:t>▸  Layer 2 — Antigravity Client Security: Tool Execution Policy (strict / request-review / proceed-in-sandbox), OS Terminal Sandbox, Non-Workspace File Access (deny), Command &amp; Browser Allow/Denylists</a:t>
             </a:r>
           </a:p>
           <a:p>
             <a:pPr>
               <a:spcAft>
-                <a:spcPts val="800"/>
+                <a:spcPts val="650"/>
               </a:spcAft>
-              <a:defRPr sz="1220">
+              <a:defRPr sz="1130">
                 <a:solidFill>
                   <a:srgbClr val="F0F6FC"/>
                 </a:solidFill>
@@ -5178,15 +5462,15 @@
               </a:defRPr>
             </a:pPr>
             <a:r>
-              <a:t>▸  Local Testing via ADK Dev UI (`adk web`): Launch `./scripts/run_adk_web.sh` (http://localhost:8080) to interactively inspect multi-agent event traces, tool calls, and session state!</a:t>
+              <a:t>▸  Live Context via FastMCP (.agents/mcp_config.json): Exposes strongly-typed Python tools querying live SQLite &amp; telemetry over stdio/SSE</a:t>
             </a:r>
           </a:p>
           <a:p>
             <a:pPr>
               <a:spcAft>
-                <a:spcPts val="800"/>
+                <a:spcPts val="650"/>
               </a:spcAft>
-              <a:defRPr sz="1220">
+              <a:defRPr sz="1130">
                 <a:solidFill>
                   <a:srgbClr val="F0F6FC"/>
                 </a:solidFill>
@@ -5194,23 +5478,7 @@
               </a:defRPr>
             </a:pPr>
             <a:r>
-              <a:t>▸  A2A (Agent2Agent) Protocol: Publish `GET /.well-known/agent.json` (Agent Card) and `POST /api/v1/a2a` (JSON-RPC 2.0 `tasks/send`) for cross-agent interoperability</a:t>
-            </a:r>
-          </a:p>
-          <a:p>
-            <a:pPr>
-              <a:spcAft>
-                <a:spcPts val="800"/>
-              </a:spcAft>
-              <a:defRPr sz="1220">
-                <a:solidFill>
-                  <a:srgbClr val="F0F6FC"/>
-                </a:solidFill>
-                <a:latin typeface="Arial"/>
-              </a:defRPr>
-            </a:pPr>
-            <a:r>
-              <a:t>▸  Terraform + Gemini Enterprise: Provision Cloud Run v2 &amp; IAM via `infra/terraform/` (`deploy_gcp.sh`) and register your A2A agent into Gemini Enterprise (`register_gemini_enterprise_agent.sh`)</a:t>
+              <a:t>▸  Deterministic Lifecycle Hooks (.agents/hooks.json): PreToolUse script inspects tool JSON on stdin; exit code 2 hard-blocks policy violations and writes an immutable audit log!</a:t>
             </a:r>
           </a:p>
         </p:txBody>
@@ -5291,7 +5559,7 @@
               </a:defRPr>
             </a:pPr>
             <a:r>
-              <a:t>Develop &amp; test 100% locally with `adk web` + `pytest`, then deploy to Google Cloud &amp; Gemini Enterprise with Terraform!    |    Slide 10/11</a:t>
+              <a:t>Instructor Demo: Show Cloud Audit Logs in GCP Console + trigger a deterministic PreToolUse Hook block locally!    |    Slide 10/15</a:t>
             </a:r>
           </a:p>
         </p:txBody>
@@ -5455,7 +5723,7 @@
               </a:defRPr>
             </a:pPr>
             <a:r>
-              <a:t>HANDS-ON LAB 4 CAPSTONE (55 MINUTES) • ADK, A2A &amp; CLOUD DEPLOYMENT</a:t>
+              <a:t>HANDS-ON LAB 3 (PART 1/2) • OBJECTIVES &amp; WHAT YOU WILL BUILD</a:t>
             </a:r>
           </a:p>
         </p:txBody>
@@ -5483,7 +5751,7 @@
           <a:lstStyle/>
           <a:p>
             <a:pPr>
-              <a:defRPr sz="2400" b="1">
+              <a:defRPr sz="2250" b="1">
                 <a:solidFill>
                   <a:srgbClr val="F0F6FC"/>
                 </a:solidFill>
@@ -5491,7 +5759,7 @@
               </a:defRPr>
             </a:pPr>
             <a:r>
-              <a:t>Lab 4 Capstone: Ship the Multi-Agent ADK + A2A System</a:t>
+              <a:t>Lab 3: FastMCP Server &amp; Deterministic Hooks — Objectives &amp; Build Spec</a:t>
             </a:r>
           </a:p>
         </p:txBody>
@@ -5519,7 +5787,7 @@
           <a:lstStyle/>
           <a:p>
             <a:pPr>
-              <a:defRPr sz="1350">
+              <a:defRPr sz="1300">
                 <a:solidFill>
                   <a:srgbClr val="8B949E"/>
                 </a:solidFill>
@@ -5527,14 +5795,14 @@
               </a:defRPr>
             </a:pPr>
             <a:r>
-              <a:t>Use Antigravity (/grill-me, /boost, Subagents) to build, test in `adk web`, and validate Terraform deployment</a:t>
+              <a:t>55 Minutes • Printable PDF Guide: labs/lab-03-mcp-and-hooks/LAB_03_INSTRUCTIONS_EN.pdf</a:t>
             </a:r>
           </a:p>
         </p:txBody>
       </p:sp>
       <p:pic>
         <p:nvPicPr>
-          <p:cNvPr id="8" name="Picture 7" descr="adk_a2a_cloud_en.png"/>
+          <p:cNvPr id="8" name="Picture 7" descr="governance_en.png"/>
           <p:cNvPicPr>
             <a:picLocks noChangeAspect="1"/>
           </p:cNvPicPr>
@@ -5616,7 +5884,7 @@
             <a:avLst/>
           </a:prstGeom>
           <a:solidFill>
-            <a:srgbClr val="20E3B2"/>
+            <a:srgbClr val="BC8CFF"/>
           </a:solidFill>
           <a:ln>
             <a:noFill/>
@@ -5652,8 +5920,8 @@
         </p:nvSpPr>
         <p:spPr>
           <a:xfrm>
-            <a:off x="6537960" y="1920240"/>
-            <a:ext cx="4919472" cy="3886200"/>
+            <a:off x="6510528" y="1901952"/>
+            <a:ext cx="4974336" cy="3922776"/>
           </a:xfrm>
           <a:prstGeom prst="rect">
             <a:avLst/>
@@ -5668,25 +5936,25 @@
           <a:p>
             <a:pPr>
               <a:spcAft>
-                <a:spcPts val="1000"/>
-              </a:spcAft>
-              <a:defRPr sz="1600" b="1">
-                <a:solidFill>
-                  <a:srgbClr val="20E3B2"/>
-                </a:solidFill>
-                <a:latin typeface="Arial"/>
-              </a:defRPr>
-            </a:pPr>
-            <a:r>
-              <a:t>Lab 4 Walkthrough &amp; Optimized Prompts</a:t>
-            </a:r>
-          </a:p>
-          <a:p>
-            <a:pPr>
-              <a:spcAft>
                 <a:spcPts val="800"/>
               </a:spcAft>
-              <a:defRPr sz="1220">
+              <a:defRPr sz="1500" b="1">
+                <a:solidFill>
+                  <a:srgbClr val="BC8CFF"/>
+                </a:solidFill>
+                <a:latin typeface="Arial"/>
+              </a:defRPr>
+            </a:pPr>
+            <a:r>
+              <a:t>Lab 3 Objectives &amp; What You Will Build</a:t>
+            </a:r>
+          </a:p>
+          <a:p>
+            <a:pPr>
+              <a:spcAft>
+                <a:spcPts val="650"/>
+              </a:spcAft>
+              <a:defRPr sz="1130">
                 <a:solidFill>
                   <a:srgbClr val="F0F6FC"/>
                 </a:solidFill>
@@ -5694,15 +5962,15 @@
               </a:defRPr>
             </a:pPr>
             <a:r>
-              <a:t>▸  Setup: Run ./labs/lab-04-multi-agent-capstone/install.sh</a:t>
+              <a:t>▸  Objective 1 (Live Database Grounding via MCP): Expose read-only SQLite OSS/BSS telemetry and contract tools to Antigravity over Model Context Protocol (`FastMCP`).</a:t>
             </a:r>
           </a:p>
           <a:p>
             <a:pPr>
               <a:spcAft>
-                <a:spcPts val="800"/>
+                <a:spcPts val="650"/>
               </a:spcAft>
-              <a:defRPr sz="1220">
+              <a:defRPr sz="1130">
                 <a:solidFill>
                   <a:srgbClr val="F0F6FC"/>
                 </a:solidFill>
@@ -5710,15 +5978,15 @@
               </a:defRPr>
             </a:pPr>
             <a:r>
-              <a:t>▸  Task 1 (Google ADK Hierarchy): Implement @src/agents/adk_a2a_orchestrator.py &amp; @adk_agents/telecom_nexus/agent.py (RANSliceCapacityAgent + BSSCommercialSLAAgent -&gt; TelecomNexusOrchestratorAgent)</a:t>
+              <a:t>▸  Objective 2 (Deterministic Security &amp; CPNI Compliance): Enforce PII/CPNI masking (`3104***0001`) and hard-block destructive SQL (`DROP`/`DELETE`) before tool execution via `PreToolUse` hooks.</a:t>
             </a:r>
           </a:p>
           <a:p>
             <a:pPr>
               <a:spcAft>
-                <a:spcPts val="800"/>
+                <a:spcPts val="650"/>
               </a:spcAft>
-              <a:defRPr sz="1220">
+              <a:defRPr sz="1130">
                 <a:solidFill>
                   <a:srgbClr val="F0F6FC"/>
                 </a:solidFill>
@@ -5726,15 +5994,15 @@
               </a:defRPr>
             </a:pPr>
             <a:r>
-              <a:t>▸  Task 2 (A2A Protocol): Expose GET /.well-known/agent.json &amp; POST /api/v1/a2a (JSON-RPC 2.0 tasks/send) + TMF622 feasibility &amp; slice remediation routes</a:t>
+              <a:t>▸  What You Will Build #1 (`mcp_server/telecom_mcp.py` &amp; `.agents/mcp_config.json`): 4 `@mcp.tool()` functions (`query_ran_cell_health`, `calculate_contract_penalty_exposure`, `inspect_unbilled_cdrs`, `evaluate_slice_capacity`).</a:t>
             </a:r>
           </a:p>
           <a:p>
             <a:pPr>
               <a:spcAft>
-                <a:spcPts val="800"/>
+                <a:spcPts val="650"/>
               </a:spcAft>
-              <a:defRPr sz="1220">
+              <a:defRPr sz="1130">
                 <a:solidFill>
                   <a:srgbClr val="F0F6FC"/>
                 </a:solidFill>
@@ -5742,15 +6010,15 @@
               </a:defRPr>
             </a:pPr>
             <a:r>
-              <a:t>▸  Task 3 (Local ADK Dev UI): Run ./scripts/run_adk_web.sh to test interactively in `adk web` (http://localhost:8080) &amp; run ./labs/lab-04-multi-agent-capstone/verify.sh</a:t>
+              <a:t>▸  What You Will Build #2 (`.agents/hooks.json` &amp; `scripts/audit_hook.py`): Deterministic `PreToolUse` &amp; `PostToolUse` lifecycle gates returning exit code `2` on policy violations and writing `data/logs/hook_audit.log`.</a:t>
             </a:r>
           </a:p>
           <a:p>
             <a:pPr>
               <a:spcAft>
-                <a:spcPts val="800"/>
+                <a:spcPts val="650"/>
               </a:spcAft>
-              <a:defRPr sz="1220">
+              <a:defRPr sz="1130">
                 <a:solidFill>
                   <a:srgbClr val="F0F6FC"/>
                 </a:solidFill>
@@ -5758,7 +6026,7 @@
               </a:defRPr>
             </a:pPr>
             <a:r>
-              <a:t>▸  Task 4 (Terraform &amp; Gemini Enterprise): Validate with ./deploy/deploy_gcp.sh --dry-run, deploy to Cloud Run via Terraform, and connect via ./deploy/register_gemini_enterprise_agent.sh!</a:t>
+              <a:t>▸  Deliverable &amp; Verification: Pass all 6 MCP &amp; Hook security tests in `./labs/lab-03-mcp-and-hooks/verify.sh`.</a:t>
             </a:r>
           </a:p>
         </p:txBody>
@@ -5839,7 +6107,2533 @@
               </a:defRPr>
             </a:pPr>
             <a:r>
-              <a:t>Congratulations! Run ./labs/lab-04-multi-agent-capstone/verify.sh to see your full test suite pass 100%!    |    Slide 11/11</a:t>
+              <a:t>Delivered by Tryolabs • Full printable guide: LAB_03_INSTRUCTIONS_EN.pdf    |    Slide 11/15</a:t>
+            </a:r>
+          </a:p>
+        </p:txBody>
+      </p:sp>
+    </p:spTree>
+  </p:cSld>
+  <p:clrMapOvr>
+    <a:masterClrMapping/>
+  </p:clrMapOvr>
+</p:sld>
+</file>
+
+<file path=ppt/slides/slide12.xml><?xml version="1.0" encoding="utf-8"?>
+<p:sld xmlns:a="http://schemas.openxmlformats.org/drawingml/2006/main" xmlns:p="http://schemas.openxmlformats.org/presentationml/2006/main" xmlns:r="http://schemas.openxmlformats.org/officeDocument/2006/relationships">
+  <p:cSld>
+    <p:spTree>
+      <p:nvGrpSpPr>
+        <p:cNvPr id="1" name=""/>
+        <p:cNvGrpSpPr/>
+        <p:nvPr/>
+      </p:nvGrpSpPr>
+      <p:grpSpPr/>
+      <p:sp>
+        <p:nvSpPr>
+          <p:cNvPr id="2" name="Rectangle 1"/>
+          <p:cNvSpPr/>
+          <p:nvPr/>
+        </p:nvSpPr>
+        <p:spPr>
+          <a:xfrm>
+            <a:off x="0" y="0"/>
+            <a:ext cx="12191695" cy="6858000"/>
+          </a:xfrm>
+          <a:prstGeom prst="rect">
+            <a:avLst/>
+          </a:prstGeom>
+          <a:solidFill>
+            <a:srgbClr val="0D1117"/>
+          </a:solidFill>
+          <a:ln>
+            <a:noFill/>
+          </a:ln>
+        </p:spPr>
+        <p:style>
+          <a:lnRef idx="1">
+            <a:schemeClr val="accent1"/>
+          </a:lnRef>
+          <a:fillRef idx="3">
+            <a:schemeClr val="accent1"/>
+          </a:fillRef>
+          <a:effectRef idx="2">
+            <a:schemeClr val="accent1"/>
+          </a:effectRef>
+          <a:fontRef idx="minor">
+            <a:schemeClr val="lt1"/>
+          </a:fontRef>
+        </p:style>
+        <p:txBody>
+          <a:bodyPr rtlCol="0" anchor="ctr"/>
+          <a:lstStyle/>
+          <a:p>
+            <a:pPr algn="ctr"/>
+          </a:p>
+        </p:txBody>
+      </p:sp>
+      <p:sp>
+        <p:nvSpPr>
+          <p:cNvPr id="3" name="Rectangle 2"/>
+          <p:cNvSpPr/>
+          <p:nvPr/>
+        </p:nvSpPr>
+        <p:spPr>
+          <a:xfrm>
+            <a:off x="0" y="0"/>
+            <a:ext cx="12191695" cy="73152"/>
+          </a:xfrm>
+          <a:prstGeom prst="rect">
+            <a:avLst/>
+          </a:prstGeom>
+          <a:solidFill>
+            <a:srgbClr val="20E3B2"/>
+          </a:solidFill>
+          <a:ln>
+            <a:noFill/>
+          </a:ln>
+        </p:spPr>
+        <p:style>
+          <a:lnRef idx="1">
+            <a:schemeClr val="accent1"/>
+          </a:lnRef>
+          <a:fillRef idx="3">
+            <a:schemeClr val="accent1"/>
+          </a:fillRef>
+          <a:effectRef idx="2">
+            <a:schemeClr val="accent1"/>
+          </a:effectRef>
+          <a:fontRef idx="minor">
+            <a:schemeClr val="lt1"/>
+          </a:fontRef>
+        </p:style>
+        <p:txBody>
+          <a:bodyPr rtlCol="0" anchor="ctr"/>
+          <a:lstStyle/>
+          <a:p>
+            <a:pPr algn="ctr"/>
+          </a:p>
+        </p:txBody>
+      </p:sp>
+      <p:pic>
+        <p:nvPicPr>
+          <p:cNvPr id="4" name="Picture 3" descr="tryolabs-logo-dark-bg.png"/>
+          <p:cNvPicPr>
+            <a:picLocks noChangeAspect="1"/>
+          </p:cNvPicPr>
+          <p:nvPr/>
+        </p:nvPicPr>
+        <p:blipFill>
+          <a:blip r:embed="rId2"/>
+          <a:stretch>
+            <a:fillRect/>
+          </a:stretch>
+        </p:blipFill>
+        <p:spPr>
+          <a:xfrm>
+            <a:off x="9829800" y="256032"/>
+            <a:ext cx="1874519" cy="417876"/>
+          </a:xfrm>
+          <a:prstGeom prst="rect">
+            <a:avLst/>
+          </a:prstGeom>
+        </p:spPr>
+      </p:pic>
+      <p:sp>
+        <p:nvSpPr>
+          <p:cNvPr id="5" name="TextBox 4"/>
+          <p:cNvSpPr txBox="1"/>
+          <p:nvPr/>
+        </p:nvSpPr>
+        <p:spPr>
+          <a:xfrm>
+            <a:off x="502920" y="256032"/>
+            <a:ext cx="9144000" cy="320040"/>
+          </a:xfrm>
+          <a:prstGeom prst="rect">
+            <a:avLst/>
+          </a:prstGeom>
+          <a:noFill/>
+        </p:spPr>
+        <p:txBody>
+          <a:bodyPr wrap="square">
+            <a:spAutoFit/>
+          </a:bodyPr>
+          <a:lstStyle/>
+          <a:p>
+            <a:pPr>
+              <a:defRPr sz="1050" b="1">
+                <a:solidFill>
+                  <a:srgbClr val="20E3B2"/>
+                </a:solidFill>
+                <a:latin typeface="Arial"/>
+              </a:defRPr>
+            </a:pPr>
+            <a:r>
+              <a:t>HANDS-ON LAB 3 (PART 2/2) • STEP-BY-STEP INSTRUCTIONS &amp; PROMPTS</a:t>
+            </a:r>
+          </a:p>
+        </p:txBody>
+      </p:sp>
+      <p:sp>
+        <p:nvSpPr>
+          <p:cNvPr id="6" name="TextBox 5"/>
+          <p:cNvSpPr txBox="1"/>
+          <p:nvPr/>
+        </p:nvSpPr>
+        <p:spPr>
+          <a:xfrm>
+            <a:off x="502920" y="566928"/>
+            <a:ext cx="9235440" cy="594360"/>
+          </a:xfrm>
+          <a:prstGeom prst="rect">
+            <a:avLst/>
+          </a:prstGeom>
+          <a:noFill/>
+        </p:spPr>
+        <p:txBody>
+          <a:bodyPr wrap="square">
+            <a:spAutoFit/>
+          </a:bodyPr>
+          <a:lstStyle/>
+          <a:p>
+            <a:pPr>
+              <a:defRPr sz="2250" b="1">
+                <a:solidFill>
+                  <a:srgbClr val="F0F6FC"/>
+                </a:solidFill>
+                <a:latin typeface="Arial"/>
+              </a:defRPr>
+            </a:pPr>
+            <a:r>
+              <a:t>Lab 3 Instructions &amp; Copy-Paste Antigravity Prompts</a:t>
+            </a:r>
+          </a:p>
+        </p:txBody>
+      </p:sp>
+      <p:sp>
+        <p:nvSpPr>
+          <p:cNvPr id="7" name="TextBox 6"/>
+          <p:cNvSpPr txBox="1"/>
+          <p:nvPr/>
+        </p:nvSpPr>
+        <p:spPr>
+          <a:xfrm>
+            <a:off x="502920" y="1207008"/>
+            <a:ext cx="11155680" cy="411480"/>
+          </a:xfrm>
+          <a:prstGeom prst="rect">
+            <a:avLst/>
+          </a:prstGeom>
+          <a:noFill/>
+        </p:spPr>
+        <p:txBody>
+          <a:bodyPr wrap="square">
+            <a:spAutoFit/>
+          </a:bodyPr>
+          <a:lstStyle/>
+          <a:p>
+            <a:pPr>
+              <a:defRPr sz="1300">
+                <a:solidFill>
+                  <a:srgbClr val="8B949E"/>
+                </a:solidFill>
+                <a:latin typeface="Arial"/>
+              </a:defRPr>
+            </a:pPr>
+            <a:r>
+              <a:t>Follow Steps 1–5 on the left and copy-paste prompts from labs/lab-03-mcp-and-hooks/PROMPTS.md</a:t>
+            </a:r>
+          </a:p>
+        </p:txBody>
+      </p:sp>
+      <p:sp>
+        <p:nvSpPr>
+          <p:cNvPr id="8" name="Rounded Rectangle 7"/>
+          <p:cNvSpPr/>
+          <p:nvPr/>
+        </p:nvSpPr>
+        <p:spPr>
+          <a:xfrm>
+            <a:off x="502920" y="1755648"/>
+            <a:ext cx="5504688" cy="4160520"/>
+          </a:xfrm>
+          <a:prstGeom prst="roundRect">
+            <a:avLst/>
+          </a:prstGeom>
+          <a:solidFill>
+            <a:srgbClr val="161B22"/>
+          </a:solidFill>
+          <a:ln w="19050">
+            <a:solidFill>
+              <a:srgbClr val="30363D"/>
+            </a:solidFill>
+          </a:ln>
+        </p:spPr>
+        <p:style>
+          <a:lnRef idx="1">
+            <a:schemeClr val="accent1"/>
+          </a:lnRef>
+          <a:fillRef idx="3">
+            <a:schemeClr val="accent1"/>
+          </a:fillRef>
+          <a:effectRef idx="2">
+            <a:schemeClr val="accent1"/>
+          </a:effectRef>
+          <a:fontRef idx="minor">
+            <a:schemeClr val="lt1"/>
+          </a:fontRef>
+        </p:style>
+        <p:txBody>
+          <a:bodyPr rtlCol="0" anchor="ctr"/>
+          <a:lstStyle/>
+          <a:p>
+            <a:pPr algn="ctr"/>
+          </a:p>
+        </p:txBody>
+      </p:sp>
+      <p:sp>
+        <p:nvSpPr>
+          <p:cNvPr id="9" name="Rectangle 8"/>
+          <p:cNvSpPr/>
+          <p:nvPr/>
+        </p:nvSpPr>
+        <p:spPr>
+          <a:xfrm>
+            <a:off x="502920" y="1755648"/>
+            <a:ext cx="5504688" cy="64008"/>
+          </a:xfrm>
+          <a:prstGeom prst="rect">
+            <a:avLst/>
+          </a:prstGeom>
+          <a:solidFill>
+            <a:srgbClr val="BC8CFF"/>
+          </a:solidFill>
+          <a:ln>
+            <a:noFill/>
+          </a:ln>
+        </p:spPr>
+        <p:style>
+          <a:lnRef idx="1">
+            <a:schemeClr val="accent1"/>
+          </a:lnRef>
+          <a:fillRef idx="3">
+            <a:schemeClr val="accent1"/>
+          </a:fillRef>
+          <a:effectRef idx="2">
+            <a:schemeClr val="accent1"/>
+          </a:effectRef>
+          <a:fontRef idx="minor">
+            <a:schemeClr val="lt1"/>
+          </a:fontRef>
+        </p:style>
+        <p:txBody>
+          <a:bodyPr rtlCol="0" anchor="ctr"/>
+          <a:lstStyle/>
+          <a:p>
+            <a:pPr algn="ctr"/>
+          </a:p>
+        </p:txBody>
+      </p:sp>
+      <p:sp>
+        <p:nvSpPr>
+          <p:cNvPr id="10" name="TextBox 9"/>
+          <p:cNvSpPr txBox="1"/>
+          <p:nvPr/>
+        </p:nvSpPr>
+        <p:spPr>
+          <a:xfrm>
+            <a:off x="704088" y="1901952"/>
+            <a:ext cx="5102352" cy="3922776"/>
+          </a:xfrm>
+          <a:prstGeom prst="rect">
+            <a:avLst/>
+          </a:prstGeom>
+          <a:noFill/>
+        </p:spPr>
+        <p:txBody>
+          <a:bodyPr wrap="square">
+            <a:spAutoFit/>
+          </a:bodyPr>
+          <a:lstStyle/>
+          <a:p>
+            <a:pPr>
+              <a:spcAft>
+                <a:spcPts val="800"/>
+              </a:spcAft>
+              <a:defRPr sz="1500" b="1">
+                <a:solidFill>
+                  <a:srgbClr val="BC8CFF"/>
+                </a:solidFill>
+                <a:latin typeface="Arial"/>
+              </a:defRPr>
+            </a:pPr>
+            <a:r>
+              <a:t>Step-by-Step Lab 3 Instructions</a:t>
+            </a:r>
+          </a:p>
+          <a:p>
+            <a:pPr>
+              <a:spcAft>
+                <a:spcPts val="650"/>
+              </a:spcAft>
+              <a:defRPr sz="1130">
+                <a:solidFill>
+                  <a:srgbClr val="F0F6FC"/>
+                </a:solidFill>
+                <a:latin typeface="Arial"/>
+              </a:defRPr>
+            </a:pPr>
+            <a:r>
+              <a:t>▸  Step 1 (Initialize Lab 03): Run `./labs/lab-03-mcp-and-hooks/install.sh` (auto-applies Labs 01–02).</a:t>
+            </a:r>
+          </a:p>
+          <a:p>
+            <a:pPr>
+              <a:spcAft>
+                <a:spcPts val="650"/>
+              </a:spcAft>
+              <a:defRPr sz="1130">
+                <a:solidFill>
+                  <a:srgbClr val="F0F6FC"/>
+                </a:solidFill>
+                <a:latin typeface="Arial"/>
+              </a:defRPr>
+            </a:pPr>
+            <a:r>
+              <a:t>▸  Step 2 (Complete `mcp_server/telecom_mcp.py`): Implement `calculate_contract_penalty_exposure`, `inspect_unbilled_cdrs` (masking `imsi`/`msisdn` via `_mask_cpni`), and `evaluate_slice_capacity`.</a:t>
+            </a:r>
+          </a:p>
+          <a:p>
+            <a:pPr>
+              <a:spcAft>
+                <a:spcPts val="650"/>
+              </a:spcAft>
+              <a:defRPr sz="1130">
+                <a:solidFill>
+                  <a:srgbClr val="F0F6FC"/>
+                </a:solidFill>
+                <a:latin typeface="Arial"/>
+              </a:defRPr>
+            </a:pPr>
+            <a:r>
+              <a:t>▸  Step 3 (Register `.agents/mcp_config.json`): Configure `telecom-nexus-mcp` invoking `./.venv/bin/python mcp_server/telecom_mcp.py` over stdio.</a:t>
+            </a:r>
+          </a:p>
+          <a:p>
+            <a:pPr>
+              <a:spcAft>
+                <a:spcPts val="650"/>
+              </a:spcAft>
+              <a:defRPr sz="1130">
+                <a:solidFill>
+                  <a:srgbClr val="F0F6FC"/>
+                </a:solidFill>
+                <a:latin typeface="Arial"/>
+              </a:defRPr>
+            </a:pPr>
+            <a:r>
+              <a:t>▸  Step 4 (Configure `.agents/hooks.json`): Wire `PreToolUse` and `PostToolUse` to `scripts/audit_hook.py` (blocks `DROP`/`TRUNCATE`/`DELETE` with exit code `2`).</a:t>
+            </a:r>
+          </a:p>
+          <a:p>
+            <a:pPr>
+              <a:spcAft>
+                <a:spcPts val="650"/>
+              </a:spcAft>
+              <a:defRPr sz="1130">
+                <a:solidFill>
+                  <a:srgbClr val="F0F6FC"/>
+                </a:solidFill>
+                <a:latin typeface="Arial"/>
+              </a:defRPr>
+            </a:pPr>
+            <a:r>
+              <a:t>▸  Step 5 (Verify): Run `./labs/lab-03-mcp-and-hooks/verify.sh` (`6 passed` + audit log verified).</a:t>
+            </a:r>
+          </a:p>
+        </p:txBody>
+      </p:sp>
+      <p:sp>
+        <p:nvSpPr>
+          <p:cNvPr id="11" name="Rounded Rectangle 10"/>
+          <p:cNvSpPr/>
+          <p:nvPr/>
+        </p:nvSpPr>
+        <p:spPr>
+          <a:xfrm>
+            <a:off x="6199632" y="1755648"/>
+            <a:ext cx="5486400" cy="4160520"/>
+          </a:xfrm>
+          <a:prstGeom prst="roundRect">
+            <a:avLst/>
+          </a:prstGeom>
+          <a:solidFill>
+            <a:srgbClr val="161B22"/>
+          </a:solidFill>
+          <a:ln w="19050">
+            <a:solidFill>
+              <a:srgbClr val="30363D"/>
+            </a:solidFill>
+          </a:ln>
+        </p:spPr>
+        <p:style>
+          <a:lnRef idx="1">
+            <a:schemeClr val="accent1"/>
+          </a:lnRef>
+          <a:fillRef idx="3">
+            <a:schemeClr val="accent1"/>
+          </a:fillRef>
+          <a:effectRef idx="2">
+            <a:schemeClr val="accent1"/>
+          </a:effectRef>
+          <a:fontRef idx="minor">
+            <a:schemeClr val="lt1"/>
+          </a:fontRef>
+        </p:style>
+        <p:txBody>
+          <a:bodyPr rtlCol="0" anchor="ctr"/>
+          <a:lstStyle/>
+          <a:p>
+            <a:pPr algn="ctr"/>
+          </a:p>
+        </p:txBody>
+      </p:sp>
+      <p:sp>
+        <p:nvSpPr>
+          <p:cNvPr id="12" name="Rectangle 11"/>
+          <p:cNvSpPr/>
+          <p:nvPr/>
+        </p:nvSpPr>
+        <p:spPr>
+          <a:xfrm>
+            <a:off x="6199632" y="1755648"/>
+            <a:ext cx="5486400" cy="64008"/>
+          </a:xfrm>
+          <a:prstGeom prst="rect">
+            <a:avLst/>
+          </a:prstGeom>
+          <a:solidFill>
+            <a:srgbClr val="D29922"/>
+          </a:solidFill>
+          <a:ln>
+            <a:noFill/>
+          </a:ln>
+        </p:spPr>
+        <p:style>
+          <a:lnRef idx="1">
+            <a:schemeClr val="accent1"/>
+          </a:lnRef>
+          <a:fillRef idx="3">
+            <a:schemeClr val="accent1"/>
+          </a:fillRef>
+          <a:effectRef idx="2">
+            <a:schemeClr val="accent1"/>
+          </a:effectRef>
+          <a:fontRef idx="minor">
+            <a:schemeClr val="lt1"/>
+          </a:fontRef>
+        </p:style>
+        <p:txBody>
+          <a:bodyPr rtlCol="0" anchor="ctr"/>
+          <a:lstStyle/>
+          <a:p>
+            <a:pPr algn="ctr"/>
+          </a:p>
+        </p:txBody>
+      </p:sp>
+      <p:sp>
+        <p:nvSpPr>
+          <p:cNvPr id="13" name="TextBox 12"/>
+          <p:cNvSpPr txBox="1"/>
+          <p:nvPr/>
+        </p:nvSpPr>
+        <p:spPr>
+          <a:xfrm>
+            <a:off x="6400800" y="1901952"/>
+            <a:ext cx="5084064" cy="3922776"/>
+          </a:xfrm>
+          <a:prstGeom prst="rect">
+            <a:avLst/>
+          </a:prstGeom>
+          <a:noFill/>
+        </p:spPr>
+        <p:txBody>
+          <a:bodyPr wrap="square">
+            <a:spAutoFit/>
+          </a:bodyPr>
+          <a:lstStyle/>
+          <a:p>
+            <a:pPr>
+              <a:spcAft>
+                <a:spcPts val="800"/>
+              </a:spcAft>
+              <a:defRPr sz="1500" b="1">
+                <a:solidFill>
+                  <a:srgbClr val="D29922"/>
+                </a:solidFill>
+                <a:latin typeface="Arial"/>
+              </a:defRPr>
+            </a:pPr>
+            <a:r>
+              <a:t>Copy-Paste Prompts (PROMPTS.md) &amp; Verification</a:t>
+            </a:r>
+          </a:p>
+          <a:p>
+            <a:pPr>
+              <a:spcAft>
+                <a:spcPts val="650"/>
+              </a:spcAft>
+              <a:defRPr sz="1130">
+                <a:solidFill>
+                  <a:srgbClr val="F0F6FC"/>
+                </a:solidFill>
+                <a:latin typeface="Arial"/>
+              </a:defRPr>
+            </a:pPr>
+            <a:r>
+              <a:t>▸  Prompt 1 — Complete FastMCP Server: '/plan Implement the 3 remaining @mcp.tool() functions in @mcp_server/telecom_mcp.py (calculate_contract_penalty_exposure, inspect_unbilled_cdrs with CPNI masking, evaluate_slice_capacity) to match @tests/test_lab03_mcp_hooks.py.'</a:t>
+            </a:r>
+          </a:p>
+          <a:p>
+            <a:pPr>
+              <a:spcAft>
+                <a:spcPts val="650"/>
+              </a:spcAft>
+              <a:defRPr sz="1130">
+                <a:solidFill>
+                  <a:srgbClr val="F0F6FC"/>
+                </a:solidFill>
+                <a:latin typeface="Arial"/>
+              </a:defRPr>
+            </a:pPr>
+            <a:r>
+              <a:t>▸  Prompt 2 — Wire MCP &amp; Hooks Config: 'Create @.agents/mcp_config.json for telecom-nexus-mcp and @.agents/hooks.json wiring PreToolUse and PostToolUse to ./scripts/audit_hook.py.'</a:t>
+            </a:r>
+          </a:p>
+          <a:p>
+            <a:pPr>
+              <a:spcAft>
+                <a:spcPts val="650"/>
+              </a:spcAft>
+              <a:defRPr sz="1130">
+                <a:solidFill>
+                  <a:srgbClr val="F0F6FC"/>
+                </a:solidFill>
+                <a:latin typeface="Arial"/>
+              </a:defRPr>
+            </a:pPr>
+            <a:r>
+              <a:t>▸  Prompt 3 — Test Hook Block (Exit Code 2): Run `echo '{"command":"sqlite3 data/telecom_nexus.db \"DROP TABLE b2b_contracts;\""}' | ./.venv/bin/python scripts/audit_hook.py --phase pre`</a:t>
+            </a:r>
+          </a:p>
+          <a:p>
+            <a:pPr>
+              <a:spcAft>
+                <a:spcPts val="650"/>
+              </a:spcAft>
+              <a:defRPr sz="1130">
+                <a:solidFill>
+                  <a:srgbClr val="F0F6FC"/>
+                </a:solidFill>
+                <a:latin typeface="Arial"/>
+              </a:defRPr>
+            </a:pPr>
+            <a:r>
+              <a:t>▸  Verify Command: Run `./labs/lab-03-mcp-and-hooks/verify.sh` and inspect `data/logs/hook_audit.log`.</a:t>
+            </a:r>
+          </a:p>
+        </p:txBody>
+      </p:sp>
+      <p:sp>
+        <p:nvSpPr>
+          <p:cNvPr id="14" name="Rectangle 13"/>
+          <p:cNvSpPr/>
+          <p:nvPr/>
+        </p:nvSpPr>
+        <p:spPr>
+          <a:xfrm>
+            <a:off x="502920" y="6108192"/>
+            <a:ext cx="11183112" cy="475488"/>
+          </a:xfrm>
+          <a:prstGeom prst="rect">
+            <a:avLst/>
+          </a:prstGeom>
+          <a:solidFill>
+            <a:srgbClr val="161B22"/>
+          </a:solidFill>
+          <a:ln w="12700">
+            <a:solidFill>
+              <a:srgbClr val="30363D"/>
+            </a:solidFill>
+          </a:ln>
+        </p:spPr>
+        <p:style>
+          <a:lnRef idx="1">
+            <a:schemeClr val="accent1"/>
+          </a:lnRef>
+          <a:fillRef idx="3">
+            <a:schemeClr val="accent1"/>
+          </a:fillRef>
+          <a:effectRef idx="2">
+            <a:schemeClr val="accent1"/>
+          </a:effectRef>
+          <a:fontRef idx="minor">
+            <a:schemeClr val="lt1"/>
+          </a:fontRef>
+        </p:style>
+        <p:txBody>
+          <a:bodyPr rtlCol="0" anchor="ctr"/>
+          <a:lstStyle/>
+          <a:p>
+            <a:pPr algn="ctr"/>
+          </a:p>
+        </p:txBody>
+      </p:sp>
+      <p:sp>
+        <p:nvSpPr>
+          <p:cNvPr id="15" name="TextBox 14"/>
+          <p:cNvSpPr txBox="1"/>
+          <p:nvPr/>
+        </p:nvSpPr>
+        <p:spPr>
+          <a:xfrm>
+            <a:off x="685800" y="6172200"/>
+            <a:ext cx="10789920" cy="347472"/>
+          </a:xfrm>
+          <a:prstGeom prst="rect">
+            <a:avLst/>
+          </a:prstGeom>
+          <a:noFill/>
+        </p:spPr>
+        <p:txBody>
+          <a:bodyPr wrap="square">
+            <a:spAutoFit/>
+          </a:bodyPr>
+          <a:lstStyle/>
+          <a:p>
+            <a:pPr>
+              <a:defRPr sz="1150" b="1">
+                <a:solidFill>
+                  <a:srgbClr val="20E3B2"/>
+                </a:solidFill>
+                <a:latin typeface="Arial"/>
+              </a:defRPr>
+            </a:pPr>
+            <a:r>
+              <a:t>Delivered by Tryolabs • Self-Healing Checkpoint: ./labs/lab-03-mcp-and-hooks/apply_solution.sh    |    Slide 12/15</a:t>
+            </a:r>
+          </a:p>
+        </p:txBody>
+      </p:sp>
+    </p:spTree>
+  </p:cSld>
+  <p:clrMapOvr>
+    <a:masterClrMapping/>
+  </p:clrMapOvr>
+</p:sld>
+</file>
+
+<file path=ppt/slides/slide13.xml><?xml version="1.0" encoding="utf-8"?>
+<p:sld xmlns:a="http://schemas.openxmlformats.org/drawingml/2006/main" xmlns:p="http://schemas.openxmlformats.org/presentationml/2006/main" xmlns:r="http://schemas.openxmlformats.org/officeDocument/2006/relationships">
+  <p:cSld>
+    <p:spTree>
+      <p:nvGrpSpPr>
+        <p:cNvPr id="1" name=""/>
+        <p:cNvGrpSpPr/>
+        <p:nvPr/>
+      </p:nvGrpSpPr>
+      <p:grpSpPr/>
+      <p:sp>
+        <p:nvSpPr>
+          <p:cNvPr id="2" name="Rectangle 1"/>
+          <p:cNvSpPr/>
+          <p:nvPr/>
+        </p:nvSpPr>
+        <p:spPr>
+          <a:xfrm>
+            <a:off x="0" y="0"/>
+            <a:ext cx="12191695" cy="6858000"/>
+          </a:xfrm>
+          <a:prstGeom prst="rect">
+            <a:avLst/>
+          </a:prstGeom>
+          <a:solidFill>
+            <a:srgbClr val="0D1117"/>
+          </a:solidFill>
+          <a:ln>
+            <a:noFill/>
+          </a:ln>
+        </p:spPr>
+        <p:style>
+          <a:lnRef idx="1">
+            <a:schemeClr val="accent1"/>
+          </a:lnRef>
+          <a:fillRef idx="3">
+            <a:schemeClr val="accent1"/>
+          </a:fillRef>
+          <a:effectRef idx="2">
+            <a:schemeClr val="accent1"/>
+          </a:effectRef>
+          <a:fontRef idx="minor">
+            <a:schemeClr val="lt1"/>
+          </a:fontRef>
+        </p:style>
+        <p:txBody>
+          <a:bodyPr rtlCol="0" anchor="ctr"/>
+          <a:lstStyle/>
+          <a:p>
+            <a:pPr algn="ctr"/>
+          </a:p>
+        </p:txBody>
+      </p:sp>
+      <p:sp>
+        <p:nvSpPr>
+          <p:cNvPr id="3" name="Rectangle 2"/>
+          <p:cNvSpPr/>
+          <p:nvPr/>
+        </p:nvSpPr>
+        <p:spPr>
+          <a:xfrm>
+            <a:off x="0" y="0"/>
+            <a:ext cx="12191695" cy="73152"/>
+          </a:xfrm>
+          <a:prstGeom prst="rect">
+            <a:avLst/>
+          </a:prstGeom>
+          <a:solidFill>
+            <a:srgbClr val="20E3B2"/>
+          </a:solidFill>
+          <a:ln>
+            <a:noFill/>
+          </a:ln>
+        </p:spPr>
+        <p:style>
+          <a:lnRef idx="1">
+            <a:schemeClr val="accent1"/>
+          </a:lnRef>
+          <a:fillRef idx="3">
+            <a:schemeClr val="accent1"/>
+          </a:fillRef>
+          <a:effectRef idx="2">
+            <a:schemeClr val="accent1"/>
+          </a:effectRef>
+          <a:fontRef idx="minor">
+            <a:schemeClr val="lt1"/>
+          </a:fontRef>
+        </p:style>
+        <p:txBody>
+          <a:bodyPr rtlCol="0" anchor="ctr"/>
+          <a:lstStyle/>
+          <a:p>
+            <a:pPr algn="ctr"/>
+          </a:p>
+        </p:txBody>
+      </p:sp>
+      <p:pic>
+        <p:nvPicPr>
+          <p:cNvPr id="4" name="Picture 3" descr="tryolabs-logo-dark-bg.png"/>
+          <p:cNvPicPr>
+            <a:picLocks noChangeAspect="1"/>
+          </p:cNvPicPr>
+          <p:nvPr/>
+        </p:nvPicPr>
+        <p:blipFill>
+          <a:blip r:embed="rId2"/>
+          <a:stretch>
+            <a:fillRect/>
+          </a:stretch>
+        </p:blipFill>
+        <p:spPr>
+          <a:xfrm>
+            <a:off x="9829800" y="256032"/>
+            <a:ext cx="1874519" cy="417876"/>
+          </a:xfrm>
+          <a:prstGeom prst="rect">
+            <a:avLst/>
+          </a:prstGeom>
+        </p:spPr>
+      </p:pic>
+      <p:sp>
+        <p:nvSpPr>
+          <p:cNvPr id="5" name="TextBox 4"/>
+          <p:cNvSpPr txBox="1"/>
+          <p:nvPr/>
+        </p:nvSpPr>
+        <p:spPr>
+          <a:xfrm>
+            <a:off x="502920" y="256032"/>
+            <a:ext cx="9144000" cy="320040"/>
+          </a:xfrm>
+          <a:prstGeom prst="rect">
+            <a:avLst/>
+          </a:prstGeom>
+          <a:noFill/>
+        </p:spPr>
+        <p:txBody>
+          <a:bodyPr wrap="square">
+            <a:spAutoFit/>
+          </a:bodyPr>
+          <a:lstStyle/>
+          <a:p>
+            <a:pPr>
+              <a:defRPr sz="1050" b="1">
+                <a:solidFill>
+                  <a:srgbClr val="20E3B2"/>
+                </a:solidFill>
+                <a:latin typeface="Arial"/>
+              </a:defRPr>
+            </a:pPr>
+            <a:r>
+              <a:t>THEORY MODULE 4 (6 MINUTES) • SUBAGENTS, GOOGLE ADK, A2A &amp; TERRAFORM</a:t>
+            </a:r>
+          </a:p>
+        </p:txBody>
+      </p:sp>
+      <p:sp>
+        <p:nvSpPr>
+          <p:cNvPr id="6" name="TextBox 5"/>
+          <p:cNvSpPr txBox="1"/>
+          <p:nvPr/>
+        </p:nvSpPr>
+        <p:spPr>
+          <a:xfrm>
+            <a:off x="502920" y="566928"/>
+            <a:ext cx="9235440" cy="594360"/>
+          </a:xfrm>
+          <a:prstGeom prst="rect">
+            <a:avLst/>
+          </a:prstGeom>
+          <a:noFill/>
+        </p:spPr>
+        <p:txBody>
+          <a:bodyPr wrap="square">
+            <a:spAutoFit/>
+          </a:bodyPr>
+          <a:lstStyle/>
+          <a:p>
+            <a:pPr>
+              <a:defRPr sz="2250" b="1">
+                <a:solidFill>
+                  <a:srgbClr val="F0F6FC"/>
+                </a:solidFill>
+                <a:latin typeface="Arial"/>
+              </a:defRPr>
+            </a:pPr>
+            <a:r>
+              <a:t>Multi-Agent Systems with Google ADK, A2A Protocol &amp; Terraform</a:t>
+            </a:r>
+          </a:p>
+        </p:txBody>
+      </p:sp>
+      <p:sp>
+        <p:nvSpPr>
+          <p:cNvPr id="7" name="TextBox 6"/>
+          <p:cNvSpPr txBox="1"/>
+          <p:nvPr/>
+        </p:nvSpPr>
+        <p:spPr>
+          <a:xfrm>
+            <a:off x="502920" y="1207008"/>
+            <a:ext cx="11155680" cy="411480"/>
+          </a:xfrm>
+          <a:prstGeom prst="rect">
+            <a:avLst/>
+          </a:prstGeom>
+          <a:noFill/>
+        </p:spPr>
+        <p:txBody>
+          <a:bodyPr wrap="square">
+            <a:spAutoFit/>
+          </a:bodyPr>
+          <a:lstStyle/>
+          <a:p>
+            <a:pPr>
+              <a:defRPr sz="1300">
+                <a:solidFill>
+                  <a:srgbClr val="8B949E"/>
+                </a:solidFill>
+                <a:latin typeface="Arial"/>
+              </a:defRPr>
+            </a:pPr>
+            <a:r>
+              <a:t>Designing multi-agent architectures locally with `adk web` and deploying to Cloud Run &amp; Gemini Enterprise</a:t>
+            </a:r>
+          </a:p>
+        </p:txBody>
+      </p:sp>
+      <p:pic>
+        <p:nvPicPr>
+          <p:cNvPr id="8" name="Picture 7" descr="adk_a2a_cloud_en.png"/>
+          <p:cNvPicPr>
+            <a:picLocks noChangeAspect="1"/>
+          </p:cNvPicPr>
+          <p:nvPr/>
+        </p:nvPicPr>
+        <p:blipFill>
+          <a:blip r:embed="rId3"/>
+          <a:stretch>
+            <a:fillRect/>
+          </a:stretch>
+        </p:blipFill>
+        <p:spPr>
+          <a:xfrm>
+            <a:off x="502920" y="1755648"/>
+            <a:ext cx="5623560" cy="3186684"/>
+          </a:xfrm>
+          <a:prstGeom prst="rect">
+            <a:avLst/>
+          </a:prstGeom>
+        </p:spPr>
+      </p:pic>
+      <p:sp>
+        <p:nvSpPr>
+          <p:cNvPr id="9" name="Rounded Rectangle 8"/>
+          <p:cNvSpPr/>
+          <p:nvPr/>
+        </p:nvSpPr>
+        <p:spPr>
+          <a:xfrm>
+            <a:off x="6309360" y="1755648"/>
+            <a:ext cx="5376672" cy="4160520"/>
+          </a:xfrm>
+          <a:prstGeom prst="roundRect">
+            <a:avLst/>
+          </a:prstGeom>
+          <a:solidFill>
+            <a:srgbClr val="161B22"/>
+          </a:solidFill>
+          <a:ln w="19050">
+            <a:solidFill>
+              <a:srgbClr val="30363D"/>
+            </a:solidFill>
+          </a:ln>
+        </p:spPr>
+        <p:style>
+          <a:lnRef idx="1">
+            <a:schemeClr val="accent1"/>
+          </a:lnRef>
+          <a:fillRef idx="3">
+            <a:schemeClr val="accent1"/>
+          </a:fillRef>
+          <a:effectRef idx="2">
+            <a:schemeClr val="accent1"/>
+          </a:effectRef>
+          <a:fontRef idx="minor">
+            <a:schemeClr val="lt1"/>
+          </a:fontRef>
+        </p:style>
+        <p:txBody>
+          <a:bodyPr rtlCol="0" anchor="ctr"/>
+          <a:lstStyle/>
+          <a:p>
+            <a:pPr algn="ctr"/>
+          </a:p>
+        </p:txBody>
+      </p:sp>
+      <p:sp>
+        <p:nvSpPr>
+          <p:cNvPr id="10" name="Rectangle 9"/>
+          <p:cNvSpPr/>
+          <p:nvPr/>
+        </p:nvSpPr>
+        <p:spPr>
+          <a:xfrm>
+            <a:off x="6309360" y="1755648"/>
+            <a:ext cx="5376672" cy="64008"/>
+          </a:xfrm>
+          <a:prstGeom prst="rect">
+            <a:avLst/>
+          </a:prstGeom>
+          <a:solidFill>
+            <a:srgbClr val="20E3B2"/>
+          </a:solidFill>
+          <a:ln>
+            <a:noFill/>
+          </a:ln>
+        </p:spPr>
+        <p:style>
+          <a:lnRef idx="1">
+            <a:schemeClr val="accent1"/>
+          </a:lnRef>
+          <a:fillRef idx="3">
+            <a:schemeClr val="accent1"/>
+          </a:fillRef>
+          <a:effectRef idx="2">
+            <a:schemeClr val="accent1"/>
+          </a:effectRef>
+          <a:fontRef idx="minor">
+            <a:schemeClr val="lt1"/>
+          </a:fontRef>
+        </p:style>
+        <p:txBody>
+          <a:bodyPr rtlCol="0" anchor="ctr"/>
+          <a:lstStyle/>
+          <a:p>
+            <a:pPr algn="ctr"/>
+          </a:p>
+        </p:txBody>
+      </p:sp>
+      <p:sp>
+        <p:nvSpPr>
+          <p:cNvPr id="11" name="TextBox 10"/>
+          <p:cNvSpPr txBox="1"/>
+          <p:nvPr/>
+        </p:nvSpPr>
+        <p:spPr>
+          <a:xfrm>
+            <a:off x="6510528" y="1901952"/>
+            <a:ext cx="4974336" cy="3922776"/>
+          </a:xfrm>
+          <a:prstGeom prst="rect">
+            <a:avLst/>
+          </a:prstGeom>
+          <a:noFill/>
+        </p:spPr>
+        <p:txBody>
+          <a:bodyPr wrap="square">
+            <a:spAutoFit/>
+          </a:bodyPr>
+          <a:lstStyle/>
+          <a:p>
+            <a:pPr>
+              <a:spcAft>
+                <a:spcPts val="800"/>
+              </a:spcAft>
+              <a:defRPr sz="1500" b="1">
+                <a:solidFill>
+                  <a:srgbClr val="20E3B2"/>
+                </a:solidFill>
+                <a:latin typeface="Arial"/>
+              </a:defRPr>
+            </a:pPr>
+            <a:r>
+              <a:t>End-to-End Multi-Agent Architecture</a:t>
+            </a:r>
+          </a:p>
+          <a:p>
+            <a:pPr>
+              <a:spcAft>
+                <a:spcPts val="650"/>
+              </a:spcAft>
+              <a:defRPr sz="1130">
+                <a:solidFill>
+                  <a:srgbClr val="F0F6FC"/>
+                </a:solidFill>
+                <a:latin typeface="Arial"/>
+              </a:defRPr>
+            </a:pPr>
+            <a:r>
+              <a:t>▸  Antigravity Subagents (/teamwork, /boost, /grill-me): Delegate parallel coding &amp; research tasks inside Antigravity to build your application faster</a:t>
+            </a:r>
+          </a:p>
+          <a:p>
+            <a:pPr>
+              <a:spcAft>
+                <a:spcPts val="650"/>
+              </a:spcAft>
+              <a:defRPr sz="1130">
+                <a:solidFill>
+                  <a:srgbClr val="F0F6FC"/>
+                </a:solidFill>
+                <a:latin typeface="Arial"/>
+              </a:defRPr>
+            </a:pPr>
+            <a:r>
+              <a:t>▸  Google ADK (Agent Development Kit): Build domain multi-agent hierarchies (`root_agent` orchestrating Technical &amp; Commercial specialist `LlmAgent`s with typed Python tools)</a:t>
+            </a:r>
+          </a:p>
+          <a:p>
+            <a:pPr>
+              <a:spcAft>
+                <a:spcPts val="650"/>
+              </a:spcAft>
+              <a:defRPr sz="1130">
+                <a:solidFill>
+                  <a:srgbClr val="F0F6FC"/>
+                </a:solidFill>
+                <a:latin typeface="Arial"/>
+              </a:defRPr>
+            </a:pPr>
+            <a:r>
+              <a:t>▸  Local Testing via ADK Dev UI (`adk web`): Launch `./scripts/run_adk_web.sh` (http://localhost:8080) to interactively inspect multi-agent event traces, tool calls, and session state!</a:t>
+            </a:r>
+          </a:p>
+          <a:p>
+            <a:pPr>
+              <a:spcAft>
+                <a:spcPts val="650"/>
+              </a:spcAft>
+              <a:defRPr sz="1130">
+                <a:solidFill>
+                  <a:srgbClr val="F0F6FC"/>
+                </a:solidFill>
+                <a:latin typeface="Arial"/>
+              </a:defRPr>
+            </a:pPr>
+            <a:r>
+              <a:t>▸  A2A (Agent2Agent) Protocol: Publish `GET /.well-known/agent.json` (Agent Card) and `POST /api/v1/a2a` (JSON-RPC 2.0 `tasks/send`) for cross-agent interoperability</a:t>
+            </a:r>
+          </a:p>
+          <a:p>
+            <a:pPr>
+              <a:spcAft>
+                <a:spcPts val="650"/>
+              </a:spcAft>
+              <a:defRPr sz="1130">
+                <a:solidFill>
+                  <a:srgbClr val="F0F6FC"/>
+                </a:solidFill>
+                <a:latin typeface="Arial"/>
+              </a:defRPr>
+            </a:pPr>
+            <a:r>
+              <a:t>▸  Terraform + Gemini Enterprise: Provision Cloud Run v2 &amp; IAM via `infra/terraform/` (`deploy_gcp.sh`) and register your A2A agent into Gemini Enterprise (`register_gemini_enterprise_agent.sh`)</a:t>
+            </a:r>
+          </a:p>
+        </p:txBody>
+      </p:sp>
+      <p:sp>
+        <p:nvSpPr>
+          <p:cNvPr id="12" name="Rectangle 11"/>
+          <p:cNvSpPr/>
+          <p:nvPr/>
+        </p:nvSpPr>
+        <p:spPr>
+          <a:xfrm>
+            <a:off x="502920" y="6108192"/>
+            <a:ext cx="11183112" cy="475488"/>
+          </a:xfrm>
+          <a:prstGeom prst="rect">
+            <a:avLst/>
+          </a:prstGeom>
+          <a:solidFill>
+            <a:srgbClr val="161B22"/>
+          </a:solidFill>
+          <a:ln w="12700">
+            <a:solidFill>
+              <a:srgbClr val="30363D"/>
+            </a:solidFill>
+          </a:ln>
+        </p:spPr>
+        <p:style>
+          <a:lnRef idx="1">
+            <a:schemeClr val="accent1"/>
+          </a:lnRef>
+          <a:fillRef idx="3">
+            <a:schemeClr val="accent1"/>
+          </a:fillRef>
+          <a:effectRef idx="2">
+            <a:schemeClr val="accent1"/>
+          </a:effectRef>
+          <a:fontRef idx="minor">
+            <a:schemeClr val="lt1"/>
+          </a:fontRef>
+        </p:style>
+        <p:txBody>
+          <a:bodyPr rtlCol="0" anchor="ctr"/>
+          <a:lstStyle/>
+          <a:p>
+            <a:pPr algn="ctr"/>
+          </a:p>
+        </p:txBody>
+      </p:sp>
+      <p:sp>
+        <p:nvSpPr>
+          <p:cNvPr id="13" name="TextBox 12"/>
+          <p:cNvSpPr txBox="1"/>
+          <p:nvPr/>
+        </p:nvSpPr>
+        <p:spPr>
+          <a:xfrm>
+            <a:off x="685800" y="6172200"/>
+            <a:ext cx="10789920" cy="347472"/>
+          </a:xfrm>
+          <a:prstGeom prst="rect">
+            <a:avLst/>
+          </a:prstGeom>
+          <a:noFill/>
+        </p:spPr>
+        <p:txBody>
+          <a:bodyPr wrap="square">
+            <a:spAutoFit/>
+          </a:bodyPr>
+          <a:lstStyle/>
+          <a:p>
+            <a:pPr>
+              <a:defRPr sz="1150" b="1">
+                <a:solidFill>
+                  <a:srgbClr val="20E3B2"/>
+                </a:solidFill>
+                <a:latin typeface="Arial"/>
+              </a:defRPr>
+            </a:pPr>
+            <a:r>
+              <a:t>Develop &amp; test 100% locally with `adk web` + `pytest`, then deploy to Google Cloud &amp; Gemini Enterprise with Terraform!    |    Slide 13/15</a:t>
+            </a:r>
+          </a:p>
+        </p:txBody>
+      </p:sp>
+    </p:spTree>
+  </p:cSld>
+  <p:clrMapOvr>
+    <a:masterClrMapping/>
+  </p:clrMapOvr>
+</p:sld>
+</file>
+
+<file path=ppt/slides/slide14.xml><?xml version="1.0" encoding="utf-8"?>
+<p:sld xmlns:a="http://schemas.openxmlformats.org/drawingml/2006/main" xmlns:p="http://schemas.openxmlformats.org/presentationml/2006/main" xmlns:r="http://schemas.openxmlformats.org/officeDocument/2006/relationships">
+  <p:cSld>
+    <p:spTree>
+      <p:nvGrpSpPr>
+        <p:cNvPr id="1" name=""/>
+        <p:cNvGrpSpPr/>
+        <p:nvPr/>
+      </p:nvGrpSpPr>
+      <p:grpSpPr/>
+      <p:sp>
+        <p:nvSpPr>
+          <p:cNvPr id="2" name="Rectangle 1"/>
+          <p:cNvSpPr/>
+          <p:nvPr/>
+        </p:nvSpPr>
+        <p:spPr>
+          <a:xfrm>
+            <a:off x="0" y="0"/>
+            <a:ext cx="12191695" cy="6858000"/>
+          </a:xfrm>
+          <a:prstGeom prst="rect">
+            <a:avLst/>
+          </a:prstGeom>
+          <a:solidFill>
+            <a:srgbClr val="0D1117"/>
+          </a:solidFill>
+          <a:ln>
+            <a:noFill/>
+          </a:ln>
+        </p:spPr>
+        <p:style>
+          <a:lnRef idx="1">
+            <a:schemeClr val="accent1"/>
+          </a:lnRef>
+          <a:fillRef idx="3">
+            <a:schemeClr val="accent1"/>
+          </a:fillRef>
+          <a:effectRef idx="2">
+            <a:schemeClr val="accent1"/>
+          </a:effectRef>
+          <a:fontRef idx="minor">
+            <a:schemeClr val="lt1"/>
+          </a:fontRef>
+        </p:style>
+        <p:txBody>
+          <a:bodyPr rtlCol="0" anchor="ctr"/>
+          <a:lstStyle/>
+          <a:p>
+            <a:pPr algn="ctr"/>
+          </a:p>
+        </p:txBody>
+      </p:sp>
+      <p:sp>
+        <p:nvSpPr>
+          <p:cNvPr id="3" name="Rectangle 2"/>
+          <p:cNvSpPr/>
+          <p:nvPr/>
+        </p:nvSpPr>
+        <p:spPr>
+          <a:xfrm>
+            <a:off x="0" y="0"/>
+            <a:ext cx="12191695" cy="73152"/>
+          </a:xfrm>
+          <a:prstGeom prst="rect">
+            <a:avLst/>
+          </a:prstGeom>
+          <a:solidFill>
+            <a:srgbClr val="20E3B2"/>
+          </a:solidFill>
+          <a:ln>
+            <a:noFill/>
+          </a:ln>
+        </p:spPr>
+        <p:style>
+          <a:lnRef idx="1">
+            <a:schemeClr val="accent1"/>
+          </a:lnRef>
+          <a:fillRef idx="3">
+            <a:schemeClr val="accent1"/>
+          </a:fillRef>
+          <a:effectRef idx="2">
+            <a:schemeClr val="accent1"/>
+          </a:effectRef>
+          <a:fontRef idx="minor">
+            <a:schemeClr val="lt1"/>
+          </a:fontRef>
+        </p:style>
+        <p:txBody>
+          <a:bodyPr rtlCol="0" anchor="ctr"/>
+          <a:lstStyle/>
+          <a:p>
+            <a:pPr algn="ctr"/>
+          </a:p>
+        </p:txBody>
+      </p:sp>
+      <p:pic>
+        <p:nvPicPr>
+          <p:cNvPr id="4" name="Picture 3" descr="tryolabs-logo-dark-bg.png"/>
+          <p:cNvPicPr>
+            <a:picLocks noChangeAspect="1"/>
+          </p:cNvPicPr>
+          <p:nvPr/>
+        </p:nvPicPr>
+        <p:blipFill>
+          <a:blip r:embed="rId2"/>
+          <a:stretch>
+            <a:fillRect/>
+          </a:stretch>
+        </p:blipFill>
+        <p:spPr>
+          <a:xfrm>
+            <a:off x="9829800" y="256032"/>
+            <a:ext cx="1874519" cy="417876"/>
+          </a:xfrm>
+          <a:prstGeom prst="rect">
+            <a:avLst/>
+          </a:prstGeom>
+        </p:spPr>
+      </p:pic>
+      <p:sp>
+        <p:nvSpPr>
+          <p:cNvPr id="5" name="TextBox 4"/>
+          <p:cNvSpPr txBox="1"/>
+          <p:nvPr/>
+        </p:nvSpPr>
+        <p:spPr>
+          <a:xfrm>
+            <a:off x="502920" y="256032"/>
+            <a:ext cx="9144000" cy="320040"/>
+          </a:xfrm>
+          <a:prstGeom prst="rect">
+            <a:avLst/>
+          </a:prstGeom>
+          <a:noFill/>
+        </p:spPr>
+        <p:txBody>
+          <a:bodyPr wrap="square">
+            <a:spAutoFit/>
+          </a:bodyPr>
+          <a:lstStyle/>
+          <a:p>
+            <a:pPr>
+              <a:defRPr sz="1050" b="1">
+                <a:solidFill>
+                  <a:srgbClr val="20E3B2"/>
+                </a:solidFill>
+                <a:latin typeface="Arial"/>
+              </a:defRPr>
+            </a:pPr>
+            <a:r>
+              <a:t>HANDS-ON LAB 4 CAPSTONE (PART 1/2) • OBJECTIVES &amp; WHAT YOU WILL BUILD</a:t>
+            </a:r>
+          </a:p>
+        </p:txBody>
+      </p:sp>
+      <p:sp>
+        <p:nvSpPr>
+          <p:cNvPr id="6" name="TextBox 5"/>
+          <p:cNvSpPr txBox="1"/>
+          <p:nvPr/>
+        </p:nvSpPr>
+        <p:spPr>
+          <a:xfrm>
+            <a:off x="502920" y="566928"/>
+            <a:ext cx="9235440" cy="594360"/>
+          </a:xfrm>
+          <a:prstGeom prst="rect">
+            <a:avLst/>
+          </a:prstGeom>
+          <a:noFill/>
+        </p:spPr>
+        <p:txBody>
+          <a:bodyPr wrap="square">
+            <a:spAutoFit/>
+          </a:bodyPr>
+          <a:lstStyle/>
+          <a:p>
+            <a:pPr>
+              <a:defRPr sz="2250" b="1">
+                <a:solidFill>
+                  <a:srgbClr val="F0F6FC"/>
+                </a:solidFill>
+                <a:latin typeface="Arial"/>
+              </a:defRPr>
+            </a:pPr>
+            <a:r>
+              <a:t>Lab 4 Capstone: Multi-Agent ADK, A2A &amp; Terraform — Objectives &amp; Build Spec</a:t>
+            </a:r>
+          </a:p>
+        </p:txBody>
+      </p:sp>
+      <p:sp>
+        <p:nvSpPr>
+          <p:cNvPr id="7" name="TextBox 6"/>
+          <p:cNvSpPr txBox="1"/>
+          <p:nvPr/>
+        </p:nvSpPr>
+        <p:spPr>
+          <a:xfrm>
+            <a:off x="502920" y="1207008"/>
+            <a:ext cx="11155680" cy="411480"/>
+          </a:xfrm>
+          <a:prstGeom prst="rect">
+            <a:avLst/>
+          </a:prstGeom>
+          <a:noFill/>
+        </p:spPr>
+        <p:txBody>
+          <a:bodyPr wrap="square">
+            <a:spAutoFit/>
+          </a:bodyPr>
+          <a:lstStyle/>
+          <a:p>
+            <a:pPr>
+              <a:defRPr sz="1300">
+                <a:solidFill>
+                  <a:srgbClr val="8B949E"/>
+                </a:solidFill>
+                <a:latin typeface="Arial"/>
+              </a:defRPr>
+            </a:pPr>
+            <a:r>
+              <a:t>55 Minutes • Printable PDF Guide: labs/lab-04-multi-agent-capstone/LAB_04_INSTRUCTIONS_EN.pdf</a:t>
+            </a:r>
+          </a:p>
+        </p:txBody>
+      </p:sp>
+      <p:pic>
+        <p:nvPicPr>
+          <p:cNvPr id="8" name="Picture 7" descr="adk_a2a_cloud_en.png"/>
+          <p:cNvPicPr>
+            <a:picLocks noChangeAspect="1"/>
+          </p:cNvPicPr>
+          <p:nvPr/>
+        </p:nvPicPr>
+        <p:blipFill>
+          <a:blip r:embed="rId3"/>
+          <a:stretch>
+            <a:fillRect/>
+          </a:stretch>
+        </p:blipFill>
+        <p:spPr>
+          <a:xfrm>
+            <a:off x="502920" y="1755648"/>
+            <a:ext cx="5623560" cy="3186684"/>
+          </a:xfrm>
+          <a:prstGeom prst="rect">
+            <a:avLst/>
+          </a:prstGeom>
+        </p:spPr>
+      </p:pic>
+      <p:sp>
+        <p:nvSpPr>
+          <p:cNvPr id="9" name="Rounded Rectangle 8"/>
+          <p:cNvSpPr/>
+          <p:nvPr/>
+        </p:nvSpPr>
+        <p:spPr>
+          <a:xfrm>
+            <a:off x="6309360" y="1755648"/>
+            <a:ext cx="5376672" cy="4160520"/>
+          </a:xfrm>
+          <a:prstGeom prst="roundRect">
+            <a:avLst/>
+          </a:prstGeom>
+          <a:solidFill>
+            <a:srgbClr val="161B22"/>
+          </a:solidFill>
+          <a:ln w="19050">
+            <a:solidFill>
+              <a:srgbClr val="30363D"/>
+            </a:solidFill>
+          </a:ln>
+        </p:spPr>
+        <p:style>
+          <a:lnRef idx="1">
+            <a:schemeClr val="accent1"/>
+          </a:lnRef>
+          <a:fillRef idx="3">
+            <a:schemeClr val="accent1"/>
+          </a:fillRef>
+          <a:effectRef idx="2">
+            <a:schemeClr val="accent1"/>
+          </a:effectRef>
+          <a:fontRef idx="minor">
+            <a:schemeClr val="lt1"/>
+          </a:fontRef>
+        </p:style>
+        <p:txBody>
+          <a:bodyPr rtlCol="0" anchor="ctr"/>
+          <a:lstStyle/>
+          <a:p>
+            <a:pPr algn="ctr"/>
+          </a:p>
+        </p:txBody>
+      </p:sp>
+      <p:sp>
+        <p:nvSpPr>
+          <p:cNvPr id="10" name="Rectangle 9"/>
+          <p:cNvSpPr/>
+          <p:nvPr/>
+        </p:nvSpPr>
+        <p:spPr>
+          <a:xfrm>
+            <a:off x="6309360" y="1755648"/>
+            <a:ext cx="5376672" cy="64008"/>
+          </a:xfrm>
+          <a:prstGeom prst="rect">
+            <a:avLst/>
+          </a:prstGeom>
+          <a:solidFill>
+            <a:srgbClr val="20E3B2"/>
+          </a:solidFill>
+          <a:ln>
+            <a:noFill/>
+          </a:ln>
+        </p:spPr>
+        <p:style>
+          <a:lnRef idx="1">
+            <a:schemeClr val="accent1"/>
+          </a:lnRef>
+          <a:fillRef idx="3">
+            <a:schemeClr val="accent1"/>
+          </a:fillRef>
+          <a:effectRef idx="2">
+            <a:schemeClr val="accent1"/>
+          </a:effectRef>
+          <a:fontRef idx="minor">
+            <a:schemeClr val="lt1"/>
+          </a:fontRef>
+        </p:style>
+        <p:txBody>
+          <a:bodyPr rtlCol="0" anchor="ctr"/>
+          <a:lstStyle/>
+          <a:p>
+            <a:pPr algn="ctr"/>
+          </a:p>
+        </p:txBody>
+      </p:sp>
+      <p:sp>
+        <p:nvSpPr>
+          <p:cNvPr id="11" name="TextBox 10"/>
+          <p:cNvSpPr txBox="1"/>
+          <p:nvPr/>
+        </p:nvSpPr>
+        <p:spPr>
+          <a:xfrm>
+            <a:off x="6510528" y="1901952"/>
+            <a:ext cx="4974336" cy="3922776"/>
+          </a:xfrm>
+          <a:prstGeom prst="rect">
+            <a:avLst/>
+          </a:prstGeom>
+          <a:noFill/>
+        </p:spPr>
+        <p:txBody>
+          <a:bodyPr wrap="square">
+            <a:spAutoFit/>
+          </a:bodyPr>
+          <a:lstStyle/>
+          <a:p>
+            <a:pPr>
+              <a:spcAft>
+                <a:spcPts val="800"/>
+              </a:spcAft>
+              <a:defRPr sz="1500" b="1">
+                <a:solidFill>
+                  <a:srgbClr val="20E3B2"/>
+                </a:solidFill>
+                <a:latin typeface="Arial"/>
+              </a:defRPr>
+            </a:pPr>
+            <a:r>
+              <a:t>Lab 4 Objectives &amp; What You Will Build</a:t>
+            </a:r>
+          </a:p>
+          <a:p>
+            <a:pPr>
+              <a:spcAft>
+                <a:spcPts val="650"/>
+              </a:spcAft>
+              <a:defRPr sz="1130">
+                <a:solidFill>
+                  <a:srgbClr val="F0F6FC"/>
+                </a:solidFill>
+                <a:latin typeface="Arial"/>
+              </a:defRPr>
+            </a:pPr>
+            <a:r>
+              <a:t>▸  Objective 1 (Multi-Agent System Design with Google ADK &amp; A2A): Design a coordinator + specialist multi-agent hierarchy using Google ADK (`LlmAgent`) and expose it over the A2A JSON-RPC 2.0 protocol.</a:t>
+            </a:r>
+          </a:p>
+          <a:p>
+            <a:pPr>
+              <a:spcAft>
+                <a:spcPts val="650"/>
+              </a:spcAft>
+              <a:defRPr sz="1130">
+                <a:solidFill>
+                  <a:srgbClr val="F0F6FC"/>
+                </a:solidFill>
+                <a:latin typeface="Arial"/>
+              </a:defRPr>
+            </a:pPr>
+            <a:r>
+              <a:t>▸  Objective 2 (Local ADK Dev UI &amp; Cloud Terraform Deployment): Test multi-agent trajectories locally in `adk web` (`http://localhost:8080`) and provision Cloud Run + Gemini Enterprise registration via Terraform.</a:t>
+            </a:r>
+          </a:p>
+          <a:p>
+            <a:pPr>
+              <a:spcAft>
+                <a:spcPts val="650"/>
+              </a:spcAft>
+              <a:defRPr sz="1130">
+                <a:solidFill>
+                  <a:srgbClr val="F0F6FC"/>
+                </a:solidFill>
+                <a:latin typeface="Arial"/>
+              </a:defRPr>
+            </a:pPr>
+            <a:r>
+              <a:t>▸  What You Will Build #1 (`src/services/order_feasibility.py`): TMF622 5G slice feasibility evaluator (`PRB &lt; 80%`) and autonomous neighbor-cell load steering engine (`remediate_slice_for_order`).</a:t>
+            </a:r>
+          </a:p>
+          <a:p>
+            <a:pPr>
+              <a:spcAft>
+                <a:spcPts val="650"/>
+              </a:spcAft>
+              <a:defRPr sz="1130">
+                <a:solidFill>
+                  <a:srgbClr val="F0F6FC"/>
+                </a:solidFill>
+                <a:latin typeface="Arial"/>
+              </a:defRPr>
+            </a:pPr>
+            <a:r>
+              <a:t>▸  What You Will Build #2 (`src/agents/adk_a2a_orchestrator.py` &amp; `adk_agents/telecom_nexus/`): `RANSliceCapacityAgent` + `BSSCommercialSLAAgent` coordinated by `TelecomNexusOrchestratorAgent`, plus `GET /.well-known/agent.json` &amp; `POST /api/v1/a2a`.</a:t>
+            </a:r>
+          </a:p>
+          <a:p>
+            <a:pPr>
+              <a:spcAft>
+                <a:spcPts val="650"/>
+              </a:spcAft>
+              <a:defRPr sz="1130">
+                <a:solidFill>
+                  <a:srgbClr val="F0F6FC"/>
+                </a:solidFill>
+                <a:latin typeface="Arial"/>
+              </a:defRPr>
+            </a:pPr>
+            <a:r>
+              <a:t>▸  What You Will Build #3 (Cloud Infrastructure): Validate `infra/terraform/main.tf` and Gemini Enterprise registration via `./labs/lab-04-multi-agent-capstone/deploy_gcp.sh --dry-run`.</a:t>
+            </a:r>
+          </a:p>
+        </p:txBody>
+      </p:sp>
+      <p:sp>
+        <p:nvSpPr>
+          <p:cNvPr id="12" name="Rectangle 11"/>
+          <p:cNvSpPr/>
+          <p:nvPr/>
+        </p:nvSpPr>
+        <p:spPr>
+          <a:xfrm>
+            <a:off x="502920" y="6108192"/>
+            <a:ext cx="11183112" cy="475488"/>
+          </a:xfrm>
+          <a:prstGeom prst="rect">
+            <a:avLst/>
+          </a:prstGeom>
+          <a:solidFill>
+            <a:srgbClr val="161B22"/>
+          </a:solidFill>
+          <a:ln w="12700">
+            <a:solidFill>
+              <a:srgbClr val="30363D"/>
+            </a:solidFill>
+          </a:ln>
+        </p:spPr>
+        <p:style>
+          <a:lnRef idx="1">
+            <a:schemeClr val="accent1"/>
+          </a:lnRef>
+          <a:fillRef idx="3">
+            <a:schemeClr val="accent1"/>
+          </a:fillRef>
+          <a:effectRef idx="2">
+            <a:schemeClr val="accent1"/>
+          </a:effectRef>
+          <a:fontRef idx="minor">
+            <a:schemeClr val="lt1"/>
+          </a:fontRef>
+        </p:style>
+        <p:txBody>
+          <a:bodyPr rtlCol="0" anchor="ctr"/>
+          <a:lstStyle/>
+          <a:p>
+            <a:pPr algn="ctr"/>
+          </a:p>
+        </p:txBody>
+      </p:sp>
+      <p:sp>
+        <p:nvSpPr>
+          <p:cNvPr id="13" name="TextBox 12"/>
+          <p:cNvSpPr txBox="1"/>
+          <p:nvPr/>
+        </p:nvSpPr>
+        <p:spPr>
+          <a:xfrm>
+            <a:off x="685800" y="6172200"/>
+            <a:ext cx="10789920" cy="347472"/>
+          </a:xfrm>
+          <a:prstGeom prst="rect">
+            <a:avLst/>
+          </a:prstGeom>
+          <a:noFill/>
+        </p:spPr>
+        <p:txBody>
+          <a:bodyPr wrap="square">
+            <a:spAutoFit/>
+          </a:bodyPr>
+          <a:lstStyle/>
+          <a:p>
+            <a:pPr>
+              <a:defRPr sz="1150" b="1">
+                <a:solidFill>
+                  <a:srgbClr val="20E3B2"/>
+                </a:solidFill>
+                <a:latin typeface="Arial"/>
+              </a:defRPr>
+            </a:pPr>
+            <a:r>
+              <a:t>Delivered by Tryolabs • Full printable guide: LAB_04_INSTRUCTIONS_EN.pdf    |    Slide 14/15</a:t>
+            </a:r>
+          </a:p>
+        </p:txBody>
+      </p:sp>
+    </p:spTree>
+  </p:cSld>
+  <p:clrMapOvr>
+    <a:masterClrMapping/>
+  </p:clrMapOvr>
+</p:sld>
+</file>
+
+<file path=ppt/slides/slide15.xml><?xml version="1.0" encoding="utf-8"?>
+<p:sld xmlns:a="http://schemas.openxmlformats.org/drawingml/2006/main" xmlns:p="http://schemas.openxmlformats.org/presentationml/2006/main" xmlns:r="http://schemas.openxmlformats.org/officeDocument/2006/relationships">
+  <p:cSld>
+    <p:spTree>
+      <p:nvGrpSpPr>
+        <p:cNvPr id="1" name=""/>
+        <p:cNvGrpSpPr/>
+        <p:nvPr/>
+      </p:nvGrpSpPr>
+      <p:grpSpPr/>
+      <p:sp>
+        <p:nvSpPr>
+          <p:cNvPr id="2" name="Rectangle 1"/>
+          <p:cNvSpPr/>
+          <p:nvPr/>
+        </p:nvSpPr>
+        <p:spPr>
+          <a:xfrm>
+            <a:off x="0" y="0"/>
+            <a:ext cx="12191695" cy="6858000"/>
+          </a:xfrm>
+          <a:prstGeom prst="rect">
+            <a:avLst/>
+          </a:prstGeom>
+          <a:solidFill>
+            <a:srgbClr val="0D1117"/>
+          </a:solidFill>
+          <a:ln>
+            <a:noFill/>
+          </a:ln>
+        </p:spPr>
+        <p:style>
+          <a:lnRef idx="1">
+            <a:schemeClr val="accent1"/>
+          </a:lnRef>
+          <a:fillRef idx="3">
+            <a:schemeClr val="accent1"/>
+          </a:fillRef>
+          <a:effectRef idx="2">
+            <a:schemeClr val="accent1"/>
+          </a:effectRef>
+          <a:fontRef idx="minor">
+            <a:schemeClr val="lt1"/>
+          </a:fontRef>
+        </p:style>
+        <p:txBody>
+          <a:bodyPr rtlCol="0" anchor="ctr"/>
+          <a:lstStyle/>
+          <a:p>
+            <a:pPr algn="ctr"/>
+          </a:p>
+        </p:txBody>
+      </p:sp>
+      <p:sp>
+        <p:nvSpPr>
+          <p:cNvPr id="3" name="Rectangle 2"/>
+          <p:cNvSpPr/>
+          <p:nvPr/>
+        </p:nvSpPr>
+        <p:spPr>
+          <a:xfrm>
+            <a:off x="0" y="0"/>
+            <a:ext cx="12191695" cy="73152"/>
+          </a:xfrm>
+          <a:prstGeom prst="rect">
+            <a:avLst/>
+          </a:prstGeom>
+          <a:solidFill>
+            <a:srgbClr val="20E3B2"/>
+          </a:solidFill>
+          <a:ln>
+            <a:noFill/>
+          </a:ln>
+        </p:spPr>
+        <p:style>
+          <a:lnRef idx="1">
+            <a:schemeClr val="accent1"/>
+          </a:lnRef>
+          <a:fillRef idx="3">
+            <a:schemeClr val="accent1"/>
+          </a:fillRef>
+          <a:effectRef idx="2">
+            <a:schemeClr val="accent1"/>
+          </a:effectRef>
+          <a:fontRef idx="minor">
+            <a:schemeClr val="lt1"/>
+          </a:fontRef>
+        </p:style>
+        <p:txBody>
+          <a:bodyPr rtlCol="0" anchor="ctr"/>
+          <a:lstStyle/>
+          <a:p>
+            <a:pPr algn="ctr"/>
+          </a:p>
+        </p:txBody>
+      </p:sp>
+      <p:pic>
+        <p:nvPicPr>
+          <p:cNvPr id="4" name="Picture 3" descr="tryolabs-logo-dark-bg.png"/>
+          <p:cNvPicPr>
+            <a:picLocks noChangeAspect="1"/>
+          </p:cNvPicPr>
+          <p:nvPr/>
+        </p:nvPicPr>
+        <p:blipFill>
+          <a:blip r:embed="rId2"/>
+          <a:stretch>
+            <a:fillRect/>
+          </a:stretch>
+        </p:blipFill>
+        <p:spPr>
+          <a:xfrm>
+            <a:off x="9829800" y="256032"/>
+            <a:ext cx="1874519" cy="417876"/>
+          </a:xfrm>
+          <a:prstGeom prst="rect">
+            <a:avLst/>
+          </a:prstGeom>
+        </p:spPr>
+      </p:pic>
+      <p:sp>
+        <p:nvSpPr>
+          <p:cNvPr id="5" name="TextBox 4"/>
+          <p:cNvSpPr txBox="1"/>
+          <p:nvPr/>
+        </p:nvSpPr>
+        <p:spPr>
+          <a:xfrm>
+            <a:off x="502920" y="256032"/>
+            <a:ext cx="9144000" cy="320040"/>
+          </a:xfrm>
+          <a:prstGeom prst="rect">
+            <a:avLst/>
+          </a:prstGeom>
+          <a:noFill/>
+        </p:spPr>
+        <p:txBody>
+          <a:bodyPr wrap="square">
+            <a:spAutoFit/>
+          </a:bodyPr>
+          <a:lstStyle/>
+          <a:p>
+            <a:pPr>
+              <a:defRPr sz="1050" b="1">
+                <a:solidFill>
+                  <a:srgbClr val="20E3B2"/>
+                </a:solidFill>
+                <a:latin typeface="Arial"/>
+              </a:defRPr>
+            </a:pPr>
+            <a:r>
+              <a:t>HANDS-ON LAB 4 CAPSTONE (PART 2/2) • STEP-BY-STEP INSTRUCTIONS &amp; PROMPTS</a:t>
+            </a:r>
+          </a:p>
+        </p:txBody>
+      </p:sp>
+      <p:sp>
+        <p:nvSpPr>
+          <p:cNvPr id="6" name="TextBox 5"/>
+          <p:cNvSpPr txBox="1"/>
+          <p:nvPr/>
+        </p:nvSpPr>
+        <p:spPr>
+          <a:xfrm>
+            <a:off x="502920" y="566928"/>
+            <a:ext cx="9235440" cy="594360"/>
+          </a:xfrm>
+          <a:prstGeom prst="rect">
+            <a:avLst/>
+          </a:prstGeom>
+          <a:noFill/>
+        </p:spPr>
+        <p:txBody>
+          <a:bodyPr wrap="square">
+            <a:spAutoFit/>
+          </a:bodyPr>
+          <a:lstStyle/>
+          <a:p>
+            <a:pPr>
+              <a:defRPr sz="2250" b="1">
+                <a:solidFill>
+                  <a:srgbClr val="F0F6FC"/>
+                </a:solidFill>
+                <a:latin typeface="Arial"/>
+              </a:defRPr>
+            </a:pPr>
+            <a:r>
+              <a:t>Lab 4 Instructions, `adk web` Testing &amp; Terraform Cloud Deploy</a:t>
+            </a:r>
+          </a:p>
+        </p:txBody>
+      </p:sp>
+      <p:sp>
+        <p:nvSpPr>
+          <p:cNvPr id="7" name="TextBox 6"/>
+          <p:cNvSpPr txBox="1"/>
+          <p:nvPr/>
+        </p:nvSpPr>
+        <p:spPr>
+          <a:xfrm>
+            <a:off x="502920" y="1207008"/>
+            <a:ext cx="11155680" cy="411480"/>
+          </a:xfrm>
+          <a:prstGeom prst="rect">
+            <a:avLst/>
+          </a:prstGeom>
+          <a:noFill/>
+        </p:spPr>
+        <p:txBody>
+          <a:bodyPr wrap="square">
+            <a:spAutoFit/>
+          </a:bodyPr>
+          <a:lstStyle/>
+          <a:p>
+            <a:pPr>
+              <a:defRPr sz="1300">
+                <a:solidFill>
+                  <a:srgbClr val="8B949E"/>
+                </a:solidFill>
+                <a:latin typeface="Arial"/>
+              </a:defRPr>
+            </a:pPr>
+            <a:r>
+              <a:t>Follow Steps 1–5 on the left and copy-paste prompts from labs/lab-04-multi-agent-capstone/PROMPTS.md</a:t>
+            </a:r>
+          </a:p>
+        </p:txBody>
+      </p:sp>
+      <p:sp>
+        <p:nvSpPr>
+          <p:cNvPr id="8" name="Rounded Rectangle 7"/>
+          <p:cNvSpPr/>
+          <p:nvPr/>
+        </p:nvSpPr>
+        <p:spPr>
+          <a:xfrm>
+            <a:off x="502920" y="1755648"/>
+            <a:ext cx="5504688" cy="4160520"/>
+          </a:xfrm>
+          <a:prstGeom prst="roundRect">
+            <a:avLst/>
+          </a:prstGeom>
+          <a:solidFill>
+            <a:srgbClr val="161B22"/>
+          </a:solidFill>
+          <a:ln w="19050">
+            <a:solidFill>
+              <a:srgbClr val="30363D"/>
+            </a:solidFill>
+          </a:ln>
+        </p:spPr>
+        <p:style>
+          <a:lnRef idx="1">
+            <a:schemeClr val="accent1"/>
+          </a:lnRef>
+          <a:fillRef idx="3">
+            <a:schemeClr val="accent1"/>
+          </a:fillRef>
+          <a:effectRef idx="2">
+            <a:schemeClr val="accent1"/>
+          </a:effectRef>
+          <a:fontRef idx="minor">
+            <a:schemeClr val="lt1"/>
+          </a:fontRef>
+        </p:style>
+        <p:txBody>
+          <a:bodyPr rtlCol="0" anchor="ctr"/>
+          <a:lstStyle/>
+          <a:p>
+            <a:pPr algn="ctr"/>
+          </a:p>
+        </p:txBody>
+      </p:sp>
+      <p:sp>
+        <p:nvSpPr>
+          <p:cNvPr id="9" name="Rectangle 8"/>
+          <p:cNvSpPr/>
+          <p:nvPr/>
+        </p:nvSpPr>
+        <p:spPr>
+          <a:xfrm>
+            <a:off x="502920" y="1755648"/>
+            <a:ext cx="5504688" cy="64008"/>
+          </a:xfrm>
+          <a:prstGeom prst="rect">
+            <a:avLst/>
+          </a:prstGeom>
+          <a:solidFill>
+            <a:srgbClr val="20E3B2"/>
+          </a:solidFill>
+          <a:ln>
+            <a:noFill/>
+          </a:ln>
+        </p:spPr>
+        <p:style>
+          <a:lnRef idx="1">
+            <a:schemeClr val="accent1"/>
+          </a:lnRef>
+          <a:fillRef idx="3">
+            <a:schemeClr val="accent1"/>
+          </a:fillRef>
+          <a:effectRef idx="2">
+            <a:schemeClr val="accent1"/>
+          </a:effectRef>
+          <a:fontRef idx="minor">
+            <a:schemeClr val="lt1"/>
+          </a:fontRef>
+        </p:style>
+        <p:txBody>
+          <a:bodyPr rtlCol="0" anchor="ctr"/>
+          <a:lstStyle/>
+          <a:p>
+            <a:pPr algn="ctr"/>
+          </a:p>
+        </p:txBody>
+      </p:sp>
+      <p:sp>
+        <p:nvSpPr>
+          <p:cNvPr id="10" name="TextBox 9"/>
+          <p:cNvSpPr txBox="1"/>
+          <p:nvPr/>
+        </p:nvSpPr>
+        <p:spPr>
+          <a:xfrm>
+            <a:off x="704088" y="1901952"/>
+            <a:ext cx="5102352" cy="3922776"/>
+          </a:xfrm>
+          <a:prstGeom prst="rect">
+            <a:avLst/>
+          </a:prstGeom>
+          <a:noFill/>
+        </p:spPr>
+        <p:txBody>
+          <a:bodyPr wrap="square">
+            <a:spAutoFit/>
+          </a:bodyPr>
+          <a:lstStyle/>
+          <a:p>
+            <a:pPr>
+              <a:spcAft>
+                <a:spcPts val="800"/>
+              </a:spcAft>
+              <a:defRPr sz="1500" b="1">
+                <a:solidFill>
+                  <a:srgbClr val="20E3B2"/>
+                </a:solidFill>
+                <a:latin typeface="Arial"/>
+              </a:defRPr>
+            </a:pPr>
+            <a:r>
+              <a:t>Step-by-Step Lab 4 Instructions</a:t>
+            </a:r>
+          </a:p>
+          <a:p>
+            <a:pPr>
+              <a:spcAft>
+                <a:spcPts val="650"/>
+              </a:spcAft>
+              <a:defRPr sz="1130">
+                <a:solidFill>
+                  <a:srgbClr val="F0F6FC"/>
+                </a:solidFill>
+                <a:latin typeface="Arial"/>
+              </a:defRPr>
+            </a:pPr>
+            <a:r>
+              <a:t>▸  Step 1 (Initialize Lab 04): Run `./labs/lab-04-multi-agent-capstone/install.sh`.</a:t>
+            </a:r>
+          </a:p>
+          <a:p>
+            <a:pPr>
+              <a:spcAft>
+                <a:spcPts val="650"/>
+              </a:spcAft>
+              <a:defRPr sz="1130">
+                <a:solidFill>
+                  <a:srgbClr val="F0F6FC"/>
+                </a:solidFill>
+                <a:latin typeface="Arial"/>
+              </a:defRPr>
+            </a:pPr>
+            <a:r>
+              <a:t>▸  Step 2 (TMF622 Order Engine): Implement `evaluate_order_feasibility()` &amp; `remediate_slice_for_order()` in `src/services/order_feasibility.py` (neighbor cell PRB steering).</a:t>
+            </a:r>
+          </a:p>
+          <a:p>
+            <a:pPr>
+              <a:spcAft>
+                <a:spcPts val="650"/>
+              </a:spcAft>
+              <a:defRPr sz="1130">
+                <a:solidFill>
+                  <a:srgbClr val="F0F6FC"/>
+                </a:solidFill>
+                <a:latin typeface="Arial"/>
+              </a:defRPr>
+            </a:pPr>
+            <a:r>
+              <a:t>▸  Step 3 (Google ADK &amp; A2A Orchestrator): Complete `src/agents/adk_a2a_orchestrator.py` (`RANSliceCapacityAgent`, `BSSCommercialSLAAgent`, `TelecomNexusOrchestratorAgent`, `GET /.well-known/agent.json`, `POST /api/v1/a2a`).</a:t>
+            </a:r>
+          </a:p>
+          <a:p>
+            <a:pPr>
+              <a:spcAft>
+                <a:spcPts val="650"/>
+              </a:spcAft>
+              <a:defRPr sz="1130">
+                <a:solidFill>
+                  <a:srgbClr val="F0F6FC"/>
+                </a:solidFill>
+                <a:latin typeface="Arial"/>
+              </a:defRPr>
+            </a:pPr>
+            <a:r>
+              <a:t>▸  Step 4 (Local ADK Dev UI): Run `./scripts/run_adk_web.sh` and test `telecom_nexus` interactively at `http://localhost:8080`.</a:t>
+            </a:r>
+          </a:p>
+          <a:p>
+            <a:pPr>
+              <a:spcAft>
+                <a:spcPts val="650"/>
+              </a:spcAft>
+              <a:defRPr sz="1130">
+                <a:solidFill>
+                  <a:srgbClr val="F0F6FC"/>
+                </a:solidFill>
+                <a:latin typeface="Arial"/>
+              </a:defRPr>
+            </a:pPr>
+            <a:r>
+              <a:t>▸  Step 5 (Terraform &amp; Full Verification): Run `./labs/lab-04-multi-agent-capstone/deploy_gcp.sh --dry-run` and `./labs/lab-04-multi-agent-capstone/verify.sh` (**21/21 tests pass!**).</a:t>
+            </a:r>
+          </a:p>
+        </p:txBody>
+      </p:sp>
+      <p:sp>
+        <p:nvSpPr>
+          <p:cNvPr id="11" name="Rounded Rectangle 10"/>
+          <p:cNvSpPr/>
+          <p:nvPr/>
+        </p:nvSpPr>
+        <p:spPr>
+          <a:xfrm>
+            <a:off x="6199632" y="1755648"/>
+            <a:ext cx="5486400" cy="4160520"/>
+          </a:xfrm>
+          <a:prstGeom prst="roundRect">
+            <a:avLst/>
+          </a:prstGeom>
+          <a:solidFill>
+            <a:srgbClr val="161B22"/>
+          </a:solidFill>
+          <a:ln w="19050">
+            <a:solidFill>
+              <a:srgbClr val="30363D"/>
+            </a:solidFill>
+          </a:ln>
+        </p:spPr>
+        <p:style>
+          <a:lnRef idx="1">
+            <a:schemeClr val="accent1"/>
+          </a:lnRef>
+          <a:fillRef idx="3">
+            <a:schemeClr val="accent1"/>
+          </a:fillRef>
+          <a:effectRef idx="2">
+            <a:schemeClr val="accent1"/>
+          </a:effectRef>
+          <a:fontRef idx="minor">
+            <a:schemeClr val="lt1"/>
+          </a:fontRef>
+        </p:style>
+        <p:txBody>
+          <a:bodyPr rtlCol="0" anchor="ctr"/>
+          <a:lstStyle/>
+          <a:p>
+            <a:pPr algn="ctr"/>
+          </a:p>
+        </p:txBody>
+      </p:sp>
+      <p:sp>
+        <p:nvSpPr>
+          <p:cNvPr id="12" name="Rectangle 11"/>
+          <p:cNvSpPr/>
+          <p:nvPr/>
+        </p:nvSpPr>
+        <p:spPr>
+          <a:xfrm>
+            <a:off x="6199632" y="1755648"/>
+            <a:ext cx="5486400" cy="64008"/>
+          </a:xfrm>
+          <a:prstGeom prst="rect">
+            <a:avLst/>
+          </a:prstGeom>
+          <a:solidFill>
+            <a:srgbClr val="3FB950"/>
+          </a:solidFill>
+          <a:ln>
+            <a:noFill/>
+          </a:ln>
+        </p:spPr>
+        <p:style>
+          <a:lnRef idx="1">
+            <a:schemeClr val="accent1"/>
+          </a:lnRef>
+          <a:fillRef idx="3">
+            <a:schemeClr val="accent1"/>
+          </a:fillRef>
+          <a:effectRef idx="2">
+            <a:schemeClr val="accent1"/>
+          </a:effectRef>
+          <a:fontRef idx="minor">
+            <a:schemeClr val="lt1"/>
+          </a:fontRef>
+        </p:style>
+        <p:txBody>
+          <a:bodyPr rtlCol="0" anchor="ctr"/>
+          <a:lstStyle/>
+          <a:p>
+            <a:pPr algn="ctr"/>
+          </a:p>
+        </p:txBody>
+      </p:sp>
+      <p:sp>
+        <p:nvSpPr>
+          <p:cNvPr id="13" name="TextBox 12"/>
+          <p:cNvSpPr txBox="1"/>
+          <p:nvPr/>
+        </p:nvSpPr>
+        <p:spPr>
+          <a:xfrm>
+            <a:off x="6400800" y="1901952"/>
+            <a:ext cx="5084064" cy="3922776"/>
+          </a:xfrm>
+          <a:prstGeom prst="rect">
+            <a:avLst/>
+          </a:prstGeom>
+          <a:noFill/>
+        </p:spPr>
+        <p:txBody>
+          <a:bodyPr wrap="square">
+            <a:spAutoFit/>
+          </a:bodyPr>
+          <a:lstStyle/>
+          <a:p>
+            <a:pPr>
+              <a:spcAft>
+                <a:spcPts val="800"/>
+              </a:spcAft>
+              <a:defRPr sz="1500" b="1">
+                <a:solidFill>
+                  <a:srgbClr val="3FB950"/>
+                </a:solidFill>
+                <a:latin typeface="Arial"/>
+              </a:defRPr>
+            </a:pPr>
+            <a:r>
+              <a:t>Copy-Paste Prompts, `adk web` &amp; Cloud Commands</a:t>
+            </a:r>
+          </a:p>
+          <a:p>
+            <a:pPr>
+              <a:spcAft>
+                <a:spcPts val="650"/>
+              </a:spcAft>
+              <a:defRPr sz="1130">
+                <a:solidFill>
+                  <a:srgbClr val="F0F6FC"/>
+                </a:solidFill>
+                <a:latin typeface="Arial"/>
+              </a:defRPr>
+            </a:pPr>
+            <a:r>
+              <a:t>▸  Prompt 1 — Feasibility Engine: '/plan Implement evaluate_order_feasibility and remediate_slice_for_order in @src/services/order_feasibility.py per 3GPP TS 28.552 PRB &lt; 80% and neighbor cell steering.'</a:t>
+            </a:r>
+          </a:p>
+          <a:p>
+            <a:pPr>
+              <a:spcAft>
+                <a:spcPts val="650"/>
+              </a:spcAft>
+              <a:defRPr sz="1130">
+                <a:solidFill>
+                  <a:srgbClr val="F0F6FC"/>
+                </a:solidFill>
+                <a:latin typeface="Arial"/>
+              </a:defRPr>
+            </a:pPr>
+            <a:r>
+              <a:t>▸  Prompt 2 — ADK + A2A Orchestrator: '/teamwork Implement RANSliceCapacityAgent, BSSCommercialSLAAgent, TelecomNexusOrchestratorAgent, get_a2a_agent_card, and handle_a2a_jsonrpc_request in @src/agents/adk_a2a_orchestrator.py.'</a:t>
+            </a:r>
+          </a:p>
+          <a:p>
+            <a:pPr>
+              <a:spcAft>
+                <a:spcPts val="650"/>
+              </a:spcAft>
+              <a:defRPr sz="1130">
+                <a:solidFill>
+                  <a:srgbClr val="F0F6FC"/>
+                </a:solidFill>
+                <a:latin typeface="Arial"/>
+              </a:defRPr>
+            </a:pPr>
+            <a:r>
+              <a:t>▸  Prompt 3 — Interactive `adk web` (http://localhost:8080): 'Evaluate TMF622 order ORD-TMF622-9001, execute autonomous 5G slice remediation, and calculate protected ACV.'</a:t>
+            </a:r>
+          </a:p>
+          <a:p>
+            <a:pPr>
+              <a:spcAft>
+                <a:spcPts val="650"/>
+              </a:spcAft>
+              <a:defRPr sz="1130">
+                <a:solidFill>
+                  <a:srgbClr val="F0F6FC"/>
+                </a:solidFill>
+                <a:latin typeface="Arial"/>
+              </a:defRPr>
+            </a:pPr>
+            <a:r>
+              <a:t>▸  Cloud Deploy &amp; Verify: Run `./labs/lab-04-multi-agent-capstone/deploy_gcp.sh --dry-run` and `./labs/lab-04-multi-agent-capstone/verify.sh`.</a:t>
+            </a:r>
+          </a:p>
+        </p:txBody>
+      </p:sp>
+      <p:sp>
+        <p:nvSpPr>
+          <p:cNvPr id="14" name="Rectangle 13"/>
+          <p:cNvSpPr/>
+          <p:nvPr/>
+        </p:nvSpPr>
+        <p:spPr>
+          <a:xfrm>
+            <a:off x="502920" y="6108192"/>
+            <a:ext cx="11183112" cy="475488"/>
+          </a:xfrm>
+          <a:prstGeom prst="rect">
+            <a:avLst/>
+          </a:prstGeom>
+          <a:solidFill>
+            <a:srgbClr val="161B22"/>
+          </a:solidFill>
+          <a:ln w="12700">
+            <a:solidFill>
+              <a:srgbClr val="30363D"/>
+            </a:solidFill>
+          </a:ln>
+        </p:spPr>
+        <p:style>
+          <a:lnRef idx="1">
+            <a:schemeClr val="accent1"/>
+          </a:lnRef>
+          <a:fillRef idx="3">
+            <a:schemeClr val="accent1"/>
+          </a:fillRef>
+          <a:effectRef idx="2">
+            <a:schemeClr val="accent1"/>
+          </a:effectRef>
+          <a:fontRef idx="minor">
+            <a:schemeClr val="lt1"/>
+          </a:fontRef>
+        </p:style>
+        <p:txBody>
+          <a:bodyPr rtlCol="0" anchor="ctr"/>
+          <a:lstStyle/>
+          <a:p>
+            <a:pPr algn="ctr"/>
+          </a:p>
+        </p:txBody>
+      </p:sp>
+      <p:sp>
+        <p:nvSpPr>
+          <p:cNvPr id="15" name="TextBox 14"/>
+          <p:cNvSpPr txBox="1"/>
+          <p:nvPr/>
+        </p:nvSpPr>
+        <p:spPr>
+          <a:xfrm>
+            <a:off x="685800" y="6172200"/>
+            <a:ext cx="10789920" cy="347472"/>
+          </a:xfrm>
+          <a:prstGeom prst="rect">
+            <a:avLst/>
+          </a:prstGeom>
+          <a:noFill/>
+        </p:spPr>
+        <p:txBody>
+          <a:bodyPr wrap="square">
+            <a:spAutoFit/>
+          </a:bodyPr>
+          <a:lstStyle/>
+          <a:p>
+            <a:pPr>
+              <a:defRPr sz="1150" b="1">
+                <a:solidFill>
+                  <a:srgbClr val="20E3B2"/>
+                </a:solidFill>
+                <a:latin typeface="Arial"/>
+              </a:defRPr>
+            </a:pPr>
+            <a:r>
+              <a:t>Delivered by Tryolabs • Self-Healing Checkpoint: ./labs/lab-04-multi-agent-capstone/apply_solution.sh    |    Slide 15/15</a:t>
             </a:r>
           </a:p>
         </p:txBody>
@@ -6031,7 +8825,7 @@
           <a:lstStyle/>
           <a:p>
             <a:pPr>
-              <a:defRPr sz="2400" b="1">
+              <a:defRPr sz="2250" b="1">
                 <a:solidFill>
                   <a:srgbClr val="F0F6FC"/>
                 </a:solidFill>
@@ -6067,7 +8861,7 @@
           <a:lstStyle/>
           <a:p>
             <a:pPr>
-              <a:defRPr sz="1350">
+              <a:defRPr sz="1300">
                 <a:solidFill>
                   <a:srgbClr val="8B949E"/>
                 </a:solidFill>
@@ -6200,8 +8994,8 @@
         </p:nvSpPr>
         <p:spPr>
           <a:xfrm>
-            <a:off x="6537960" y="1920240"/>
-            <a:ext cx="4919472" cy="3886200"/>
+            <a:off x="6510528" y="1901952"/>
+            <a:ext cx="4974336" cy="3922776"/>
           </a:xfrm>
           <a:prstGeom prst="rect">
             <a:avLst/>
@@ -6216,25 +9010,25 @@
           <a:p>
             <a:pPr>
               <a:spcAft>
-                <a:spcPts val="1000"/>
-              </a:spcAft>
-              <a:defRPr sz="1600" b="1">
-                <a:solidFill>
-                  <a:srgbClr val="58A6FF"/>
-                </a:solidFill>
-                <a:latin typeface="Arial"/>
-              </a:defRPr>
-            </a:pPr>
-            <a:r>
-              <a:t>Minute-by-Minute Workshop Schedule</a:t>
-            </a:r>
-          </a:p>
-          <a:p>
-            <a:pPr>
-              <a:spcAft>
                 <a:spcPts val="800"/>
               </a:spcAft>
-              <a:defRPr sz="1220">
+              <a:defRPr sz="1500" b="1">
+                <a:solidFill>
+                  <a:srgbClr val="58A6FF"/>
+                </a:solidFill>
+                <a:latin typeface="Arial"/>
+              </a:defRPr>
+            </a:pPr>
+            <a:r>
+              <a:t>Minute-by-Minute Workshop Schedule</a:t>
+            </a:r>
+          </a:p>
+          <a:p>
+            <a:pPr>
+              <a:spcAft>
+                <a:spcPts val="650"/>
+              </a:spcAft>
+              <a:defRPr sz="1130">
                 <a:solidFill>
                   <a:srgbClr val="F0F6FC"/>
                 </a:solidFill>
@@ -6248,9 +9042,9 @@
           <a:p>
             <a:pPr>
               <a:spcAft>
-                <a:spcPts val="800"/>
+                <a:spcPts val="650"/>
               </a:spcAft>
-              <a:defRPr sz="1220">
+              <a:defRPr sz="1130">
                 <a:solidFill>
                   <a:srgbClr val="F0F6FC"/>
                 </a:solidFill>
@@ -6264,9 +9058,9 @@
           <a:p>
             <a:pPr>
               <a:spcAft>
-                <a:spcPts val="800"/>
+                <a:spcPts val="650"/>
               </a:spcAft>
-              <a:defRPr sz="1220">
+              <a:defRPr sz="1130">
                 <a:solidFill>
                   <a:srgbClr val="F0F6FC"/>
                 </a:solidFill>
@@ -6280,9 +9074,9 @@
           <a:p>
             <a:pPr>
               <a:spcAft>
-                <a:spcPts val="800"/>
+                <a:spcPts val="650"/>
               </a:spcAft>
-              <a:defRPr sz="1220">
+              <a:defRPr sz="1130">
                 <a:solidFill>
                   <a:srgbClr val="F0F6FC"/>
                 </a:solidFill>
@@ -6296,9 +9090,9 @@
           <a:p>
             <a:pPr>
               <a:spcAft>
-                <a:spcPts val="800"/>
+                <a:spcPts val="650"/>
               </a:spcAft>
-              <a:defRPr sz="1220">
+              <a:defRPr sz="1130">
                 <a:solidFill>
                   <a:srgbClr val="F0F6FC"/>
                 </a:solidFill>
@@ -6387,7 +9181,7 @@
               </a:defRPr>
             </a:pPr>
             <a:r>
-              <a:t>Every lab includes README.md, PROMPTS.md (optimized Antigravity prompts), install.sh, and verify.sh.    |    Slide 2/11</a:t>
+              <a:t>Every lab includes LAB_0X_INSTRUCTIONS_EN.pdf, README.md, PROMPTS.md, install.sh, and verify.sh.    |    Slide 2/15</a:t>
             </a:r>
           </a:p>
         </p:txBody>
@@ -6579,7 +9373,7 @@
           <a:lstStyle/>
           <a:p>
             <a:pPr>
-              <a:defRPr sz="2400" b="1">
+              <a:defRPr sz="2250" b="1">
                 <a:solidFill>
                   <a:srgbClr val="F0F6FC"/>
                 </a:solidFill>
@@ -6615,7 +9409,7 @@
           <a:lstStyle/>
           <a:p>
             <a:pPr>
-              <a:defRPr sz="1350">
+              <a:defRPr sz="1300">
                 <a:solidFill>
                   <a:srgbClr val="8B949E"/>
                 </a:solidFill>
@@ -6748,8 +9542,8 @@
         </p:nvSpPr>
         <p:spPr>
           <a:xfrm>
-            <a:off x="6537960" y="1920240"/>
-            <a:ext cx="4919472" cy="3886200"/>
+            <a:off x="6510528" y="1901952"/>
+            <a:ext cx="4974336" cy="3922776"/>
           </a:xfrm>
           <a:prstGeom prst="rect">
             <a:avLst/>
@@ -6764,25 +9558,25 @@
           <a:p>
             <a:pPr>
               <a:spcAft>
-                <a:spcPts val="1000"/>
-              </a:spcAft>
-              <a:defRPr sz="1600" b="1">
-                <a:solidFill>
-                  <a:srgbClr val="BC8CFF"/>
-                </a:solidFill>
-                <a:latin typeface="Arial"/>
-              </a:defRPr>
-            </a:pPr>
-            <a:r>
-              <a:t>The 5-Stage Internal Execution Loop</a:t>
-            </a:r>
-          </a:p>
-          <a:p>
-            <a:pPr>
-              <a:spcAft>
                 <a:spcPts val="800"/>
               </a:spcAft>
-              <a:defRPr sz="1220">
+              <a:defRPr sz="1500" b="1">
+                <a:solidFill>
+                  <a:srgbClr val="BC8CFF"/>
+                </a:solidFill>
+                <a:latin typeface="Arial"/>
+              </a:defRPr>
+            </a:pPr>
+            <a:r>
+              <a:t>The 5-Stage Internal Execution Loop</a:t>
+            </a:r>
+          </a:p>
+          <a:p>
+            <a:pPr>
+              <a:spcAft>
+                <a:spcPts val="650"/>
+              </a:spcAft>
+              <a:defRPr sz="1130">
                 <a:solidFill>
                   <a:srgbClr val="F0F6FC"/>
                 </a:solidFill>
@@ -6796,9 +9590,9 @@
           <a:p>
             <a:pPr>
               <a:spcAft>
-                <a:spcPts val="800"/>
+                <a:spcPts val="650"/>
               </a:spcAft>
-              <a:defRPr sz="1220">
+              <a:defRPr sz="1130">
                 <a:solidFill>
                   <a:srgbClr val="F0F6FC"/>
                 </a:solidFill>
@@ -6812,9 +9606,9 @@
           <a:p>
             <a:pPr>
               <a:spcAft>
-                <a:spcPts val="800"/>
+                <a:spcPts val="650"/>
               </a:spcAft>
-              <a:defRPr sz="1220">
+              <a:defRPr sz="1130">
                 <a:solidFill>
                   <a:srgbClr val="F0F6FC"/>
                 </a:solidFill>
@@ -6828,9 +9622,9 @@
           <a:p>
             <a:pPr>
               <a:spcAft>
-                <a:spcPts val="800"/>
+                <a:spcPts val="650"/>
               </a:spcAft>
-              <a:defRPr sz="1220">
+              <a:defRPr sz="1130">
                 <a:solidFill>
                   <a:srgbClr val="F0F6FC"/>
                 </a:solidFill>
@@ -6844,9 +9638,9 @@
           <a:p>
             <a:pPr>
               <a:spcAft>
-                <a:spcPts val="800"/>
+                <a:spcPts val="650"/>
               </a:spcAft>
-              <a:defRPr sz="1220">
+              <a:defRPr sz="1130">
                 <a:solidFill>
                   <a:srgbClr val="F0F6FC"/>
                 </a:solidFill>
@@ -6935,7 +9729,7 @@
               </a:defRPr>
             </a:pPr>
             <a:r>
-              <a:t>Key Insight: Antigravity is not just chat—it is a stateful, verifiable closed-loop engineering runtime.    |    Slide 3/11</a:t>
+              <a:t>Key Insight: Antigravity is not just chat—it is a stateful, verifiable closed-loop engineering runtime.    |    Slide 3/15</a:t>
             </a:r>
           </a:p>
         </p:txBody>
@@ -7127,7 +9921,7 @@
           <a:lstStyle/>
           <a:p>
             <a:pPr>
-              <a:defRPr sz="2400" b="1">
+              <a:defRPr sz="2250" b="1">
                 <a:solidFill>
                   <a:srgbClr val="F0F6FC"/>
                 </a:solidFill>
@@ -7163,7 +9957,7 @@
           <a:lstStyle/>
           <a:p>
             <a:pPr>
-              <a:defRPr sz="1350">
+              <a:defRPr sz="1300">
                 <a:solidFill>
                   <a:srgbClr val="8B949E"/>
                 </a:solidFill>
@@ -7296,8 +10090,8 @@
         </p:nvSpPr>
         <p:spPr>
           <a:xfrm>
-            <a:off x="6537960" y="1920240"/>
-            <a:ext cx="4919472" cy="3886200"/>
+            <a:off x="6510528" y="1901952"/>
+            <a:ext cx="4974336" cy="3922776"/>
           </a:xfrm>
           <a:prstGeom prst="rect">
             <a:avLst/>
@@ -7312,25 +10106,25 @@
           <a:p>
             <a:pPr>
               <a:spcAft>
-                <a:spcPts val="1000"/>
-              </a:spcAft>
-              <a:defRPr sz="1600" b="1">
-                <a:solidFill>
-                  <a:srgbClr val="58A6FF"/>
-                </a:solidFill>
-                <a:latin typeface="Arial"/>
-              </a:defRPr>
-            </a:pPr>
-            <a:r>
-              <a:t>Features You Will Explore Today</a:t>
-            </a:r>
-          </a:p>
-          <a:p>
-            <a:pPr>
-              <a:spcAft>
                 <a:spcPts val="800"/>
               </a:spcAft>
-              <a:defRPr sz="1220">
+              <a:defRPr sz="1500" b="1">
+                <a:solidFill>
+                  <a:srgbClr val="58A6FF"/>
+                </a:solidFill>
+                <a:latin typeface="Arial"/>
+              </a:defRPr>
+            </a:pPr>
+            <a:r>
+              <a:t>Features You Will Explore Today</a:t>
+            </a:r>
+          </a:p>
+          <a:p>
+            <a:pPr>
+              <a:spcAft>
+                <a:spcPts val="650"/>
+              </a:spcAft>
+              <a:defRPr sz="1130">
                 <a:solidFill>
                   <a:srgbClr val="F0F6FC"/>
                 </a:solidFill>
@@ -7344,9 +10138,9 @@
           <a:p>
             <a:pPr>
               <a:spcAft>
-                <a:spcPts val="800"/>
+                <a:spcPts val="650"/>
               </a:spcAft>
-              <a:defRPr sz="1220">
+              <a:defRPr sz="1130">
                 <a:solidFill>
                   <a:srgbClr val="F0F6FC"/>
                 </a:solidFill>
@@ -7360,9 +10154,9 @@
           <a:p>
             <a:pPr>
               <a:spcAft>
-                <a:spcPts val="800"/>
+                <a:spcPts val="650"/>
               </a:spcAft>
-              <a:defRPr sz="1220">
+              <a:defRPr sz="1130">
                 <a:solidFill>
                   <a:srgbClr val="F0F6FC"/>
                 </a:solidFill>
@@ -7376,9 +10170,9 @@
           <a:p>
             <a:pPr>
               <a:spcAft>
-                <a:spcPts val="800"/>
+                <a:spcPts val="650"/>
               </a:spcAft>
-              <a:defRPr sz="1220">
+              <a:defRPr sz="1130">
                 <a:solidFill>
                   <a:srgbClr val="F0F6FC"/>
                 </a:solidFill>
@@ -7392,9 +10186,9 @@
           <a:p>
             <a:pPr>
               <a:spcAft>
-                <a:spcPts val="800"/>
+                <a:spcPts val="650"/>
               </a:spcAft>
-              <a:defRPr sz="1220">
+              <a:defRPr sz="1130">
                 <a:solidFill>
                   <a:srgbClr val="F0F6FC"/>
                 </a:solidFill>
@@ -7483,7 +10277,7 @@
               </a:defRPr>
             </a:pPr>
             <a:r>
-              <a:t>Pro Tip: Start complex tasks with /plan and @file mentions; use Cmd+I for localized formula fixes.    |    Slide 4/11</a:t>
+              <a:t>Pro Tip: Start complex tasks with /plan and @file mentions; use Cmd+I for localized formula fixes.    |    Slide 4/15</a:t>
             </a:r>
           </a:p>
         </p:txBody>
@@ -7647,7 +10441,7 @@
               </a:defRPr>
             </a:pPr>
             <a:r>
-              <a:t>HANDS-ON LAB 1 (52 MINUTES) • TRIAGE &amp; RECOVERY</a:t>
+              <a:t>HANDS-ON LAB 1 (PART 1/2) • OBJECTIVES &amp; WHAT YOU WILL BUILD</a:t>
             </a:r>
           </a:p>
         </p:txBody>
@@ -7675,7 +10469,7 @@
           <a:lstStyle/>
           <a:p>
             <a:pPr>
-              <a:defRPr sz="2400" b="1">
+              <a:defRPr sz="2250" b="1">
                 <a:solidFill>
                   <a:srgbClr val="F0F6FC"/>
                 </a:solidFill>
@@ -7683,7 +10477,7 @@
               </a:defRPr>
             </a:pPr>
             <a:r>
-              <a:t>Lab 1: Root-Cause Triage &amp; Revenue/Margin Leakage Recovery</a:t>
+              <a:t>Lab 1: 5G Slice SLA &amp; CDR Revenue Triage — Objectives &amp; Build Spec</a:t>
             </a:r>
           </a:p>
         </p:txBody>
@@ -7711,7 +10505,7 @@
           <a:lstStyle/>
           <a:p>
             <a:pPr>
-              <a:defRPr sz="1350">
+              <a:defRPr sz="1300">
                 <a:solidFill>
                   <a:srgbClr val="8B949E"/>
                 </a:solidFill>
@@ -7719,7 +10513,7 @@
               </a:defRPr>
             </a:pPr>
             <a:r>
-              <a:t>Use Antigravity (/plan, @mentions, Cmd+I, pytest) to diagnose and fix two high-impact bugs</a:t>
+              <a:t>52 Minutes • Printable PDF Guide: labs/lab-01-revenue-sla-triage/LAB_01_INSTRUCTIONS_EN.pdf</a:t>
             </a:r>
           </a:p>
         </p:txBody>
@@ -7844,8 +10638,8 @@
         </p:nvSpPr>
         <p:spPr>
           <a:xfrm>
-            <a:off x="6537960" y="1920240"/>
-            <a:ext cx="4919472" cy="3886200"/>
+            <a:off x="6510528" y="1901952"/>
+            <a:ext cx="4974336" cy="3922776"/>
           </a:xfrm>
           <a:prstGeom prst="rect">
             <a:avLst/>
@@ -7860,25 +10654,25 @@
           <a:p>
             <a:pPr>
               <a:spcAft>
-                <a:spcPts val="1000"/>
-              </a:spcAft>
-              <a:defRPr sz="1600" b="1">
-                <a:solidFill>
-                  <a:srgbClr val="D29922"/>
-                </a:solidFill>
-                <a:latin typeface="Arial"/>
-              </a:defRPr>
-            </a:pPr>
-            <a:r>
-              <a:t>Lab 1 Walkthrough &amp; Optimized Prompts</a:t>
-            </a:r>
-          </a:p>
-          <a:p>
-            <a:pPr>
-              <a:spcAft>
                 <a:spcPts val="800"/>
               </a:spcAft>
-              <a:defRPr sz="1220">
+              <a:defRPr sz="1500" b="1">
+                <a:solidFill>
+                  <a:srgbClr val="D29922"/>
+                </a:solidFill>
+                <a:latin typeface="Arial"/>
+              </a:defRPr>
+            </a:pPr>
+            <a:r>
+              <a:t>Lab 1 Objectives &amp; What You Will Build</a:t>
+            </a:r>
+          </a:p>
+          <a:p>
+            <a:pPr>
+              <a:spcAft>
+                <a:spcPts val="650"/>
+              </a:spcAft>
+              <a:defRPr sz="1130">
                 <a:solidFill>
                   <a:srgbClr val="F0F6FC"/>
                 </a:solidFill>
@@ -7886,15 +10680,15 @@
               </a:defRPr>
             </a:pPr>
             <a:r>
-              <a:t>▸  Setup: Run ./labs/lab-01-revenue-sla-triage/install.sh &amp; open http://localhost:8001</a:t>
+              <a:t>▸  Objective 1 (Multi-File Agentic Triage): Master Antigravity `@mentions`, `/plan`, and inline `Cmd/Ctrl+I` to correlate 3GPP RAN alarms (`ran_alarms.jsonl`) with BSS billing &amp; SLA code.</a:t>
             </a:r>
           </a:p>
           <a:p>
             <a:pPr>
               <a:spcAft>
-                <a:spcPts val="800"/>
+                <a:spcPts val="650"/>
               </a:spcAft>
-              <a:defRPr sz="1220">
+              <a:defRPr sz="1130">
                 <a:solidFill>
                   <a:srgbClr val="F0F6FC"/>
                 </a:solidFill>
@@ -7902,15 +10696,15 @@
               </a:defRPr>
             </a:pPr>
             <a:r>
-              <a:t>▸  Bug #1 (BSS Revenue Leakage): src/services/cdr_rating.py uses 1000^3 instead of 1024^3 GiB and drops the 1.50x NR_5G roaming multiplier ($54,672.22 leaked)</a:t>
+              <a:t>▸  Objective 2 (Revenue &amp; SLA Accuracy): Eliminate floating-point/unit bugs leaking `$54,672.22` in 5G CDRs and stop `$35,000` in false B2B SLA alerts on non-active contracts.</a:t>
             </a:r>
           </a:p>
           <a:p>
             <a:pPr>
               <a:spcAft>
-                <a:spcPts val="800"/>
+                <a:spcPts val="650"/>
               </a:spcAft>
-              <a:defRPr sz="1220">
+              <a:defRPr sz="1130">
                 <a:solidFill>
                   <a:srgbClr val="F0F6FC"/>
                 </a:solidFill>
@@ -7918,15 +10712,15 @@
               </a:defRPr>
             </a:pPr>
             <a:r>
-              <a:t>▸  Bug #2 (OSS/BSS SLA Risk): src/services/sla_monitor.py inverts latency (&lt; vs &gt;) and includes SUSPENDED contract CTR-B2B-1007 ($35K false alert)</a:t>
+              <a:t>▸  What You Will Build #1 (3GPP TAP3 Rating Engine): Refactor `src/services/cdr_rating.py` to enforce binary GiB (`Decimal(1024 ** 3)`) and apply `roaming_markup` across all visiting PLMNs (`NR_5G` + `EUTRAN_4G`).</a:t>
             </a:r>
           </a:p>
           <a:p>
             <a:pPr>
               <a:spcAft>
-                <a:spcPts val="800"/>
+                <a:spcPts val="650"/>
               </a:spcAft>
-              <a:defRPr sz="1220">
+              <a:defRPr sz="1130">
                 <a:solidFill>
                   <a:srgbClr val="F0F6FC"/>
                 </a:solidFill>
@@ -7934,15 +10728,15 @@
               </a:defRPr>
             </a:pPr>
             <a:r>
-              <a:t>▸  Prompt 1 (/plan): '/plan Analyze @src/services/cdr_rating.py, @src/services/sla_monitor.py and @tests/test_lab01_triage.py to diagnose the revenue and SLA bugs'</a:t>
+              <a:t>▸  What You Will Build #2 (B2B SLA Breach Monitor): Refactor `src/services/sla_monitor.py` to filter `WHERE status = 'ACTIVE'` and trigger breaches when `worst_latency &gt; committed_latency`.</a:t>
             </a:r>
           </a:p>
           <a:p>
             <a:pPr>
               <a:spcAft>
-                <a:spcPts val="800"/>
+                <a:spcPts val="650"/>
               </a:spcAft>
-              <a:defRPr sz="1220">
+              <a:defRPr sz="1130">
                 <a:solidFill>
                   <a:srgbClr val="F0F6FC"/>
                 </a:solidFill>
@@ -7950,7 +10744,7 @@
               </a:defRPr>
             </a:pPr>
             <a:r>
-              <a:t>▸  Prompt 2 (Cmd+I &amp; Fix): Use Inline Cmd+I to fix Decimal math, then run ./labs/lab-01-revenue-sla-triage/verify.sh</a:t>
+              <a:t>▸  Deliverable &amp; Verification: Pass all 5 unit/integration tests in `tests/test_lab01_triage.py` (`./labs/lab-01-revenue-sla-triage/verify.sh`) and verify KPIs on `http://localhost:8001`.</a:t>
             </a:r>
           </a:p>
         </p:txBody>
@@ -8031,7 +10825,7 @@
               </a:defRPr>
             </a:pPr>
             <a:r>
-              <a:t>Open PROMPTS.md inside labs/lab-01-* for copy-pasteable prompts across Discovery, /plan, Cmd+I &amp; Verification.    |    Slide 5/11</a:t>
+              <a:t>Delivered by Tryolabs • Full printable guide: LAB_01_INSTRUCTIONS_EN.pdf    |    Slide 5/15</a:t>
             </a:r>
           </a:p>
         </p:txBody>
@@ -8195,7 +10989,7 @@
               </a:defRPr>
             </a:pPr>
             <a:r>
-              <a:t>THEORY MODULE 2 (6 MINUTES) • CUSTOMIZATION ARCHITECTURE</a:t>
+              <a:t>HANDS-ON LAB 1 (PART 2/2) • STEP-BY-STEP INSTRUCTIONS &amp; PROMPTS</a:t>
             </a:r>
           </a:p>
         </p:txBody>
@@ -8223,7 +11017,7 @@
           <a:lstStyle/>
           <a:p>
             <a:pPr>
-              <a:defRPr sz="2400" b="1">
+              <a:defRPr sz="2250" b="1">
                 <a:solidFill>
                   <a:srgbClr val="F0F6FC"/>
                 </a:solidFill>
@@ -8231,7 +11025,7 @@
               </a:defRPr>
             </a:pPr>
             <a:r>
-              <a:t>How Rules &amp; Progressive Disclosure Skills Work Internally</a:t>
+              <a:t>Lab 1 Instructions &amp; Copy-Paste Antigravity Prompts</a:t>
             </a:r>
           </a:p>
         </p:txBody>
@@ -8259,7 +11053,7 @@
           <a:lstStyle/>
           <a:p>
             <a:pPr>
-              <a:defRPr sz="1350">
+              <a:defRPr sz="1300">
                 <a:solidFill>
                   <a:srgbClr val="8B949E"/>
                 </a:solidFill>
@@ -8267,45 +11061,21 @@
               </a:defRPr>
             </a:pPr>
             <a:r>
-              <a:t>Specializing Antigravity for your industry without overflowing the context window</a:t>
-            </a:r>
-          </a:p>
-        </p:txBody>
-      </p:sp>
-      <p:pic>
-        <p:nvPicPr>
-          <p:cNvPr id="8" name="Picture 7" descr="customizations_en.png"/>
-          <p:cNvPicPr>
-            <a:picLocks noChangeAspect="1"/>
-          </p:cNvPicPr>
-          <p:nvPr/>
-        </p:nvPicPr>
-        <p:blipFill>
-          <a:blip r:embed="rId3"/>
-          <a:stretch>
-            <a:fillRect/>
-          </a:stretch>
-        </p:blipFill>
+              <a:t>Follow Steps 1–5 on the left and copy-paste prompts from labs/lab-01-revenue-sla-triage/PROMPTS.md</a:t>
+            </a:r>
+          </a:p>
+        </p:txBody>
+      </p:sp>
+      <p:sp>
+        <p:nvSpPr>
+          <p:cNvPr id="8" name="Rounded Rectangle 7"/>
+          <p:cNvSpPr/>
+          <p:nvPr/>
+        </p:nvSpPr>
         <p:spPr>
           <a:xfrm>
             <a:off x="502920" y="1755648"/>
-            <a:ext cx="5623560" cy="3186684"/>
-          </a:xfrm>
-          <a:prstGeom prst="rect">
-            <a:avLst/>
-          </a:prstGeom>
-        </p:spPr>
-      </p:pic>
-      <p:sp>
-        <p:nvSpPr>
-          <p:cNvPr id="9" name="Rounded Rectangle 8"/>
-          <p:cNvSpPr/>
-          <p:nvPr/>
-        </p:nvSpPr>
-        <p:spPr>
-          <a:xfrm>
-            <a:off x="6309360" y="1755648"/>
-            <a:ext cx="5376672" cy="4160520"/>
+            <a:ext cx="5504688" cy="4160520"/>
           </a:xfrm>
           <a:prstGeom prst="roundRect">
             <a:avLst/>
@@ -8343,20 +11113,20 @@
       </p:sp>
       <p:sp>
         <p:nvSpPr>
-          <p:cNvPr id="10" name="Rectangle 9"/>
+          <p:cNvPr id="9" name="Rectangle 8"/>
           <p:cNvSpPr/>
           <p:nvPr/>
         </p:nvSpPr>
         <p:spPr>
           <a:xfrm>
-            <a:off x="6309360" y="1755648"/>
-            <a:ext cx="5376672" cy="64008"/>
+            <a:off x="502920" y="1755648"/>
+            <a:ext cx="5504688" cy="64008"/>
           </a:xfrm>
           <a:prstGeom prst="rect">
             <a:avLst/>
           </a:prstGeom>
           <a:solidFill>
-            <a:srgbClr val="3FB950"/>
+            <a:srgbClr val="D29922"/>
           </a:solidFill>
           <a:ln>
             <a:noFill/>
@@ -8386,14 +11156,14 @@
       </p:sp>
       <p:sp>
         <p:nvSpPr>
-          <p:cNvPr id="11" name="TextBox 10"/>
+          <p:cNvPr id="10" name="TextBox 9"/>
           <p:cNvSpPr txBox="1"/>
           <p:nvPr/>
         </p:nvSpPr>
         <p:spPr>
           <a:xfrm>
-            <a:off x="6537960" y="1920240"/>
-            <a:ext cx="4919472" cy="3886200"/>
+            <a:off x="704088" y="1901952"/>
+            <a:ext cx="5102352" cy="3922776"/>
           </a:xfrm>
           <a:prstGeom prst="rect">
             <a:avLst/>
@@ -8408,25 +11178,232 @@
           <a:p>
             <a:pPr>
               <a:spcAft>
-                <a:spcPts val="1000"/>
+                <a:spcPts val="800"/>
               </a:spcAft>
-              <a:defRPr sz="1600" b="1">
-                <a:solidFill>
-                  <a:srgbClr val="3FB950"/>
-                </a:solidFill>
-                <a:latin typeface="Arial"/>
-              </a:defRPr>
-            </a:pPr>
-            <a:r>
-              <a:t>Rules vs. Skills vs. /learn</a:t>
-            </a:r>
-          </a:p>
+              <a:defRPr sz="1500" b="1">
+                <a:solidFill>
+                  <a:srgbClr val="D29922"/>
+                </a:solidFill>
+                <a:latin typeface="Arial"/>
+              </a:defRPr>
+            </a:pPr>
+            <a:r>
+              <a:t>Step-by-Step Lab 1 Instructions</a:t>
+            </a:r>
+          </a:p>
+          <a:p>
+            <a:pPr>
+              <a:spcAft>
+                <a:spcPts val="650"/>
+              </a:spcAft>
+              <a:defRPr sz="1130">
+                <a:solidFill>
+                  <a:srgbClr val="F0F6FC"/>
+                </a:solidFill>
+                <a:latin typeface="Arial"/>
+              </a:defRPr>
+            </a:pPr>
+            <a:r>
+              <a:t>▸  Step 1 (Initialize Lab 01): Run `./labs/lab-01-revenue-sla-triage/install.sh` to seed `data/telecom_nexus.db` and activate the starter bugs.</a:t>
+            </a:r>
+          </a:p>
+          <a:p>
+            <a:pPr>
+              <a:spcAft>
+                <a:spcPts val="650"/>
+              </a:spcAft>
+              <a:defRPr sz="1130">
+                <a:solidFill>
+                  <a:srgbClr val="F0F6FC"/>
+                </a:solidFill>
+                <a:latin typeface="Arial"/>
+              </a:defRPr>
+            </a:pPr>
+            <a:r>
+              <a:t>▸  Step 2 (Reproduce Failing Tests): Run `./.venv/bin/pytest tests/test_lab01_triage.py` to observe the CDR underbilling and SLA latency failures.</a:t>
+            </a:r>
+          </a:p>
+          <a:p>
+            <a:pPr>
+              <a:spcAft>
+                <a:spcPts val="650"/>
+              </a:spcAft>
+              <a:defRPr sz="1130">
+                <a:solidFill>
+                  <a:srgbClr val="F0F6FC"/>
+                </a:solidFill>
+                <a:latin typeface="Arial"/>
+              </a:defRPr>
+            </a:pPr>
+            <a:r>
+              <a:t>▸  Step 3 (Fix `src/services/cdr_rating.py`): Set `BYTES_DIVISOR = Decimal(1024 ** 3)` (binary GiB per 3GPP TS 32.298) and apply `roaming_markup` whenever `roaming_plmn != HOME_PLMN`.</a:t>
+            </a:r>
+          </a:p>
+          <a:p>
+            <a:pPr>
+              <a:spcAft>
+                <a:spcPts val="650"/>
+              </a:spcAft>
+              <a:defRPr sz="1130">
+                <a:solidFill>
+                  <a:srgbClr val="F0F6FC"/>
+                </a:solidFill>
+                <a:latin typeface="Arial"/>
+              </a:defRPr>
+            </a:pPr>
+            <a:r>
+              <a:t>▸  Step 4 (Fix `src/services/sla_monitor.py`): Add `WHERE status = 'ACTIVE'` to the SQL query and fix `latency_breach` to `worst_latency &gt; committed_latency`.</a:t>
+            </a:r>
+          </a:p>
+          <a:p>
+            <a:pPr>
+              <a:spcAft>
+                <a:spcPts val="650"/>
+              </a:spcAft>
+              <a:defRPr sz="1130">
+                <a:solidFill>
+                  <a:srgbClr val="F0F6FC"/>
+                </a:solidFill>
+                <a:latin typeface="Arial"/>
+              </a:defRPr>
+            </a:pPr>
+            <a:r>
+              <a:t>▸  Step 5 (Verify &amp; Inspect): Run `./labs/lab-01-revenue-sla-triage/verify.sh` (`5 passed`: `$54,672.22` CDR leakage recovered; 5 `ACTIVE` SLA breaches = `$224,500.00`).</a:t>
+            </a:r>
+          </a:p>
+        </p:txBody>
+      </p:sp>
+      <p:sp>
+        <p:nvSpPr>
+          <p:cNvPr id="11" name="Rounded Rectangle 10"/>
+          <p:cNvSpPr/>
+          <p:nvPr/>
+        </p:nvSpPr>
+        <p:spPr>
+          <a:xfrm>
+            <a:off x="6199632" y="1755648"/>
+            <a:ext cx="5486400" cy="4160520"/>
+          </a:xfrm>
+          <a:prstGeom prst="roundRect">
+            <a:avLst/>
+          </a:prstGeom>
+          <a:solidFill>
+            <a:srgbClr val="161B22"/>
+          </a:solidFill>
+          <a:ln w="19050">
+            <a:solidFill>
+              <a:srgbClr val="30363D"/>
+            </a:solidFill>
+          </a:ln>
+        </p:spPr>
+        <p:style>
+          <a:lnRef idx="1">
+            <a:schemeClr val="accent1"/>
+          </a:lnRef>
+          <a:fillRef idx="3">
+            <a:schemeClr val="accent1"/>
+          </a:fillRef>
+          <a:effectRef idx="2">
+            <a:schemeClr val="accent1"/>
+          </a:effectRef>
+          <a:fontRef idx="minor">
+            <a:schemeClr val="lt1"/>
+          </a:fontRef>
+        </p:style>
+        <p:txBody>
+          <a:bodyPr rtlCol="0" anchor="ctr"/>
+          <a:lstStyle/>
+          <a:p>
+            <a:pPr algn="ctr"/>
+          </a:p>
+        </p:txBody>
+      </p:sp>
+      <p:sp>
+        <p:nvSpPr>
+          <p:cNvPr id="12" name="Rectangle 11"/>
+          <p:cNvSpPr/>
+          <p:nvPr/>
+        </p:nvSpPr>
+        <p:spPr>
+          <a:xfrm>
+            <a:off x="6199632" y="1755648"/>
+            <a:ext cx="5486400" cy="64008"/>
+          </a:xfrm>
+          <a:prstGeom prst="rect">
+            <a:avLst/>
+          </a:prstGeom>
+          <a:solidFill>
+            <a:srgbClr val="58A6FF"/>
+          </a:solidFill>
+          <a:ln>
+            <a:noFill/>
+          </a:ln>
+        </p:spPr>
+        <p:style>
+          <a:lnRef idx="1">
+            <a:schemeClr val="accent1"/>
+          </a:lnRef>
+          <a:fillRef idx="3">
+            <a:schemeClr val="accent1"/>
+          </a:fillRef>
+          <a:effectRef idx="2">
+            <a:schemeClr val="accent1"/>
+          </a:effectRef>
+          <a:fontRef idx="minor">
+            <a:schemeClr val="lt1"/>
+          </a:fontRef>
+        </p:style>
+        <p:txBody>
+          <a:bodyPr rtlCol="0" anchor="ctr"/>
+          <a:lstStyle/>
+          <a:p>
+            <a:pPr algn="ctr"/>
+          </a:p>
+        </p:txBody>
+      </p:sp>
+      <p:sp>
+        <p:nvSpPr>
+          <p:cNvPr id="13" name="TextBox 12"/>
+          <p:cNvSpPr txBox="1"/>
+          <p:nvPr/>
+        </p:nvSpPr>
+        <p:spPr>
+          <a:xfrm>
+            <a:off x="6400800" y="1901952"/>
+            <a:ext cx="5084064" cy="3922776"/>
+          </a:xfrm>
+          <a:prstGeom prst="rect">
+            <a:avLst/>
+          </a:prstGeom>
+          <a:noFill/>
+        </p:spPr>
+        <p:txBody>
+          <a:bodyPr wrap="square">
+            <a:spAutoFit/>
+          </a:bodyPr>
+          <a:lstStyle/>
           <a:p>
             <a:pPr>
               <a:spcAft>
                 <a:spcPts val="800"/>
               </a:spcAft>
-              <a:defRPr sz="1220">
+              <a:defRPr sz="1500" b="1">
+                <a:solidFill>
+                  <a:srgbClr val="58A6FF"/>
+                </a:solidFill>
+                <a:latin typeface="Arial"/>
+              </a:defRPr>
+            </a:pPr>
+            <a:r>
+              <a:t>Copy-Paste Prompts (PROMPTS.md) &amp; Verification</a:t>
+            </a:r>
+          </a:p>
+          <a:p>
+            <a:pPr>
+              <a:spcAft>
+                <a:spcPts val="650"/>
+              </a:spcAft>
+              <a:defRPr sz="1130">
                 <a:solidFill>
                   <a:srgbClr val="F0F6FC"/>
                 </a:solidFill>
@@ -8434,15 +11411,15 @@
               </a:defRPr>
             </a:pPr>
             <a:r>
-              <a:t>▸  Hierarchical Rules (GEMINI.md &amp; .agents/rules/*.md): Always-on or model-decided domain invariants loaded from workspace root down to target directories (deduplicated automatically)</a:t>
+              <a:t>▸  Prompt 1 — Discovery (@Mentions): '@data/logs/ran_alarms.jsonl @src/services/cdr_rating.py @src/services/sla_monitor.py @tests/test_lab01_triage.py Run pytest to reproduce ALM-BSS-8006 and ALM-3GPP-8001..8005 and explain the exact root causes.'</a:t>
             </a:r>
           </a:p>
           <a:p>
             <a:pPr>
               <a:spcAft>
-                <a:spcPts val="800"/>
+                <a:spcPts val="650"/>
               </a:spcAft>
-              <a:defRPr sz="1220">
+              <a:defRPr sz="1130">
                 <a:solidFill>
                   <a:srgbClr val="F0F6FC"/>
                 </a:solidFill>
@@ -8450,15 +11427,15 @@
               </a:defRPr>
             </a:pPr>
             <a:r>
-              <a:t>▸  Progressive Disclosure Skills (.agents/skills/&lt;name&gt;/SKILL.md): Only lightweight YAML frontmatter (name, description) sits in system prompt; full markdown runbook &amp; scripts/ load ONLY when triggered!</a:t>
+              <a:t>▸  Prompt 2 — Planning (/plan): '/plan Create a step-by-step remediation plan to fix cdr_rating.py (1024**3 GiB &amp; NR_5G roaming markup) and sla_monitor.py (ACTIVE contracts &amp; worst_latency &gt; committed_latency).'</a:t>
             </a:r>
           </a:p>
           <a:p>
             <a:pPr>
               <a:spcAft>
-                <a:spcPts val="800"/>
+                <a:spcPts val="650"/>
               </a:spcAft>
-              <a:defRPr sz="1220">
+              <a:defRPr sz="1130">
                 <a:solidFill>
                   <a:srgbClr val="F0F6FC"/>
                 </a:solidFill>
@@ -8466,15 +11443,15 @@
               </a:defRPr>
             </a:pPr>
             <a:r>
-              <a:t>▸  Self-Improving Memory (/learn): Ask Antigravity to codify a newly discovered debugging pattern or architectural standard into a reusable workspace customization</a:t>
+              <a:t>▸  Prompt 3 — Inline Edit (Cmd+I): Select lines 19–48 in `cdr_rating.py` -&gt; 'Fix BYTES_DIVISOR to Decimal(1024**3) and apply roaming markup to all visiting PLMNs including NR_5G.'</a:t>
             </a:r>
           </a:p>
           <a:p>
             <a:pPr>
               <a:spcAft>
-                <a:spcPts val="800"/>
+                <a:spcPts val="650"/>
               </a:spcAft>
-              <a:defRPr sz="1220">
+              <a:defRPr sz="1130">
                 <a:solidFill>
                   <a:srgbClr val="F0F6FC"/>
                 </a:solidFill>
@@ -8482,14 +11459,14 @@
               </a:defRPr>
             </a:pPr>
             <a:r>
-              <a:t>▸  Precedence Hierarchy: Workspace (.agents/) &gt; Declared JSON (skills.json) &gt; Global (~/.gemini/config/) &gt; Built-in</a:t>
-            </a:r>
-          </a:p>
-        </p:txBody>
-      </p:sp>
-      <p:sp>
-        <p:nvSpPr>
-          <p:cNvPr id="12" name="Rectangle 11"/>
+              <a:t>▸  Prompt 4 — Autonomous Verify: 'Apply fixes to @src/services/cdr_rating.py and @src/services/sla_monitor.py, then run ./labs/lab-01-revenue-sla-triage/verify.sh.'</a:t>
+            </a:r>
+          </a:p>
+        </p:txBody>
+      </p:sp>
+      <p:sp>
+        <p:nvSpPr>
+          <p:cNvPr id="14" name="Rectangle 13"/>
           <p:cNvSpPr/>
           <p:nvPr/>
         </p:nvSpPr>
@@ -8534,7 +11511,7 @@
       </p:sp>
       <p:sp>
         <p:nvSpPr>
-          <p:cNvPr id="13" name="TextBox 12"/>
+          <p:cNvPr id="15" name="TextBox 14"/>
           <p:cNvSpPr txBox="1"/>
           <p:nvPr/>
         </p:nvSpPr>
@@ -8563,7 +11540,7 @@
               </a:defRPr>
             </a:pPr>
             <a:r>
-              <a:t>Rule of Thumb: Put permanent guardrails in GEMINI.md/rules; put multi-step workflows &amp; scripts in SKILL.md.    |    Slide 6/11</a:t>
+              <a:t>Delivered by Tryolabs • Self-Healing Checkpoint: ./labs/lab-01-revenue-sla-triage/apply_solution.sh    |    Slide 6/15</a:t>
             </a:r>
           </a:p>
         </p:txBody>
@@ -8727,7 +11704,7 @@
               </a:defRPr>
             </a:pPr>
             <a:r>
-              <a:t>HANDS-ON LAB 2 (54 MINUTES) • DOMAIN BRAIN</a:t>
+              <a:t>THEORY MODULE 2 (6 MINUTES) • CUSTOMIZATION ARCHITECTURE</a:t>
             </a:r>
           </a:p>
         </p:txBody>
@@ -8755,7 +11732,7 @@
           <a:lstStyle/>
           <a:p>
             <a:pPr>
-              <a:defRPr sz="2400" b="1">
+              <a:defRPr sz="2250" b="1">
                 <a:solidFill>
                   <a:srgbClr val="F0F6FC"/>
                 </a:solidFill>
@@ -8763,7 +11740,7 @@
               </a:defRPr>
             </a:pPr>
             <a:r>
-              <a:t>Lab 2: Encoding Industry Rules &amp; Executive Audit Skills</a:t>
+              <a:t>How Rules &amp; Progressive Disclosure Skills Work Internally</a:t>
             </a:r>
           </a:p>
         </p:txBody>
@@ -8791,7 +11768,7 @@
           <a:lstStyle/>
           <a:p>
             <a:pPr>
-              <a:defRPr sz="1350">
+              <a:defRPr sz="1300">
                 <a:solidFill>
                   <a:srgbClr val="8B949E"/>
                 </a:solidFill>
@@ -8799,7 +11776,7 @@
               </a:defRPr>
             </a:pPr>
             <a:r>
-              <a:t>Teach Antigravity your industry standards and build an automated Technical + Commercial Risk Auditor</a:t>
+              <a:t>Specializing Antigravity for your industry without overflowing the context window</a:t>
             </a:r>
           </a:p>
         </p:txBody>
@@ -8924,8 +11901,8 @@
         </p:nvSpPr>
         <p:spPr>
           <a:xfrm>
-            <a:off x="6537960" y="1920240"/>
-            <a:ext cx="4919472" cy="3886200"/>
+            <a:off x="6510528" y="1901952"/>
+            <a:ext cx="4974336" cy="3922776"/>
           </a:xfrm>
           <a:prstGeom prst="rect">
             <a:avLst/>
@@ -8940,25 +11917,25 @@
           <a:p>
             <a:pPr>
               <a:spcAft>
-                <a:spcPts val="1000"/>
-              </a:spcAft>
-              <a:defRPr sz="1600" b="1">
-                <a:solidFill>
-                  <a:srgbClr val="3FB950"/>
-                </a:solidFill>
-                <a:latin typeface="Arial"/>
-              </a:defRPr>
-            </a:pPr>
-            <a:r>
-              <a:t>Lab 2 Walkthrough &amp; Optimized Prompts</a:t>
-            </a:r>
-          </a:p>
-          <a:p>
-            <a:pPr>
-              <a:spcAft>
                 <a:spcPts val="800"/>
               </a:spcAft>
-              <a:defRPr sz="1220">
+              <a:defRPr sz="1500" b="1">
+                <a:solidFill>
+                  <a:srgbClr val="3FB950"/>
+                </a:solidFill>
+                <a:latin typeface="Arial"/>
+              </a:defRPr>
+            </a:pPr>
+            <a:r>
+              <a:t>Rules vs. Skills vs. /learn</a:t>
+            </a:r>
+          </a:p>
+          <a:p>
+            <a:pPr>
+              <a:spcAft>
+                <a:spcPts val="650"/>
+              </a:spcAft>
+              <a:defRPr sz="1130">
                 <a:solidFill>
                   <a:srgbClr val="F0F6FC"/>
                 </a:solidFill>
@@ -8966,15 +11943,15 @@
               </a:defRPr>
             </a:pPr>
             <a:r>
-              <a:t>▸  Setup: Run ./labs/lab-02-rules-and-skills/install.sh (auto-applies Lab 1 solution)</a:t>
+              <a:t>▸  Hierarchical Rules (GEMINI.md &amp; .agents/rules/*.md): Always-on or model-decided domain invariants loaded from workspace root down to target directories (deduplicated automatically)</a:t>
             </a:r>
           </a:p>
           <a:p>
             <a:pPr>
               <a:spcAft>
-                <a:spcPts val="800"/>
+                <a:spcPts val="650"/>
               </a:spcAft>
-              <a:defRPr sz="1220">
+              <a:defRPr sz="1130">
                 <a:solidFill>
                   <a:srgbClr val="F0F6FC"/>
                 </a:solidFill>
@@ -8982,15 +11959,15 @@
               </a:defRPr>
             </a:pPr>
             <a:r>
-              <a:t>▸  Task 1 (Workspace Rules): Create GEMINI.md &amp; .agents/rules/telecom-standards.md enforcing Decimal(0.01) billing math, 3GPP S-NSSAI SST {1,2,3}, and TMF622 schemas</a:t>
+              <a:t>▸  Progressive Disclosure Skills (.agents/skills/&lt;name&gt;/SKILL.md): Only lightweight YAML frontmatter (name, description) sits in system prompt; full markdown runbook &amp; scripts/ load ONLY when triggered!</a:t>
             </a:r>
           </a:p>
           <a:p>
             <a:pPr>
               <a:spcAft>
-                <a:spcPts val="800"/>
+                <a:spcPts val="650"/>
               </a:spcAft>
-              <a:defRPr sz="1220">
+              <a:defRPr sz="1130">
                 <a:solidFill>
                   <a:srgbClr val="F0F6FC"/>
                 </a:solidFill>
@@ -8998,15 +11975,15 @@
               </a:defRPr>
             </a:pPr>
             <a:r>
-              <a:t>▸  Task 2 (Progressive Skill): Create .agents/skills/sla-revenue-audit/SKILL.md with YAML frontmatter and executive audit runbook</a:t>
+              <a:t>▸  Self-Improving Memory (/learn): Ask Antigravity to codify a newly discovered debugging pattern or architectural standard into a reusable workspace customization</a:t>
             </a:r>
           </a:p>
           <a:p>
             <a:pPr>
               <a:spcAft>
-                <a:spcPts val="800"/>
+                <a:spcPts val="650"/>
               </a:spcAft>
-              <a:defRPr sz="1220">
+              <a:defRPr sz="1130">
                 <a:solidFill>
                   <a:srgbClr val="F0F6FC"/>
                 </a:solidFill>
@@ -9014,23 +11991,7 @@
               </a:defRPr>
             </a:pPr>
             <a:r>
-              <a:t>▸  Optimized Prompt: 'Create @GEMINI.md, @.agents/rules/telecom-standards.md and @.agents/skills/sla-revenue-audit/SKILL.md, then run @scripts/run_sla_audit.py'</a:t>
-            </a:r>
-          </a:p>
-          <a:p>
-            <a:pPr>
-              <a:spcAft>
-                <a:spcPts val="800"/>
-              </a:spcAft>
-              <a:defRPr sz="1220">
-                <a:solidFill>
-                  <a:srgbClr val="F0F6FC"/>
-                </a:solidFill>
-                <a:latin typeface="Arial"/>
-              </a:defRPr>
-            </a:pPr>
-            <a:r>
-              <a:t>▸  Verify: Run ./labs/lab-02-rules-and-skills/verify.sh &amp; try /learn to persist a new rule!</a:t>
+              <a:t>▸  Precedence Hierarchy: Workspace (.agents/) &gt; Declared JSON (skills.json) &gt; Global (~/.gemini/config/) &gt; Built-in</a:t>
             </a:r>
           </a:p>
         </p:txBody>
@@ -9111,7 +12072,7 @@
               </a:defRPr>
             </a:pPr>
             <a:r>
-              <a:t>Open labs/lab-02-rules-and-skills/PROMPTS.md for step-by-step prompts to generate and verify your Rules &amp; Skill.    |    Slide 7/11</a:t>
+              <a:t>Rule of Thumb: Put permanent guardrails in GEMINI.md/rules; put multi-step workflows &amp; scripts in SKILL.md.    |    Slide 7/15</a:t>
             </a:r>
           </a:p>
         </p:txBody>
@@ -9275,7 +12236,7 @@
               </a:defRPr>
             </a:pPr>
             <a:r>
-              <a:t>THEORY MODULE 3 (6 MINUTES) • MCP, HOOKS &amp; ENTERPRISE GOVERNANCE</a:t>
+              <a:t>HANDS-ON LAB 2 (PART 1/2) • OBJECTIVES &amp; WHAT YOU WILL BUILD</a:t>
             </a:r>
           </a:p>
         </p:txBody>
@@ -9303,7 +12264,7 @@
           <a:lstStyle/>
           <a:p>
             <a:pPr>
-              <a:defRPr sz="2400" b="1">
+              <a:defRPr sz="2250" b="1">
                 <a:solidFill>
                   <a:srgbClr val="F0F6FC"/>
                 </a:solidFill>
@@ -9311,7 +12272,7 @@
               </a:defRPr>
             </a:pPr>
             <a:r>
-              <a:t>Live MCP Bridge, Deterministic Hooks &amp; Gemini Enterprise Governance</a:t>
+              <a:t>Lab 2: Workspace Rules &amp; Progressive Skills — Objectives &amp; Build Spec</a:t>
             </a:r>
           </a:p>
         </p:txBody>
@@ -9339,7 +12300,7 @@
           <a:lstStyle/>
           <a:p>
             <a:pPr>
-              <a:defRPr sz="1350">
+              <a:defRPr sz="1300">
                 <a:solidFill>
                   <a:srgbClr val="8B949E"/>
                 </a:solidFill>
@@ -9347,14 +12308,14 @@
               </a:defRPr>
             </a:pPr>
             <a:r>
-              <a:t>Connecting live databases safely while proving end-to-end enterprise security in Google Cloud</a:t>
+              <a:t>54 Minutes • Printable PDF Guide: labs/lab-02-rules-and-skills/LAB_02_INSTRUCTIONS_EN.pdf</a:t>
             </a:r>
           </a:p>
         </p:txBody>
       </p:sp>
       <p:pic>
         <p:nvPicPr>
-          <p:cNvPr id="8" name="Picture 7" descr="governance_en.png"/>
+          <p:cNvPr id="8" name="Picture 7" descr="customizations_en.png"/>
           <p:cNvPicPr>
             <a:picLocks noChangeAspect="1"/>
           </p:cNvPicPr>
@@ -9436,7 +12397,7 @@
             <a:avLst/>
           </a:prstGeom>
           <a:solidFill>
-            <a:srgbClr val="D29922"/>
+            <a:srgbClr val="3FB950"/>
           </a:solidFill>
           <a:ln>
             <a:noFill/>
@@ -9472,8 +12433,8 @@
         </p:nvSpPr>
         <p:spPr>
           <a:xfrm>
-            <a:off x="6537960" y="1920240"/>
-            <a:ext cx="4919472" cy="3886200"/>
+            <a:off x="6510528" y="1901952"/>
+            <a:ext cx="4974336" cy="3922776"/>
           </a:xfrm>
           <a:prstGeom prst="rect">
             <a:avLst/>
@@ -9488,25 +12449,25 @@
           <a:p>
             <a:pPr>
               <a:spcAft>
-                <a:spcPts val="1000"/>
-              </a:spcAft>
-              <a:defRPr sz="1600" b="1">
-                <a:solidFill>
-                  <a:srgbClr val="D29922"/>
-                </a:solidFill>
-                <a:latin typeface="Arial"/>
-              </a:defRPr>
-            </a:pPr>
-            <a:r>
-              <a:t>2-Layer Enterprise Security &amp; Governance</a:t>
-            </a:r>
-          </a:p>
-          <a:p>
-            <a:pPr>
-              <a:spcAft>
                 <a:spcPts val="800"/>
               </a:spcAft>
-              <a:defRPr sz="1220">
+              <a:defRPr sz="1500" b="1">
+                <a:solidFill>
+                  <a:srgbClr val="3FB950"/>
+                </a:solidFill>
+                <a:latin typeface="Arial"/>
+              </a:defRPr>
+            </a:pPr>
+            <a:r>
+              <a:t>Lab 2 Objectives &amp; What You Will Build</a:t>
+            </a:r>
+          </a:p>
+          <a:p>
+            <a:pPr>
+              <a:spcAft>
+                <a:spcPts val="650"/>
+              </a:spcAft>
+              <a:defRPr sz="1130">
                 <a:solidFill>
                   <a:srgbClr val="F0F6FC"/>
                 </a:solidFill>
@@ -9514,15 +12475,15 @@
               </a:defRPr>
             </a:pPr>
             <a:r>
-              <a:t>▸  Layer 1 — Google Cloud &amp; Gemini Enterprise (Instructor Live Demo): Cloud IAM (roles/cloudaicompanion.user), Cloud Audit Logs (cloudaicompanion.googleapis.com), VPC-SC perimeters, Zero Data Retention / No Training on customer code</a:t>
+              <a:t>▸  Objective 1 (Hierarchical Domain Rules): Teach Antigravity permanent 3GPP, TAP3, TMF622, and CPNI invariants so every future prompt obeys telecom standards automatically.</a:t>
             </a:r>
           </a:p>
           <a:p>
             <a:pPr>
               <a:spcAft>
-                <a:spcPts val="800"/>
+                <a:spcPts val="650"/>
               </a:spcAft>
-              <a:defRPr sz="1220">
+              <a:defRPr sz="1130">
                 <a:solidFill>
                   <a:srgbClr val="F0F6FC"/>
                 </a:solidFill>
@@ -9530,15 +12491,15 @@
               </a:defRPr>
             </a:pPr>
             <a:r>
-              <a:t>▸  Layer 2 — Antigravity Client Security: Tool Execution Policy (strict / request-review / proceed-in-sandbox), OS Terminal Sandbox, Non-Workspace File Access (deny), Command &amp; Browser Allow/Denylists</a:t>
+              <a:t>▸  Objective 2 (Progressive Disclosure Skills): Package a repeatable executive audit workflow into `.agents/skills/` where only YAML frontmatter loads until triggered on demand.</a:t>
             </a:r>
           </a:p>
           <a:p>
             <a:pPr>
               <a:spcAft>
-                <a:spcPts val="800"/>
+                <a:spcPts val="650"/>
               </a:spcAft>
-              <a:defRPr sz="1220">
+              <a:defRPr sz="1130">
                 <a:solidFill>
                   <a:srgbClr val="F0F6FC"/>
                 </a:solidFill>
@@ -9546,15 +12507,15 @@
               </a:defRPr>
             </a:pPr>
             <a:r>
-              <a:t>▸  Live Context via FastMCP (.agents/mcp_config.json): Exposes strongly-typed Python tools querying live SQLite &amp; telemetry over stdio/SSE</a:t>
+              <a:t>▸  What You Will Build #1 (`GEMINI.md` &amp; `.agents/rules/telecom-standards.md`): Workspace memory &amp; rule files enforcing `Decimal(ROUND_HALF_UP)`, binary GiB (`1024**3`), `PRB &lt; 80%`, and CPNI `IMSI`/`MSISDN` masking.</a:t>
             </a:r>
           </a:p>
           <a:p>
             <a:pPr>
               <a:spcAft>
-                <a:spcPts val="800"/>
+                <a:spcPts val="650"/>
               </a:spcAft>
-              <a:defRPr sz="1220">
+              <a:defRPr sz="1130">
                 <a:solidFill>
                   <a:srgbClr val="F0F6FC"/>
                 </a:solidFill>
@@ -9562,7 +12523,23 @@
               </a:defRPr>
             </a:pPr>
             <a:r>
-              <a:t>▸  Deterministic Lifecycle Hooks (.agents/hooks.json): PreToolUse script inspects tool JSON on stdin; exit code 2 hard-blocks policy violations and writes an immutable audit log!</a:t>
+              <a:t>▸  What You Will Build #2 (`.agents/skills/sla-revenue-audit/SKILL.md`): Progressive disclosure skill with YAML frontmatter (`name`, `description`) that runs `scripts/run_sla_audit.py`.</a:t>
+            </a:r>
+          </a:p>
+          <a:p>
+            <a:pPr>
+              <a:spcAft>
+                <a:spcPts val="650"/>
+              </a:spcAft>
+              <a:defRPr sz="1130">
+                <a:solidFill>
+                  <a:srgbClr val="F0F6FC"/>
+                </a:solidFill>
+                <a:latin typeface="Arial"/>
+              </a:defRPr>
+            </a:pPr>
+            <a:r>
+              <a:t>▸  Deliverable &amp; Verification: Generate `data/exports/sla_revenue_audit_report.json` &amp; `.md` and pass all 4 tests in `./labs/lab-02-rules-and-skills/verify.sh`.</a:t>
             </a:r>
           </a:p>
         </p:txBody>
@@ -9643,7 +12620,7 @@
               </a:defRPr>
             </a:pPr>
             <a:r>
-              <a:t>Instructor Demo: Show Cloud Audit Logs in GCP Console + trigger a deterministic PreToolUse Hook block locally!    |    Slide 8/11</a:t>
+              <a:t>Delivered by Tryolabs • Full printable guide: LAB_02_INSTRUCTIONS_EN.pdf    |    Slide 8/15</a:t>
             </a:r>
           </a:p>
         </p:txBody>
@@ -9807,7 +12784,7 @@
               </a:defRPr>
             </a:pPr>
             <a:r>
-              <a:t>HANDS-ON LAB 3 (55 MINUTES) • LIVE MCP &amp; COMPLIANCE HOOKS</a:t>
+              <a:t>HANDS-ON LAB 2 (PART 2/2) • STEP-BY-STEP INSTRUCTIONS &amp; PROMPTS</a:t>
             </a:r>
           </a:p>
         </p:txBody>
@@ -9835,7 +12812,7 @@
           <a:lstStyle/>
           <a:p>
             <a:pPr>
-              <a:defRPr sz="2400" b="1">
+              <a:defRPr sz="2250" b="1">
                 <a:solidFill>
                   <a:srgbClr val="F0F6FC"/>
                 </a:solidFill>
@@ -9843,7 +12820,7 @@
               </a:defRPr>
             </a:pPr>
             <a:r>
-              <a:t>Lab 3: Building a Local FastMCP Server &amp; Compliance Guardrails</a:t>
+              <a:t>Lab 2 Instructions &amp; Copy-Paste Antigravity Prompts</a:t>
             </a:r>
           </a:p>
         </p:txBody>
@@ -9871,7 +12848,7 @@
           <a:lstStyle/>
           <a:p>
             <a:pPr>
-              <a:defRPr sz="1350">
+              <a:defRPr sz="1300">
                 <a:solidFill>
                   <a:srgbClr val="8B949E"/>
                 </a:solidFill>
@@ -9879,45 +12856,21 @@
               </a:defRPr>
             </a:pPr>
             <a:r>
-              <a:t>Give Antigravity live database/telemetry tools and deterministic PreToolUse protection</a:t>
-            </a:r>
-          </a:p>
-        </p:txBody>
-      </p:sp>
-      <p:pic>
-        <p:nvPicPr>
-          <p:cNvPr id="8" name="Picture 7" descr="governance_en.png"/>
-          <p:cNvPicPr>
-            <a:picLocks noChangeAspect="1"/>
-          </p:cNvPicPr>
-          <p:nvPr/>
-        </p:nvPicPr>
-        <p:blipFill>
-          <a:blip r:embed="rId3"/>
-          <a:stretch>
-            <a:fillRect/>
-          </a:stretch>
-        </p:blipFill>
+              <a:t>Follow Steps 1–5 on the left and copy-paste prompts from labs/lab-02-rules-and-skills/PROMPTS.md</a:t>
+            </a:r>
+          </a:p>
+        </p:txBody>
+      </p:sp>
+      <p:sp>
+        <p:nvSpPr>
+          <p:cNvPr id="8" name="Rounded Rectangle 7"/>
+          <p:cNvSpPr/>
+          <p:nvPr/>
+        </p:nvSpPr>
         <p:spPr>
           <a:xfrm>
             <a:off x="502920" y="1755648"/>
-            <a:ext cx="5623560" cy="3186684"/>
-          </a:xfrm>
-          <a:prstGeom prst="rect">
-            <a:avLst/>
-          </a:prstGeom>
-        </p:spPr>
-      </p:pic>
-      <p:sp>
-        <p:nvSpPr>
-          <p:cNvPr id="9" name="Rounded Rectangle 8"/>
-          <p:cNvSpPr/>
-          <p:nvPr/>
-        </p:nvSpPr>
-        <p:spPr>
-          <a:xfrm>
-            <a:off x="6309360" y="1755648"/>
-            <a:ext cx="5376672" cy="4160520"/>
+            <a:ext cx="5504688" cy="4160520"/>
           </a:xfrm>
           <a:prstGeom prst="roundRect">
             <a:avLst/>
@@ -9955,20 +12908,20 @@
       </p:sp>
       <p:sp>
         <p:nvSpPr>
-          <p:cNvPr id="10" name="Rectangle 9"/>
+          <p:cNvPr id="9" name="Rectangle 8"/>
           <p:cNvSpPr/>
           <p:nvPr/>
         </p:nvSpPr>
         <p:spPr>
           <a:xfrm>
-            <a:off x="6309360" y="1755648"/>
-            <a:ext cx="5376672" cy="64008"/>
+            <a:off x="502920" y="1755648"/>
+            <a:ext cx="5504688" cy="64008"/>
           </a:xfrm>
           <a:prstGeom prst="rect">
             <a:avLst/>
           </a:prstGeom>
           <a:solidFill>
-            <a:srgbClr val="BC8CFF"/>
+            <a:srgbClr val="3FB950"/>
           </a:solidFill>
           <a:ln>
             <a:noFill/>
@@ -9998,14 +12951,14 @@
       </p:sp>
       <p:sp>
         <p:nvSpPr>
-          <p:cNvPr id="11" name="TextBox 10"/>
+          <p:cNvPr id="10" name="TextBox 9"/>
           <p:cNvSpPr txBox="1"/>
           <p:nvPr/>
         </p:nvSpPr>
         <p:spPr>
           <a:xfrm>
-            <a:off x="6537960" y="1920240"/>
-            <a:ext cx="4919472" cy="3886200"/>
+            <a:off x="704088" y="1901952"/>
+            <a:ext cx="5102352" cy="3922776"/>
           </a:xfrm>
           <a:prstGeom prst="rect">
             <a:avLst/>
@@ -10020,25 +12973,232 @@
           <a:p>
             <a:pPr>
               <a:spcAft>
-                <a:spcPts val="1000"/>
+                <a:spcPts val="800"/>
               </a:spcAft>
-              <a:defRPr sz="1600" b="1">
-                <a:solidFill>
-                  <a:srgbClr val="BC8CFF"/>
-                </a:solidFill>
-                <a:latin typeface="Arial"/>
-              </a:defRPr>
-            </a:pPr>
-            <a:r>
-              <a:t>Lab 3 Walkthrough &amp; Optimized Prompts</a:t>
-            </a:r>
-          </a:p>
+              <a:defRPr sz="1500" b="1">
+                <a:solidFill>
+                  <a:srgbClr val="3FB950"/>
+                </a:solidFill>
+                <a:latin typeface="Arial"/>
+              </a:defRPr>
+            </a:pPr>
+            <a:r>
+              <a:t>Step-by-Step Lab 2 Instructions</a:t>
+            </a:r>
+          </a:p>
+          <a:p>
+            <a:pPr>
+              <a:spcAft>
+                <a:spcPts val="650"/>
+              </a:spcAft>
+              <a:defRPr sz="1130">
+                <a:solidFill>
+                  <a:srgbClr val="F0F6FC"/>
+                </a:solidFill>
+                <a:latin typeface="Arial"/>
+              </a:defRPr>
+            </a:pPr>
+            <a:r>
+              <a:t>▸  Step 1 (Initialize Lab 02): Run `./labs/lab-02-rules-and-skills/install.sh` (automatically applies Lab 01 solution first).</a:t>
+            </a:r>
+          </a:p>
+          <a:p>
+            <a:pPr>
+              <a:spcAft>
+                <a:spcPts val="650"/>
+              </a:spcAft>
+              <a:defRPr sz="1130">
+                <a:solidFill>
+                  <a:srgbClr val="F0F6FC"/>
+                </a:solidFill>
+                <a:latin typeface="Arial"/>
+              </a:defRPr>
+            </a:pPr>
+            <a:r>
+              <a:t>▸  Step 2 (Author Root `GEMINI.md`): Define OSS/BSS tables (`ran_telemetry`, `b2b_contracts`, `cdr_records`), `Decimal(ROUND_HALF_UP)` billing math, and `1024 ** 3` GiB.</a:t>
+            </a:r>
+          </a:p>
+          <a:p>
+            <a:pPr>
+              <a:spcAft>
+                <a:spcPts val="650"/>
+              </a:spcAft>
+              <a:defRPr sz="1130">
+                <a:solidFill>
+                  <a:srgbClr val="F0F6FC"/>
+                </a:solidFill>
+                <a:latin typeface="Arial"/>
+              </a:defRPr>
+            </a:pPr>
+            <a:r>
+              <a:t>▸  Step 3 (Author `.agents/rules/telecom-standards.md`): Codify 3GPP TS 28.552 (`PRB &lt; 80%`), TAP3 `NR_5G` roaming rules, TMF622 order states, and CPNI `IMSI`/`MSISDN` masking.</a:t>
+            </a:r>
+          </a:p>
+          <a:p>
+            <a:pPr>
+              <a:spcAft>
+                <a:spcPts val="650"/>
+              </a:spcAft>
+              <a:defRPr sz="1130">
+                <a:solidFill>
+                  <a:srgbClr val="F0F6FC"/>
+                </a:solidFill>
+                <a:latin typeface="Arial"/>
+              </a:defRPr>
+            </a:pPr>
+            <a:r>
+              <a:t>▸  Step 4 (Author `.agents/skills/sla-revenue-audit/SKILL.md`): Add YAML frontmatter (`name: sla-revenue-audit`, `description: ...`) and instructions to run `./.venv/bin/python scripts/run_sla_audit.py`.</a:t>
+            </a:r>
+          </a:p>
+          <a:p>
+            <a:pPr>
+              <a:spcAft>
+                <a:spcPts val="650"/>
+              </a:spcAft>
+              <a:defRPr sz="1130">
+                <a:solidFill>
+                  <a:srgbClr val="F0F6FC"/>
+                </a:solidFill>
+                <a:latin typeface="Arial"/>
+              </a:defRPr>
+            </a:pPr>
+            <a:r>
+              <a:t>▸  Step 5 (Verify): Run `./labs/lab-02-rules-and-skills/verify.sh` (`4 passed` + executive JSON/MD reports generated).</a:t>
+            </a:r>
+          </a:p>
+        </p:txBody>
+      </p:sp>
+      <p:sp>
+        <p:nvSpPr>
+          <p:cNvPr id="11" name="Rounded Rectangle 10"/>
+          <p:cNvSpPr/>
+          <p:nvPr/>
+        </p:nvSpPr>
+        <p:spPr>
+          <a:xfrm>
+            <a:off x="6199632" y="1755648"/>
+            <a:ext cx="5486400" cy="4160520"/>
+          </a:xfrm>
+          <a:prstGeom prst="roundRect">
+            <a:avLst/>
+          </a:prstGeom>
+          <a:solidFill>
+            <a:srgbClr val="161B22"/>
+          </a:solidFill>
+          <a:ln w="19050">
+            <a:solidFill>
+              <a:srgbClr val="30363D"/>
+            </a:solidFill>
+          </a:ln>
+        </p:spPr>
+        <p:style>
+          <a:lnRef idx="1">
+            <a:schemeClr val="accent1"/>
+          </a:lnRef>
+          <a:fillRef idx="3">
+            <a:schemeClr val="accent1"/>
+          </a:fillRef>
+          <a:effectRef idx="2">
+            <a:schemeClr val="accent1"/>
+          </a:effectRef>
+          <a:fontRef idx="minor">
+            <a:schemeClr val="lt1"/>
+          </a:fontRef>
+        </p:style>
+        <p:txBody>
+          <a:bodyPr rtlCol="0" anchor="ctr"/>
+          <a:lstStyle/>
+          <a:p>
+            <a:pPr algn="ctr"/>
+          </a:p>
+        </p:txBody>
+      </p:sp>
+      <p:sp>
+        <p:nvSpPr>
+          <p:cNvPr id="12" name="Rectangle 11"/>
+          <p:cNvSpPr/>
+          <p:nvPr/>
+        </p:nvSpPr>
+        <p:spPr>
+          <a:xfrm>
+            <a:off x="6199632" y="1755648"/>
+            <a:ext cx="5486400" cy="64008"/>
+          </a:xfrm>
+          <a:prstGeom prst="rect">
+            <a:avLst/>
+          </a:prstGeom>
+          <a:solidFill>
+            <a:srgbClr val="58A6FF"/>
+          </a:solidFill>
+          <a:ln>
+            <a:noFill/>
+          </a:ln>
+        </p:spPr>
+        <p:style>
+          <a:lnRef idx="1">
+            <a:schemeClr val="accent1"/>
+          </a:lnRef>
+          <a:fillRef idx="3">
+            <a:schemeClr val="accent1"/>
+          </a:fillRef>
+          <a:effectRef idx="2">
+            <a:schemeClr val="accent1"/>
+          </a:effectRef>
+          <a:fontRef idx="minor">
+            <a:schemeClr val="lt1"/>
+          </a:fontRef>
+        </p:style>
+        <p:txBody>
+          <a:bodyPr rtlCol="0" anchor="ctr"/>
+          <a:lstStyle/>
+          <a:p>
+            <a:pPr algn="ctr"/>
+          </a:p>
+        </p:txBody>
+      </p:sp>
+      <p:sp>
+        <p:nvSpPr>
+          <p:cNvPr id="13" name="TextBox 12"/>
+          <p:cNvSpPr txBox="1"/>
+          <p:nvPr/>
+        </p:nvSpPr>
+        <p:spPr>
+          <a:xfrm>
+            <a:off x="6400800" y="1901952"/>
+            <a:ext cx="5084064" cy="3922776"/>
+          </a:xfrm>
+          <a:prstGeom prst="rect">
+            <a:avLst/>
+          </a:prstGeom>
+          <a:noFill/>
+        </p:spPr>
+        <p:txBody>
+          <a:bodyPr wrap="square">
+            <a:spAutoFit/>
+          </a:bodyPr>
+          <a:lstStyle/>
           <a:p>
             <a:pPr>
               <a:spcAft>
                 <a:spcPts val="800"/>
               </a:spcAft>
-              <a:defRPr sz="1220">
+              <a:defRPr sz="1500" b="1">
+                <a:solidFill>
+                  <a:srgbClr val="58A6FF"/>
+                </a:solidFill>
+                <a:latin typeface="Arial"/>
+              </a:defRPr>
+            </a:pPr>
+            <a:r>
+              <a:t>Copy-Paste Prompts (PROMPTS.md) &amp; Verification</a:t>
+            </a:r>
+          </a:p>
+          <a:p>
+            <a:pPr>
+              <a:spcAft>
+                <a:spcPts val="650"/>
+              </a:spcAft>
+              <a:defRPr sz="1130">
                 <a:solidFill>
                   <a:srgbClr val="F0F6FC"/>
                 </a:solidFill>
@@ -10046,15 +13206,15 @@
               </a:defRPr>
             </a:pPr>
             <a:r>
-              <a:t>▸  Setup: Run ./labs/lab-03-mcp-and-hooks/install.sh</a:t>
+              <a:t>▸  Prompt 1 — Author Workspace Rules: '/plan Create @GEMINI.md and @.agents/rules/telecom-standards.md codifying 3GPP TS 28.552 PRB/PDCP thresholds, binary GiB (1024**3), Decimal ROUND_HALF_UP, TMF622 order states, and CPNI IMSI/MSISDN masking.'</a:t>
             </a:r>
           </a:p>
           <a:p>
             <a:pPr>
               <a:spcAft>
-                <a:spcPts val="800"/>
+                <a:spcPts val="650"/>
               </a:spcAft>
-              <a:defRPr sz="1220">
+              <a:defRPr sz="1130">
                 <a:solidFill>
                   <a:srgbClr val="F0F6FC"/>
                 </a:solidFill>
@@ -10062,15 +13222,15 @@
               </a:defRPr>
             </a:pPr>
             <a:r>
-              <a:t>▸  Task 1 (FastMCP Server): Implement live tools in @mcp_server/telecom_mcp.py (query_ran_cell_health, calculate_contract_penalty_exposure, inspect_unbilled_cdrs, evaluate_slice_capacity)</a:t>
+              <a:t>▸  Prompt 2 — Build Progressive Skill: 'Create @.agents/skills/sla-revenue-audit/SKILL.md with YAML frontmatter (name: sla-revenue-audit) that runs ./scripts/run_sla_audit.py and outputs data/exports/sla_revenue_audit_report.json and .md.'</a:t>
             </a:r>
           </a:p>
           <a:p>
             <a:pPr>
               <a:spcAft>
-                <a:spcPts val="800"/>
+                <a:spcPts val="650"/>
               </a:spcAft>
-              <a:defRPr sz="1220">
+              <a:defRPr sz="1130">
                 <a:solidFill>
                   <a:srgbClr val="F0F6FC"/>
                 </a:solidFill>
@@ -10078,15 +13238,15 @@
               </a:defRPr>
             </a:pPr>
             <a:r>
-              <a:t>▸  Task 2 (MCP &amp; Deterministic Hook): Wire .agents/mcp_config.json and .agents/hooks.json (runs @scripts/audit_hook.py to block destructive SQL with exit code 2 &amp; log SOX/CPNI audits)</a:t>
+              <a:t>▸  Prompt 3 — Trigger Skill On-Demand: 'Run an executive 5G Slice SLA and CDR revenue assurance audit using our workspace skill and summarize the top breached contracts.'</a:t>
             </a:r>
           </a:p>
           <a:p>
             <a:pPr>
               <a:spcAft>
-                <a:spcPts val="800"/>
+                <a:spcPts val="650"/>
               </a:spcAft>
-              <a:defRPr sz="1220">
+              <a:defRPr sz="1130">
                 <a:solidFill>
                   <a:srgbClr val="F0F6FC"/>
                 </a:solidFill>
@@ -10094,30 +13254,14 @@
               </a:defRPr>
             </a:pPr>
             <a:r>
-              <a:t>▸  Optimized Prompt: 'Complete @mcp_server/telecom_mcp.py, register @.agents/mcp_config.json and @.agents/hooks.json, then query live B2B SLA exposure via MCP'</a:t>
-            </a:r>
-          </a:p>
-          <a:p>
-            <a:pPr>
-              <a:spcAft>
-                <a:spcPts val="800"/>
-              </a:spcAft>
-              <a:defRPr sz="1220">
-                <a:solidFill>
-                  <a:srgbClr val="F0F6FC"/>
-                </a:solidFill>
-                <a:latin typeface="Arial"/>
-              </a:defRPr>
-            </a:pPr>
-            <a:r>
-              <a:t>▸  Verify: Run ./labs/lab-03-mcp-and-hooks/verify.sh &amp; inspect data/logs/hook_audit.log</a:t>
-            </a:r>
-          </a:p>
-        </p:txBody>
-      </p:sp>
-      <p:sp>
-        <p:nvSpPr>
-          <p:cNvPr id="12" name="Rectangle 11"/>
+              <a:t>▸  Verify Command: Run `./labs/lab-02-rules-and-skills/verify.sh` and test `/learn`!</a:t>
+            </a:r>
+          </a:p>
+        </p:txBody>
+      </p:sp>
+      <p:sp>
+        <p:nvSpPr>
+          <p:cNvPr id="14" name="Rectangle 13"/>
           <p:cNvSpPr/>
           <p:nvPr/>
         </p:nvSpPr>
@@ -10162,7 +13306,7 @@
       </p:sp>
       <p:sp>
         <p:nvSpPr>
-          <p:cNvPr id="13" name="TextBox 12"/>
+          <p:cNvPr id="15" name="TextBox 14"/>
           <p:cNvSpPr txBox="1"/>
           <p:nvPr/>
         </p:nvSpPr>
@@ -10191,7 +13335,7 @@
               </a:defRPr>
             </a:pPr>
             <a:r>
-              <a:t>Open labs/lab-03-mcp-and-hooks/PROMPTS.md for copy-pasteable prompts to build and test your MCP server &amp; Hooks.    |    Slide 9/11</a:t>
+              <a:t>Delivered by Tryolabs • Self-Healing Checkpoint: ./labs/lab-02-rules-and-skills/apply_solution.sh    |    Slide 9/15</a:t>
             </a:r>
           </a:p>
         </p:txBody>

--- a/slides/antigravity_telecom_workshop_en.pptx
+++ b/slides/antigravity_telecom_workshop_en.pptx
@@ -379,7 +379,7 @@
             <a:pPr indent="0" algn="r">
               <a:buNone/>
             </a:pPr>
-            <a:fld id="{2D547849-9D7F-4F5D-AC36-C22435E1D331}" type="slidenum">
+            <a:fld id="{75AFA964-5731-4E5E-A67F-7F1BBEDEFA64}" type="slidenum">
               <a:rPr lang="en-US" sz="1400" b="0" u="none" strike="noStrike">
                 <a:solidFill>
                   <a:srgbClr val="000000"/>
@@ -553,7 +553,7 @@
               </a:lnSpc>
               <a:buNone/>
             </a:pPr>
-            <a:fld id="{3006CD36-906E-48AD-AAB4-9FC88C851AA8}" type="slidenum">
+            <a:fld id="{F9B3D6A2-91DE-424E-BBCD-778E583A98D7}" type="slidenum">
               <a:rPr lang="en-US" sz="1200" b="0" u="none" strike="noStrike">
                 <a:solidFill>
                   <a:srgbClr val="000000"/>
@@ -726,7 +726,7 @@
               </a:lnSpc>
               <a:buNone/>
             </a:pPr>
-            <a:fld id="{6A4FA274-204A-4C96-BE38-70C0E75B8780}" type="slidenum">
+            <a:fld id="{E9A6EBFD-86C6-4507-8A7B-1D255BDE0C5D}" type="slidenum">
               <a:rPr lang="en-US" sz="1200" b="0" u="none" strike="noStrike">
                 <a:solidFill>
                   <a:srgbClr val="000000"/>
@@ -899,7 +899,7 @@
               </a:lnSpc>
               <a:buNone/>
             </a:pPr>
-            <a:fld id="{992CAC15-61E9-4791-A3EE-307A21252969}" type="slidenum">
+            <a:fld id="{AD1D6A59-EA08-45DD-BC12-B58944E7644E}" type="slidenum">
               <a:rPr lang="en-US" sz="1200" b="0" u="none" strike="noStrike">
                 <a:solidFill>
                   <a:srgbClr val="000000"/>
@@ -1072,7 +1072,7 @@
               </a:lnSpc>
               <a:buNone/>
             </a:pPr>
-            <a:fld id="{FD6286B5-22DE-47AA-BD20-63DDF8E0CB59}" type="slidenum">
+            <a:fld id="{D8EACFAF-D645-4199-959C-CFF6DB79A25E}" type="slidenum">
               <a:rPr lang="en-US" sz="1200" b="0" u="none" strike="noStrike">
                 <a:solidFill>
                   <a:srgbClr val="000000"/>
@@ -1245,7 +1245,7 @@
               </a:lnSpc>
               <a:buNone/>
             </a:pPr>
-            <a:fld id="{08F520E8-35A3-416E-8C4B-CBF52F610D86}" type="slidenum">
+            <a:fld id="{8EF803F9-0D47-442E-ABFA-079A56A0A7D1}" type="slidenum">
               <a:rPr lang="en-US" sz="1200" b="0" u="none" strike="noStrike">
                 <a:solidFill>
                   <a:srgbClr val="000000"/>
@@ -1418,7 +1418,7 @@
               </a:lnSpc>
               <a:buNone/>
             </a:pPr>
-            <a:fld id="{6B3D0885-D2C3-453B-BB64-75D49CEEA2EA}" type="slidenum">
+            <a:fld id="{05A267C8-2085-40B4-B975-559A7A366C22}" type="slidenum">
               <a:rPr lang="en-US" sz="1200" b="0" u="none" strike="noStrike">
                 <a:solidFill>
                   <a:srgbClr val="000000"/>
@@ -1591,7 +1591,7 @@
               </a:lnSpc>
               <a:buNone/>
             </a:pPr>
-            <a:fld id="{4EE78DBE-40A6-405F-915D-F6E07A0C79D6}" type="slidenum">
+            <a:fld id="{374DAF90-A9AA-4C2E-96CD-4776FA117DAB}" type="slidenum">
               <a:rPr lang="en-US" sz="1200" b="0" u="none" strike="noStrike">
                 <a:solidFill>
                   <a:srgbClr val="000000"/>
@@ -1764,7 +1764,7 @@
               </a:lnSpc>
               <a:buNone/>
             </a:pPr>
-            <a:fld id="{E5BF3BFC-2E51-4C97-A9A8-46D44C58C882}" type="slidenum">
+            <a:fld id="{0A1ACCCB-3F2C-47D3-965C-1C23F01E9BE6}" type="slidenum">
               <a:rPr lang="en-US" sz="1200" b="0" u="none" strike="noStrike">
                 <a:solidFill>
                   <a:srgbClr val="000000"/>
@@ -1937,7 +1937,7 @@
               </a:lnSpc>
               <a:buNone/>
             </a:pPr>
-            <a:fld id="{D6B610F5-C7FC-4BD6-827A-F6BE2EED697C}" type="slidenum">
+            <a:fld id="{2CFC9F0D-6DBF-4228-8199-64BDAD22B729}" type="slidenum">
               <a:rPr lang="en-US" sz="1200" b="0" u="none" strike="noStrike">
                 <a:solidFill>
                   <a:srgbClr val="000000"/>
@@ -2110,7 +2110,7 @@
               </a:lnSpc>
               <a:buNone/>
             </a:pPr>
-            <a:fld id="{292EA2FE-398C-4956-8E33-AC058C2943EC}" type="slidenum">
+            <a:fld id="{53742BD8-A154-4249-AEA6-2A266A8AE2F9}" type="slidenum">
               <a:rPr lang="en-US" sz="1200" b="0" u="none" strike="noStrike">
                 <a:solidFill>
                   <a:srgbClr val="000000"/>
@@ -2283,7 +2283,7 @@
               </a:lnSpc>
               <a:buNone/>
             </a:pPr>
-            <a:fld id="{5D97A767-6529-4AC4-B680-891CFE7358DF}" type="slidenum">
+            <a:fld id="{56C528AA-D433-47C1-8134-8CE7F9F5D7E9}" type="slidenum">
               <a:rPr lang="en-US" sz="1200" b="0" u="none" strike="noStrike">
                 <a:solidFill>
                   <a:srgbClr val="000000"/>
@@ -2456,7 +2456,7 @@
               </a:lnSpc>
               <a:buNone/>
             </a:pPr>
-            <a:fld id="{ABE3C26D-BED7-44BC-9E40-7013033D247D}" type="slidenum">
+            <a:fld id="{4C5A68DD-275E-4F66-B081-9F16A878DC9D}" type="slidenum">
               <a:rPr lang="en-US" sz="1200" b="0" u="none" strike="noStrike">
                 <a:solidFill>
                   <a:srgbClr val="000000"/>
@@ -2629,7 +2629,7 @@
               </a:lnSpc>
               <a:buNone/>
             </a:pPr>
-            <a:fld id="{8C0A2773-7AE1-4614-B941-66C00643C3C8}" type="slidenum">
+            <a:fld id="{BB7707A9-3AAC-44CB-AF19-D6E2E05E3BD3}" type="slidenum">
               <a:rPr lang="en-US" sz="1200" b="0" u="none" strike="noStrike">
                 <a:solidFill>
                   <a:srgbClr val="000000"/>
@@ -2802,7 +2802,7 @@
               </a:lnSpc>
               <a:buNone/>
             </a:pPr>
-            <a:fld id="{7C920E4D-DE26-4080-BBF3-5121682704AF}" type="slidenum">
+            <a:fld id="{91E5FBB0-CB85-40D1-9026-9F198B2C524F}" type="slidenum">
               <a:rPr lang="en-US" sz="1200" b="0" u="none" strike="noStrike">
                 <a:solidFill>
                   <a:srgbClr val="000000"/>
@@ -2975,7 +2975,7 @@
               </a:lnSpc>
               <a:buNone/>
             </a:pPr>
-            <a:fld id="{D3B09AE6-9396-4AE3-B76C-1664AB5B5612}" type="slidenum">
+            <a:fld id="{88CEF461-DC7E-4CD6-9B45-9EC8D8370BEC}" type="slidenum">
               <a:rPr lang="en-US" sz="1200" b="0" u="none" strike="noStrike">
                 <a:solidFill>
                   <a:srgbClr val="000000"/>
@@ -3292,7 +3292,7 @@
               </a:lnSpc>
               <a:buNone/>
             </a:pPr>
-            <a:fld id="{4DBFE58A-5FB2-4456-BFEF-802B958EF614}" type="slidenum">
+            <a:fld id="{7A4DE074-64DD-4FB1-8EA8-C3747D77CB3E}" type="slidenum">
               <a:rPr lang="en-US" sz="1200" b="0" u="none" strike="noStrike">
                 <a:solidFill>
                   <a:schemeClr val="dk1">
@@ -4001,7 +4001,7 @@
               </a:lnSpc>
               <a:buNone/>
             </a:pPr>
-            <a:fld id="{A767D329-F899-4FB7-8C6D-65542EF9F7E5}" type="slidenum">
+            <a:fld id="{FC3860A3-3A84-4418-A96C-422627A63C79}" type="slidenum">
               <a:rPr lang="en-US" sz="1200" b="0" u="none" strike="noStrike">
                 <a:solidFill>
                   <a:schemeClr val="dk1">
@@ -4796,7 +4796,7 @@
               </a:lnSpc>
               <a:buNone/>
             </a:pPr>
-            <a:fld id="{DB91E8B5-5680-4EB3-B385-2542832340C5}" type="slidenum">
+            <a:fld id="{7D14EC14-AC1F-4C0F-9EA7-45A63AD816BC}" type="slidenum">
               <a:rPr lang="en-US" sz="1200" b="0" u="none" strike="noStrike">
                 <a:solidFill>
                   <a:schemeClr val="dk1">
@@ -5421,7 +5421,7 @@
               </a:lnSpc>
               <a:buNone/>
             </a:pPr>
-            <a:fld id="{80E92F53-D24A-4992-B51A-F63CBAD1BB2A}" type="slidenum">
+            <a:fld id="{606AA489-0C3A-4473-9B9B-6D616C058FA6}" type="slidenum">
               <a:rPr lang="en-US" sz="1200" b="0" u="none" strike="noStrike">
                 <a:solidFill>
                   <a:schemeClr val="dk1">
@@ -6046,7 +6046,7 @@
               </a:lnSpc>
               <a:buNone/>
             </a:pPr>
-            <a:fld id="{DC375991-ED1B-4D04-90AD-5E0696395F65}" type="slidenum">
+            <a:fld id="{BEBDEF51-6F42-48CD-AB77-BC8A28B944F0}" type="slidenum">
               <a:rPr lang="en-US" sz="1200" b="0" u="none" strike="noStrike">
                 <a:solidFill>
                   <a:schemeClr val="dk1">
@@ -6671,7 +6671,7 @@
               </a:lnSpc>
               <a:buNone/>
             </a:pPr>
-            <a:fld id="{E53883BC-4E0A-4CD5-B21D-E5FC5E607956}" type="slidenum">
+            <a:fld id="{5961DDB7-AAB0-47DD-AB5B-32FE834DF43A}" type="slidenum">
               <a:rPr lang="en-US" sz="1200" b="0" u="none" strike="noStrike">
                 <a:solidFill>
                   <a:schemeClr val="dk1">
@@ -7080,7 +7080,7 @@
               </a:lnSpc>
               <a:buNone/>
             </a:pPr>
-            <a:fld id="{83861FA3-BB7D-4C71-B6BB-E71D7DD2A371}" type="slidenum">
+            <a:fld id="{EB537234-56BD-483F-9C27-651501BD4739}" type="slidenum">
               <a:rPr lang="en-US" sz="1200" b="0" u="none" strike="noStrike">
                 <a:solidFill>
                   <a:schemeClr val="dk1">
@@ -8011,7 +8011,7 @@
               </a:lnSpc>
               <a:buNone/>
             </a:pPr>
-            <a:fld id="{46AC3F27-EF34-4635-83A3-68852E018BA6}" type="slidenum">
+            <a:fld id="{9937A513-51D0-4006-8A8B-C2FE431DD99B}" type="slidenum">
               <a:rPr lang="en-US" sz="1200" b="0" u="none" strike="noStrike">
                 <a:solidFill>
                   <a:schemeClr val="dk1">
@@ -9170,7 +9170,7 @@
               </a:lnSpc>
               <a:buNone/>
             </a:pPr>
-            <a:fld id="{07D6E7EA-BECC-4115-AE6C-ACD0BDBB2940}" type="slidenum">
+            <a:fld id="{0AA273AA-4656-442B-A51A-BD89AFC7E3DB}" type="slidenum">
               <a:rPr lang="en-US" sz="1200" b="0" u="none" strike="noStrike">
                 <a:solidFill>
                   <a:schemeClr val="dk1">
@@ -9489,7 +9489,7 @@
               </a:lnSpc>
               <a:buNone/>
             </a:pPr>
-            <a:fld id="{DCDDEB0F-B554-408E-AB9D-9F9B7FDF97BC}" type="slidenum">
+            <a:fld id="{642F0473-D6E2-4F28-A154-BAFC924C9339}" type="slidenum">
               <a:rPr lang="en-US" sz="1200" b="0" u="none" strike="noStrike">
                 <a:solidFill>
                   <a:schemeClr val="dk1">
@@ -9736,7 +9736,7 @@
               </a:lnSpc>
               <a:buNone/>
             </a:pPr>
-            <a:fld id="{95317A50-ADBA-4983-806A-7FCAC834C166}" type="slidenum">
+            <a:fld id="{3AB5ED79-7F89-44A5-B5B4-0425E873A9A5}" type="slidenum">
               <a:rPr lang="en-US" sz="1200" b="0" u="none" strike="noStrike">
                 <a:solidFill>
                   <a:schemeClr val="dk1">
@@ -13193,7 +13193,29 @@
                 <a:uFillTx/>
                 <a:latin typeface="Arial"/>
               </a:rPr>
-              <a:t> Pass all 6 MCP &amp; Hook security tests in </a:t>
+              <a:t> Pass all 3 MCP &amp; Hook security tests (</a:t>
+            </a:r>
+            <a:r>
+              <a:rPr lang="en-US" sz="1100" b="1" u="none" strike="noStrike">
+                <a:solidFill>
+                  <a:srgbClr val="20E3B2"/>
+                </a:solidFill>
+                <a:effectLst/>
+                <a:uFillTx/>
+                <a:latin typeface="Courier New"/>
+              </a:rPr>
+              <a:t>11 passed</a:t>
+            </a:r>
+            <a:r>
+              <a:rPr lang="en-US" sz="1100" b="0" u="none" strike="noStrike">
+                <a:solidFill>
+                  <a:srgbClr val="F0F6FC"/>
+                </a:solidFill>
+                <a:effectLst/>
+                <a:uFillTx/>
+                <a:latin typeface="Arial"/>
+              </a:rPr>
+              <a:t> cumulative) in </a:t>
             </a:r>
             <a:r>
               <a:rPr lang="en-US" sz="1100" b="1" u="none" strike="noStrike">
@@ -14558,7 +14580,7 @@
                 <a:uFillTx/>
                 <a:latin typeface="Courier New"/>
               </a:rPr>
-              <a:t>6 passed</a:t>
+              <a:t>11 passed</a:t>
             </a:r>
             <a:r>
               <a:rPr lang="en-US" sz="1100" b="0" u="none" strike="noStrike">
@@ -14569,7 +14591,7 @@
                 <a:uFillTx/>
                 <a:latin typeface="Arial"/>
               </a:rPr>
-              <a:t> + audit log verified).</a:t>
+              <a:t> cumulative across Labs 01–03 + audit log verified).</a:t>
             </a:r>
             <a:endParaRPr lang="en-US" sz="1100" b="0" u="none" strike="noStrike">
               <a:solidFill>
@@ -23195,7 +23217,7 @@
                 <a:uFillTx/>
                 <a:latin typeface="Arial"/>
               </a:rPr>
-              <a:t> Pass all 5 unit/integration tests in </a:t>
+              <a:t> Pass all 4 unit/integration tests in </a:t>
             </a:r>
             <a:r>
               <a:rPr lang="en-US" sz="1100" b="1" u="none" strike="noStrike">
@@ -24428,7 +24450,7 @@
                 <a:uFillTx/>
                 <a:latin typeface="Courier New"/>
               </a:rPr>
-              <a:t>5 passed</a:t>
+              <a:t>4 passed</a:t>
             </a:r>
             <a:r>
               <a:rPr lang="en-US" sz="1100" b="0" u="none" strike="noStrike">
